--- a/default/enemy.pptx
+++ b/default/enemy.pptx
@@ -8,8 +8,12 @@
     <p:sldId id="257" r:id="rId2"/>
     <p:sldId id="259" r:id="rId3"/>
     <p:sldId id="260" r:id="rId4"/>
-    <p:sldId id="258" r:id="rId5"/>
-    <p:sldId id="261" r:id="rId6"/>
+    <p:sldId id="262" r:id="rId5"/>
+    <p:sldId id="265" r:id="rId6"/>
+    <p:sldId id="258" r:id="rId7"/>
+    <p:sldId id="261" r:id="rId8"/>
+    <p:sldId id="263" r:id="rId9"/>
+    <p:sldId id="264" r:id="rId10"/>
   </p:sldIdLst>
   <p:sldSz cx="12192000" cy="6858000"/>
   <p:notesSz cx="6858000" cy="9144000"/>
@@ -158,10 +162,9 @@
           </a:lstStyle>
           <a:p>
             <a:r>
-              <a:rPr kumimoji="1" lang="ja-JP" altLang="en-US" smtClean="0"/>
+              <a:rPr kumimoji="1" lang="ja-JP" altLang="en-US"/>
               <a:t>マスター タイトルの書式設定</a:t>
             </a:r>
-            <a:endParaRPr kumimoji="1" lang="ja-JP" altLang="en-US"/>
           </a:p>
         </p:txBody>
       </p:sp>
@@ -223,10 +226,9 @@
           </a:lstStyle>
           <a:p>
             <a:r>
-              <a:rPr kumimoji="1" lang="ja-JP" altLang="en-US" smtClean="0"/>
+              <a:rPr kumimoji="1" lang="ja-JP" altLang="en-US"/>
               <a:t>マスター サブタイトルの書式設定</a:t>
             </a:r>
-            <a:endParaRPr kumimoji="1" lang="ja-JP" altLang="en-US"/>
           </a:p>
         </p:txBody>
       </p:sp>
@@ -247,7 +249,7 @@
           <a:p>
             <a:fld id="{0E085FA6-3BB9-47BA-8D81-299A75D1B58A}" type="datetimeFigureOut">
               <a:rPr kumimoji="1" lang="ja-JP" altLang="en-US" smtClean="0"/>
-              <a:t>2025/6/3</a:t>
+              <a:t>2025/10/6</a:t>
             </a:fld>
             <a:endParaRPr kumimoji="1" lang="ja-JP" altLang="en-US"/>
           </a:p>
@@ -341,10 +343,9 @@
           <a:lstStyle/>
           <a:p>
             <a:r>
-              <a:rPr kumimoji="1" lang="ja-JP" altLang="en-US" smtClean="0"/>
+              <a:rPr kumimoji="1" lang="ja-JP" altLang="en-US"/>
               <a:t>マスター タイトルの書式設定</a:t>
             </a:r>
-            <a:endParaRPr kumimoji="1" lang="ja-JP" altLang="en-US"/>
           </a:p>
         </p:txBody>
       </p:sp>
@@ -365,70 +366,69 @@
           <a:p>
             <a:pPr lvl="0"/>
             <a:r>
-              <a:rPr kumimoji="1" lang="ja-JP" altLang="en-US" smtClean="0"/>
+              <a:rPr kumimoji="1" lang="ja-JP" altLang="en-US"/>
               <a:t>マスター テキストの書式設定</a:t>
             </a:r>
           </a:p>
           <a:p>
             <a:pPr lvl="1"/>
             <a:r>
-              <a:rPr kumimoji="1" lang="ja-JP" altLang="en-US" smtClean="0"/>
+              <a:rPr kumimoji="1" lang="ja-JP" altLang="en-US"/>
               <a:t>第 </a:t>
             </a:r>
             <a:r>
-              <a:rPr kumimoji="1" lang="en-US" altLang="ja-JP" smtClean="0"/>
+              <a:rPr kumimoji="1" lang="en-US" altLang="ja-JP"/>
               <a:t>2 </a:t>
             </a:r>
             <a:r>
-              <a:rPr kumimoji="1" lang="ja-JP" altLang="en-US" smtClean="0"/>
+              <a:rPr kumimoji="1" lang="ja-JP" altLang="en-US"/>
               <a:t>レベル</a:t>
             </a:r>
           </a:p>
           <a:p>
             <a:pPr lvl="2"/>
             <a:r>
-              <a:rPr kumimoji="1" lang="ja-JP" altLang="en-US" smtClean="0"/>
+              <a:rPr kumimoji="1" lang="ja-JP" altLang="en-US"/>
               <a:t>第 </a:t>
             </a:r>
             <a:r>
-              <a:rPr kumimoji="1" lang="en-US" altLang="ja-JP" smtClean="0"/>
+              <a:rPr kumimoji="1" lang="en-US" altLang="ja-JP"/>
               <a:t>3 </a:t>
             </a:r>
             <a:r>
-              <a:rPr kumimoji="1" lang="ja-JP" altLang="en-US" smtClean="0"/>
+              <a:rPr kumimoji="1" lang="ja-JP" altLang="en-US"/>
               <a:t>レベル</a:t>
             </a:r>
           </a:p>
           <a:p>
             <a:pPr lvl="3"/>
             <a:r>
-              <a:rPr kumimoji="1" lang="ja-JP" altLang="en-US" smtClean="0"/>
+              <a:rPr kumimoji="1" lang="ja-JP" altLang="en-US"/>
               <a:t>第 </a:t>
             </a:r>
             <a:r>
-              <a:rPr kumimoji="1" lang="en-US" altLang="ja-JP" smtClean="0"/>
+              <a:rPr kumimoji="1" lang="en-US" altLang="ja-JP"/>
               <a:t>4 </a:t>
             </a:r>
             <a:r>
-              <a:rPr kumimoji="1" lang="ja-JP" altLang="en-US" smtClean="0"/>
+              <a:rPr kumimoji="1" lang="ja-JP" altLang="en-US"/>
               <a:t>レベル</a:t>
             </a:r>
           </a:p>
           <a:p>
             <a:pPr lvl="4"/>
             <a:r>
-              <a:rPr kumimoji="1" lang="ja-JP" altLang="en-US" smtClean="0"/>
+              <a:rPr kumimoji="1" lang="ja-JP" altLang="en-US"/>
               <a:t>第 </a:t>
             </a:r>
             <a:r>
-              <a:rPr kumimoji="1" lang="en-US" altLang="ja-JP" smtClean="0"/>
+              <a:rPr kumimoji="1" lang="en-US" altLang="ja-JP"/>
               <a:t>5 </a:t>
             </a:r>
             <a:r>
-              <a:rPr kumimoji="1" lang="ja-JP" altLang="en-US" smtClean="0"/>
+              <a:rPr kumimoji="1" lang="ja-JP" altLang="en-US"/>
               <a:t>レベル</a:t>
             </a:r>
-            <a:endParaRPr kumimoji="1" lang="ja-JP" altLang="en-US"/>
           </a:p>
         </p:txBody>
       </p:sp>
@@ -449,7 +449,7 @@
           <a:p>
             <a:fld id="{0E085FA6-3BB9-47BA-8D81-299A75D1B58A}" type="datetimeFigureOut">
               <a:rPr kumimoji="1" lang="ja-JP" altLang="en-US" smtClean="0"/>
-              <a:t>2025/6/3</a:t>
+              <a:t>2025/10/6</a:t>
             </a:fld>
             <a:endParaRPr kumimoji="1" lang="ja-JP" altLang="en-US"/>
           </a:p>
@@ -548,10 +548,9 @@
           <a:lstStyle/>
           <a:p>
             <a:r>
-              <a:rPr kumimoji="1" lang="ja-JP" altLang="en-US" smtClean="0"/>
+              <a:rPr kumimoji="1" lang="ja-JP" altLang="en-US"/>
               <a:t>マスター タイトルの書式設定</a:t>
             </a:r>
-            <a:endParaRPr kumimoji="1" lang="ja-JP" altLang="en-US"/>
           </a:p>
         </p:txBody>
       </p:sp>
@@ -577,70 +576,69 @@
           <a:p>
             <a:pPr lvl="0"/>
             <a:r>
-              <a:rPr kumimoji="1" lang="ja-JP" altLang="en-US" smtClean="0"/>
+              <a:rPr kumimoji="1" lang="ja-JP" altLang="en-US"/>
               <a:t>マスター テキストの書式設定</a:t>
             </a:r>
           </a:p>
           <a:p>
             <a:pPr lvl="1"/>
             <a:r>
-              <a:rPr kumimoji="1" lang="ja-JP" altLang="en-US" smtClean="0"/>
+              <a:rPr kumimoji="1" lang="ja-JP" altLang="en-US"/>
               <a:t>第 </a:t>
             </a:r>
             <a:r>
-              <a:rPr kumimoji="1" lang="en-US" altLang="ja-JP" smtClean="0"/>
+              <a:rPr kumimoji="1" lang="en-US" altLang="ja-JP"/>
               <a:t>2 </a:t>
             </a:r>
             <a:r>
-              <a:rPr kumimoji="1" lang="ja-JP" altLang="en-US" smtClean="0"/>
+              <a:rPr kumimoji="1" lang="ja-JP" altLang="en-US"/>
               <a:t>レベル</a:t>
             </a:r>
           </a:p>
           <a:p>
             <a:pPr lvl="2"/>
             <a:r>
-              <a:rPr kumimoji="1" lang="ja-JP" altLang="en-US" smtClean="0"/>
+              <a:rPr kumimoji="1" lang="ja-JP" altLang="en-US"/>
               <a:t>第 </a:t>
             </a:r>
             <a:r>
-              <a:rPr kumimoji="1" lang="en-US" altLang="ja-JP" smtClean="0"/>
+              <a:rPr kumimoji="1" lang="en-US" altLang="ja-JP"/>
               <a:t>3 </a:t>
             </a:r>
             <a:r>
-              <a:rPr kumimoji="1" lang="ja-JP" altLang="en-US" smtClean="0"/>
+              <a:rPr kumimoji="1" lang="ja-JP" altLang="en-US"/>
               <a:t>レベル</a:t>
             </a:r>
           </a:p>
           <a:p>
             <a:pPr lvl="3"/>
             <a:r>
-              <a:rPr kumimoji="1" lang="ja-JP" altLang="en-US" smtClean="0"/>
+              <a:rPr kumimoji="1" lang="ja-JP" altLang="en-US"/>
               <a:t>第 </a:t>
             </a:r>
             <a:r>
-              <a:rPr kumimoji="1" lang="en-US" altLang="ja-JP" smtClean="0"/>
+              <a:rPr kumimoji="1" lang="en-US" altLang="ja-JP"/>
               <a:t>4 </a:t>
             </a:r>
             <a:r>
-              <a:rPr kumimoji="1" lang="ja-JP" altLang="en-US" smtClean="0"/>
+              <a:rPr kumimoji="1" lang="ja-JP" altLang="en-US"/>
               <a:t>レベル</a:t>
             </a:r>
           </a:p>
           <a:p>
             <a:pPr lvl="4"/>
             <a:r>
-              <a:rPr kumimoji="1" lang="ja-JP" altLang="en-US" smtClean="0"/>
+              <a:rPr kumimoji="1" lang="ja-JP" altLang="en-US"/>
               <a:t>第 </a:t>
             </a:r>
             <a:r>
-              <a:rPr kumimoji="1" lang="en-US" altLang="ja-JP" smtClean="0"/>
+              <a:rPr kumimoji="1" lang="en-US" altLang="ja-JP"/>
               <a:t>5 </a:t>
             </a:r>
             <a:r>
-              <a:rPr kumimoji="1" lang="ja-JP" altLang="en-US" smtClean="0"/>
+              <a:rPr kumimoji="1" lang="ja-JP" altLang="en-US"/>
               <a:t>レベル</a:t>
             </a:r>
-            <a:endParaRPr kumimoji="1" lang="ja-JP" altLang="en-US"/>
           </a:p>
         </p:txBody>
       </p:sp>
@@ -661,7 +659,7 @@
           <a:p>
             <a:fld id="{0E085FA6-3BB9-47BA-8D81-299A75D1B58A}" type="datetimeFigureOut">
               <a:rPr kumimoji="1" lang="ja-JP" altLang="en-US" smtClean="0"/>
-              <a:t>2025/6/3</a:t>
+              <a:t>2025/10/6</a:t>
             </a:fld>
             <a:endParaRPr kumimoji="1" lang="ja-JP" altLang="en-US"/>
           </a:p>
@@ -755,10 +753,9 @@
           <a:lstStyle/>
           <a:p>
             <a:r>
-              <a:rPr kumimoji="1" lang="ja-JP" altLang="en-US" smtClean="0"/>
+              <a:rPr kumimoji="1" lang="ja-JP" altLang="en-US"/>
               <a:t>マスター タイトルの書式設定</a:t>
             </a:r>
-            <a:endParaRPr kumimoji="1" lang="ja-JP" altLang="en-US"/>
           </a:p>
         </p:txBody>
       </p:sp>
@@ -779,70 +776,69 @@
           <a:p>
             <a:pPr lvl="0"/>
             <a:r>
-              <a:rPr kumimoji="1" lang="ja-JP" altLang="en-US" smtClean="0"/>
+              <a:rPr kumimoji="1" lang="ja-JP" altLang="en-US"/>
               <a:t>マスター テキストの書式設定</a:t>
             </a:r>
           </a:p>
           <a:p>
             <a:pPr lvl="1"/>
             <a:r>
-              <a:rPr kumimoji="1" lang="ja-JP" altLang="en-US" smtClean="0"/>
+              <a:rPr kumimoji="1" lang="ja-JP" altLang="en-US"/>
               <a:t>第 </a:t>
             </a:r>
             <a:r>
-              <a:rPr kumimoji="1" lang="en-US" altLang="ja-JP" smtClean="0"/>
+              <a:rPr kumimoji="1" lang="en-US" altLang="ja-JP"/>
               <a:t>2 </a:t>
             </a:r>
             <a:r>
-              <a:rPr kumimoji="1" lang="ja-JP" altLang="en-US" smtClean="0"/>
+              <a:rPr kumimoji="1" lang="ja-JP" altLang="en-US"/>
               <a:t>レベル</a:t>
             </a:r>
           </a:p>
           <a:p>
             <a:pPr lvl="2"/>
             <a:r>
-              <a:rPr kumimoji="1" lang="ja-JP" altLang="en-US" smtClean="0"/>
+              <a:rPr kumimoji="1" lang="ja-JP" altLang="en-US"/>
               <a:t>第 </a:t>
             </a:r>
             <a:r>
-              <a:rPr kumimoji="1" lang="en-US" altLang="ja-JP" smtClean="0"/>
+              <a:rPr kumimoji="1" lang="en-US" altLang="ja-JP"/>
               <a:t>3 </a:t>
             </a:r>
             <a:r>
-              <a:rPr kumimoji="1" lang="ja-JP" altLang="en-US" smtClean="0"/>
+              <a:rPr kumimoji="1" lang="ja-JP" altLang="en-US"/>
               <a:t>レベル</a:t>
             </a:r>
           </a:p>
           <a:p>
             <a:pPr lvl="3"/>
             <a:r>
-              <a:rPr kumimoji="1" lang="ja-JP" altLang="en-US" smtClean="0"/>
+              <a:rPr kumimoji="1" lang="ja-JP" altLang="en-US"/>
               <a:t>第 </a:t>
             </a:r>
             <a:r>
-              <a:rPr kumimoji="1" lang="en-US" altLang="ja-JP" smtClean="0"/>
+              <a:rPr kumimoji="1" lang="en-US" altLang="ja-JP"/>
               <a:t>4 </a:t>
             </a:r>
             <a:r>
-              <a:rPr kumimoji="1" lang="ja-JP" altLang="en-US" smtClean="0"/>
+              <a:rPr kumimoji="1" lang="ja-JP" altLang="en-US"/>
               <a:t>レベル</a:t>
             </a:r>
           </a:p>
           <a:p>
             <a:pPr lvl="4"/>
             <a:r>
-              <a:rPr kumimoji="1" lang="ja-JP" altLang="en-US" smtClean="0"/>
+              <a:rPr kumimoji="1" lang="ja-JP" altLang="en-US"/>
               <a:t>第 </a:t>
             </a:r>
             <a:r>
-              <a:rPr kumimoji="1" lang="en-US" altLang="ja-JP" smtClean="0"/>
+              <a:rPr kumimoji="1" lang="en-US" altLang="ja-JP"/>
               <a:t>5 </a:t>
             </a:r>
             <a:r>
-              <a:rPr kumimoji="1" lang="ja-JP" altLang="en-US" smtClean="0"/>
+              <a:rPr kumimoji="1" lang="ja-JP" altLang="en-US"/>
               <a:t>レベル</a:t>
             </a:r>
-            <a:endParaRPr kumimoji="1" lang="ja-JP" altLang="en-US"/>
           </a:p>
         </p:txBody>
       </p:sp>
@@ -863,7 +859,7 @@
           <a:p>
             <a:fld id="{0E085FA6-3BB9-47BA-8D81-299A75D1B58A}" type="datetimeFigureOut">
               <a:rPr kumimoji="1" lang="ja-JP" altLang="en-US" smtClean="0"/>
-              <a:t>2025/6/3</a:t>
+              <a:t>2025/10/6</a:t>
             </a:fld>
             <a:endParaRPr kumimoji="1" lang="ja-JP" altLang="en-US"/>
           </a:p>
@@ -966,10 +962,9 @@
           </a:lstStyle>
           <a:p>
             <a:r>
-              <a:rPr kumimoji="1" lang="ja-JP" altLang="en-US" smtClean="0"/>
+              <a:rPr kumimoji="1" lang="ja-JP" altLang="en-US"/>
               <a:t>マスター タイトルの書式設定</a:t>
             </a:r>
-            <a:endParaRPr kumimoji="1" lang="ja-JP" altLang="en-US"/>
           </a:p>
         </p:txBody>
       </p:sp>
@@ -1086,7 +1081,7 @@
           <a:p>
             <a:pPr lvl="0"/>
             <a:r>
-              <a:rPr kumimoji="1" lang="ja-JP" altLang="en-US" smtClean="0"/>
+              <a:rPr kumimoji="1" lang="ja-JP" altLang="en-US"/>
               <a:t>マスター テキストの書式設定</a:t>
             </a:r>
           </a:p>
@@ -1109,7 +1104,7 @@
           <a:p>
             <a:fld id="{0E085FA6-3BB9-47BA-8D81-299A75D1B58A}" type="datetimeFigureOut">
               <a:rPr kumimoji="1" lang="ja-JP" altLang="en-US" smtClean="0"/>
-              <a:t>2025/6/3</a:t>
+              <a:t>2025/10/6</a:t>
             </a:fld>
             <a:endParaRPr kumimoji="1" lang="ja-JP" altLang="en-US"/>
           </a:p>
@@ -1203,10 +1198,9 @@
           <a:lstStyle/>
           <a:p>
             <a:r>
-              <a:rPr kumimoji="1" lang="ja-JP" altLang="en-US" smtClean="0"/>
+              <a:rPr kumimoji="1" lang="ja-JP" altLang="en-US"/>
               <a:t>マスター タイトルの書式設定</a:t>
             </a:r>
-            <a:endParaRPr kumimoji="1" lang="ja-JP" altLang="en-US"/>
           </a:p>
         </p:txBody>
       </p:sp>
@@ -1232,70 +1226,69 @@
           <a:p>
             <a:pPr lvl="0"/>
             <a:r>
-              <a:rPr kumimoji="1" lang="ja-JP" altLang="en-US" smtClean="0"/>
+              <a:rPr kumimoji="1" lang="ja-JP" altLang="en-US"/>
               <a:t>マスター テキストの書式設定</a:t>
             </a:r>
           </a:p>
           <a:p>
             <a:pPr lvl="1"/>
             <a:r>
-              <a:rPr kumimoji="1" lang="ja-JP" altLang="en-US" smtClean="0"/>
+              <a:rPr kumimoji="1" lang="ja-JP" altLang="en-US"/>
               <a:t>第 </a:t>
             </a:r>
             <a:r>
-              <a:rPr kumimoji="1" lang="en-US" altLang="ja-JP" smtClean="0"/>
+              <a:rPr kumimoji="1" lang="en-US" altLang="ja-JP"/>
               <a:t>2 </a:t>
             </a:r>
             <a:r>
-              <a:rPr kumimoji="1" lang="ja-JP" altLang="en-US" smtClean="0"/>
+              <a:rPr kumimoji="1" lang="ja-JP" altLang="en-US"/>
               <a:t>レベル</a:t>
             </a:r>
           </a:p>
           <a:p>
             <a:pPr lvl="2"/>
             <a:r>
-              <a:rPr kumimoji="1" lang="ja-JP" altLang="en-US" smtClean="0"/>
+              <a:rPr kumimoji="1" lang="ja-JP" altLang="en-US"/>
               <a:t>第 </a:t>
             </a:r>
             <a:r>
-              <a:rPr kumimoji="1" lang="en-US" altLang="ja-JP" smtClean="0"/>
+              <a:rPr kumimoji="1" lang="en-US" altLang="ja-JP"/>
               <a:t>3 </a:t>
             </a:r>
             <a:r>
-              <a:rPr kumimoji="1" lang="ja-JP" altLang="en-US" smtClean="0"/>
+              <a:rPr kumimoji="1" lang="ja-JP" altLang="en-US"/>
               <a:t>レベル</a:t>
             </a:r>
           </a:p>
           <a:p>
             <a:pPr lvl="3"/>
             <a:r>
-              <a:rPr kumimoji="1" lang="ja-JP" altLang="en-US" smtClean="0"/>
+              <a:rPr kumimoji="1" lang="ja-JP" altLang="en-US"/>
               <a:t>第 </a:t>
             </a:r>
             <a:r>
-              <a:rPr kumimoji="1" lang="en-US" altLang="ja-JP" smtClean="0"/>
+              <a:rPr kumimoji="1" lang="en-US" altLang="ja-JP"/>
               <a:t>4 </a:t>
             </a:r>
             <a:r>
-              <a:rPr kumimoji="1" lang="ja-JP" altLang="en-US" smtClean="0"/>
+              <a:rPr kumimoji="1" lang="ja-JP" altLang="en-US"/>
               <a:t>レベル</a:t>
             </a:r>
           </a:p>
           <a:p>
             <a:pPr lvl="4"/>
             <a:r>
-              <a:rPr kumimoji="1" lang="ja-JP" altLang="en-US" smtClean="0"/>
+              <a:rPr kumimoji="1" lang="ja-JP" altLang="en-US"/>
               <a:t>第 </a:t>
             </a:r>
             <a:r>
-              <a:rPr kumimoji="1" lang="en-US" altLang="ja-JP" smtClean="0"/>
+              <a:rPr kumimoji="1" lang="en-US" altLang="ja-JP"/>
               <a:t>5 </a:t>
             </a:r>
             <a:r>
-              <a:rPr kumimoji="1" lang="ja-JP" altLang="en-US" smtClean="0"/>
+              <a:rPr kumimoji="1" lang="ja-JP" altLang="en-US"/>
               <a:t>レベル</a:t>
             </a:r>
-            <a:endParaRPr kumimoji="1" lang="ja-JP" altLang="en-US"/>
           </a:p>
         </p:txBody>
       </p:sp>
@@ -1321,70 +1314,69 @@
           <a:p>
             <a:pPr lvl="0"/>
             <a:r>
-              <a:rPr kumimoji="1" lang="ja-JP" altLang="en-US" smtClean="0"/>
+              <a:rPr kumimoji="1" lang="ja-JP" altLang="en-US"/>
               <a:t>マスター テキストの書式設定</a:t>
             </a:r>
           </a:p>
           <a:p>
             <a:pPr lvl="1"/>
             <a:r>
-              <a:rPr kumimoji="1" lang="ja-JP" altLang="en-US" smtClean="0"/>
+              <a:rPr kumimoji="1" lang="ja-JP" altLang="en-US"/>
               <a:t>第 </a:t>
             </a:r>
             <a:r>
-              <a:rPr kumimoji="1" lang="en-US" altLang="ja-JP" smtClean="0"/>
+              <a:rPr kumimoji="1" lang="en-US" altLang="ja-JP"/>
               <a:t>2 </a:t>
             </a:r>
             <a:r>
-              <a:rPr kumimoji="1" lang="ja-JP" altLang="en-US" smtClean="0"/>
+              <a:rPr kumimoji="1" lang="ja-JP" altLang="en-US"/>
               <a:t>レベル</a:t>
             </a:r>
           </a:p>
           <a:p>
             <a:pPr lvl="2"/>
             <a:r>
-              <a:rPr kumimoji="1" lang="ja-JP" altLang="en-US" smtClean="0"/>
+              <a:rPr kumimoji="1" lang="ja-JP" altLang="en-US"/>
               <a:t>第 </a:t>
             </a:r>
             <a:r>
-              <a:rPr kumimoji="1" lang="en-US" altLang="ja-JP" smtClean="0"/>
+              <a:rPr kumimoji="1" lang="en-US" altLang="ja-JP"/>
               <a:t>3 </a:t>
             </a:r>
             <a:r>
-              <a:rPr kumimoji="1" lang="ja-JP" altLang="en-US" smtClean="0"/>
+              <a:rPr kumimoji="1" lang="ja-JP" altLang="en-US"/>
               <a:t>レベル</a:t>
             </a:r>
           </a:p>
           <a:p>
             <a:pPr lvl="3"/>
             <a:r>
-              <a:rPr kumimoji="1" lang="ja-JP" altLang="en-US" smtClean="0"/>
+              <a:rPr kumimoji="1" lang="ja-JP" altLang="en-US"/>
               <a:t>第 </a:t>
             </a:r>
             <a:r>
-              <a:rPr kumimoji="1" lang="en-US" altLang="ja-JP" smtClean="0"/>
+              <a:rPr kumimoji="1" lang="en-US" altLang="ja-JP"/>
               <a:t>4 </a:t>
             </a:r>
             <a:r>
-              <a:rPr kumimoji="1" lang="ja-JP" altLang="en-US" smtClean="0"/>
+              <a:rPr kumimoji="1" lang="ja-JP" altLang="en-US"/>
               <a:t>レベル</a:t>
             </a:r>
           </a:p>
           <a:p>
             <a:pPr lvl="4"/>
             <a:r>
-              <a:rPr kumimoji="1" lang="ja-JP" altLang="en-US" smtClean="0"/>
+              <a:rPr kumimoji="1" lang="ja-JP" altLang="en-US"/>
               <a:t>第 </a:t>
             </a:r>
             <a:r>
-              <a:rPr kumimoji="1" lang="en-US" altLang="ja-JP" smtClean="0"/>
+              <a:rPr kumimoji="1" lang="en-US" altLang="ja-JP"/>
               <a:t>5 </a:t>
             </a:r>
             <a:r>
-              <a:rPr kumimoji="1" lang="ja-JP" altLang="en-US" smtClean="0"/>
+              <a:rPr kumimoji="1" lang="ja-JP" altLang="en-US"/>
               <a:t>レベル</a:t>
             </a:r>
-            <a:endParaRPr kumimoji="1" lang="ja-JP" altLang="en-US"/>
           </a:p>
         </p:txBody>
       </p:sp>
@@ -1405,7 +1397,7 @@
           <a:p>
             <a:fld id="{0E085FA6-3BB9-47BA-8D81-299A75D1B58A}" type="datetimeFigureOut">
               <a:rPr kumimoji="1" lang="ja-JP" altLang="en-US" smtClean="0"/>
-              <a:t>2025/6/3</a:t>
+              <a:t>2025/10/6</a:t>
             </a:fld>
             <a:endParaRPr kumimoji="1" lang="ja-JP" altLang="en-US"/>
           </a:p>
@@ -1504,10 +1496,9 @@
           <a:lstStyle/>
           <a:p>
             <a:r>
-              <a:rPr kumimoji="1" lang="ja-JP" altLang="en-US" smtClean="0"/>
+              <a:rPr kumimoji="1" lang="ja-JP" altLang="en-US"/>
               <a:t>マスター タイトルの書式設定</a:t>
             </a:r>
-            <a:endParaRPr kumimoji="1" lang="ja-JP" altLang="en-US"/>
           </a:p>
         </p:txBody>
       </p:sp>
@@ -1570,7 +1561,7 @@
           <a:p>
             <a:pPr lvl="0"/>
             <a:r>
-              <a:rPr kumimoji="1" lang="ja-JP" altLang="en-US" smtClean="0"/>
+              <a:rPr kumimoji="1" lang="ja-JP" altLang="en-US"/>
               <a:t>マスター テキストの書式設定</a:t>
             </a:r>
           </a:p>
@@ -1598,70 +1589,69 @@
           <a:p>
             <a:pPr lvl="0"/>
             <a:r>
-              <a:rPr kumimoji="1" lang="ja-JP" altLang="en-US" smtClean="0"/>
+              <a:rPr kumimoji="1" lang="ja-JP" altLang="en-US"/>
               <a:t>マスター テキストの書式設定</a:t>
             </a:r>
           </a:p>
           <a:p>
             <a:pPr lvl="1"/>
             <a:r>
-              <a:rPr kumimoji="1" lang="ja-JP" altLang="en-US" smtClean="0"/>
+              <a:rPr kumimoji="1" lang="ja-JP" altLang="en-US"/>
               <a:t>第 </a:t>
             </a:r>
             <a:r>
-              <a:rPr kumimoji="1" lang="en-US" altLang="ja-JP" smtClean="0"/>
+              <a:rPr kumimoji="1" lang="en-US" altLang="ja-JP"/>
               <a:t>2 </a:t>
             </a:r>
             <a:r>
-              <a:rPr kumimoji="1" lang="ja-JP" altLang="en-US" smtClean="0"/>
+              <a:rPr kumimoji="1" lang="ja-JP" altLang="en-US"/>
               <a:t>レベル</a:t>
             </a:r>
           </a:p>
           <a:p>
             <a:pPr lvl="2"/>
             <a:r>
-              <a:rPr kumimoji="1" lang="ja-JP" altLang="en-US" smtClean="0"/>
+              <a:rPr kumimoji="1" lang="ja-JP" altLang="en-US"/>
               <a:t>第 </a:t>
             </a:r>
             <a:r>
-              <a:rPr kumimoji="1" lang="en-US" altLang="ja-JP" smtClean="0"/>
+              <a:rPr kumimoji="1" lang="en-US" altLang="ja-JP"/>
               <a:t>3 </a:t>
             </a:r>
             <a:r>
-              <a:rPr kumimoji="1" lang="ja-JP" altLang="en-US" smtClean="0"/>
+              <a:rPr kumimoji="1" lang="ja-JP" altLang="en-US"/>
               <a:t>レベル</a:t>
             </a:r>
           </a:p>
           <a:p>
             <a:pPr lvl="3"/>
             <a:r>
-              <a:rPr kumimoji="1" lang="ja-JP" altLang="en-US" smtClean="0"/>
+              <a:rPr kumimoji="1" lang="ja-JP" altLang="en-US"/>
               <a:t>第 </a:t>
             </a:r>
             <a:r>
-              <a:rPr kumimoji="1" lang="en-US" altLang="ja-JP" smtClean="0"/>
+              <a:rPr kumimoji="1" lang="en-US" altLang="ja-JP"/>
               <a:t>4 </a:t>
             </a:r>
             <a:r>
-              <a:rPr kumimoji="1" lang="ja-JP" altLang="en-US" smtClean="0"/>
+              <a:rPr kumimoji="1" lang="ja-JP" altLang="en-US"/>
               <a:t>レベル</a:t>
             </a:r>
           </a:p>
           <a:p>
             <a:pPr lvl="4"/>
             <a:r>
-              <a:rPr kumimoji="1" lang="ja-JP" altLang="en-US" smtClean="0"/>
+              <a:rPr kumimoji="1" lang="ja-JP" altLang="en-US"/>
               <a:t>第 </a:t>
             </a:r>
             <a:r>
-              <a:rPr kumimoji="1" lang="en-US" altLang="ja-JP" smtClean="0"/>
+              <a:rPr kumimoji="1" lang="en-US" altLang="ja-JP"/>
               <a:t>5 </a:t>
             </a:r>
             <a:r>
-              <a:rPr kumimoji="1" lang="ja-JP" altLang="en-US" smtClean="0"/>
+              <a:rPr kumimoji="1" lang="ja-JP" altLang="en-US"/>
               <a:t>レベル</a:t>
             </a:r>
-            <a:endParaRPr kumimoji="1" lang="ja-JP" altLang="en-US"/>
           </a:p>
         </p:txBody>
       </p:sp>
@@ -1724,7 +1714,7 @@
           <a:p>
             <a:pPr lvl="0"/>
             <a:r>
-              <a:rPr kumimoji="1" lang="ja-JP" altLang="en-US" smtClean="0"/>
+              <a:rPr kumimoji="1" lang="ja-JP" altLang="en-US"/>
               <a:t>マスター テキストの書式設定</a:t>
             </a:r>
           </a:p>
@@ -1752,70 +1742,69 @@
           <a:p>
             <a:pPr lvl="0"/>
             <a:r>
-              <a:rPr kumimoji="1" lang="ja-JP" altLang="en-US" smtClean="0"/>
+              <a:rPr kumimoji="1" lang="ja-JP" altLang="en-US"/>
               <a:t>マスター テキストの書式設定</a:t>
             </a:r>
           </a:p>
           <a:p>
             <a:pPr lvl="1"/>
             <a:r>
-              <a:rPr kumimoji="1" lang="ja-JP" altLang="en-US" smtClean="0"/>
+              <a:rPr kumimoji="1" lang="ja-JP" altLang="en-US"/>
               <a:t>第 </a:t>
             </a:r>
             <a:r>
-              <a:rPr kumimoji="1" lang="en-US" altLang="ja-JP" smtClean="0"/>
+              <a:rPr kumimoji="1" lang="en-US" altLang="ja-JP"/>
               <a:t>2 </a:t>
             </a:r>
             <a:r>
-              <a:rPr kumimoji="1" lang="ja-JP" altLang="en-US" smtClean="0"/>
+              <a:rPr kumimoji="1" lang="ja-JP" altLang="en-US"/>
               <a:t>レベル</a:t>
             </a:r>
           </a:p>
           <a:p>
             <a:pPr lvl="2"/>
             <a:r>
-              <a:rPr kumimoji="1" lang="ja-JP" altLang="en-US" smtClean="0"/>
+              <a:rPr kumimoji="1" lang="ja-JP" altLang="en-US"/>
               <a:t>第 </a:t>
             </a:r>
             <a:r>
-              <a:rPr kumimoji="1" lang="en-US" altLang="ja-JP" smtClean="0"/>
+              <a:rPr kumimoji="1" lang="en-US" altLang="ja-JP"/>
               <a:t>3 </a:t>
             </a:r>
             <a:r>
-              <a:rPr kumimoji="1" lang="ja-JP" altLang="en-US" smtClean="0"/>
+              <a:rPr kumimoji="1" lang="ja-JP" altLang="en-US"/>
               <a:t>レベル</a:t>
             </a:r>
           </a:p>
           <a:p>
             <a:pPr lvl="3"/>
             <a:r>
-              <a:rPr kumimoji="1" lang="ja-JP" altLang="en-US" smtClean="0"/>
+              <a:rPr kumimoji="1" lang="ja-JP" altLang="en-US"/>
               <a:t>第 </a:t>
             </a:r>
             <a:r>
-              <a:rPr kumimoji="1" lang="en-US" altLang="ja-JP" smtClean="0"/>
+              <a:rPr kumimoji="1" lang="en-US" altLang="ja-JP"/>
               <a:t>4 </a:t>
             </a:r>
             <a:r>
-              <a:rPr kumimoji="1" lang="ja-JP" altLang="en-US" smtClean="0"/>
+              <a:rPr kumimoji="1" lang="ja-JP" altLang="en-US"/>
               <a:t>レベル</a:t>
             </a:r>
           </a:p>
           <a:p>
             <a:pPr lvl="4"/>
             <a:r>
-              <a:rPr kumimoji="1" lang="ja-JP" altLang="en-US" smtClean="0"/>
+              <a:rPr kumimoji="1" lang="ja-JP" altLang="en-US"/>
               <a:t>第 </a:t>
             </a:r>
             <a:r>
-              <a:rPr kumimoji="1" lang="en-US" altLang="ja-JP" smtClean="0"/>
+              <a:rPr kumimoji="1" lang="en-US" altLang="ja-JP"/>
               <a:t>5 </a:t>
             </a:r>
             <a:r>
-              <a:rPr kumimoji="1" lang="ja-JP" altLang="en-US" smtClean="0"/>
+              <a:rPr kumimoji="1" lang="ja-JP" altLang="en-US"/>
               <a:t>レベル</a:t>
             </a:r>
-            <a:endParaRPr kumimoji="1" lang="ja-JP" altLang="en-US"/>
           </a:p>
         </p:txBody>
       </p:sp>
@@ -1836,7 +1825,7 @@
           <a:p>
             <a:fld id="{0E085FA6-3BB9-47BA-8D81-299A75D1B58A}" type="datetimeFigureOut">
               <a:rPr kumimoji="1" lang="ja-JP" altLang="en-US" smtClean="0"/>
-              <a:t>2025/6/3</a:t>
+              <a:t>2025/10/6</a:t>
             </a:fld>
             <a:endParaRPr kumimoji="1" lang="ja-JP" altLang="en-US"/>
           </a:p>
@@ -1930,10 +1919,9 @@
           <a:lstStyle/>
           <a:p>
             <a:r>
-              <a:rPr kumimoji="1" lang="ja-JP" altLang="en-US" smtClean="0"/>
+              <a:rPr kumimoji="1" lang="ja-JP" altLang="en-US"/>
               <a:t>マスター タイトルの書式設定</a:t>
             </a:r>
-            <a:endParaRPr kumimoji="1" lang="ja-JP" altLang="en-US"/>
           </a:p>
         </p:txBody>
       </p:sp>
@@ -1954,7 +1942,7 @@
           <a:p>
             <a:fld id="{0E085FA6-3BB9-47BA-8D81-299A75D1B58A}" type="datetimeFigureOut">
               <a:rPr kumimoji="1" lang="ja-JP" altLang="en-US" smtClean="0"/>
-              <a:t>2025/6/3</a:t>
+              <a:t>2025/10/6</a:t>
             </a:fld>
             <a:endParaRPr kumimoji="1" lang="ja-JP" altLang="en-US"/>
           </a:p>
@@ -2049,7 +2037,7 @@
           <a:p>
             <a:fld id="{0E085FA6-3BB9-47BA-8D81-299A75D1B58A}" type="datetimeFigureOut">
               <a:rPr kumimoji="1" lang="ja-JP" altLang="en-US" smtClean="0"/>
-              <a:t>2025/6/3</a:t>
+              <a:t>2025/10/6</a:t>
             </a:fld>
             <a:endParaRPr kumimoji="1" lang="ja-JP" altLang="en-US"/>
           </a:p>
@@ -2152,10 +2140,9 @@
           </a:lstStyle>
           <a:p>
             <a:r>
-              <a:rPr kumimoji="1" lang="ja-JP" altLang="en-US" smtClean="0"/>
+              <a:rPr kumimoji="1" lang="ja-JP" altLang="en-US"/>
               <a:t>マスター タイトルの書式設定</a:t>
             </a:r>
-            <a:endParaRPr kumimoji="1" lang="ja-JP" altLang="en-US"/>
           </a:p>
         </p:txBody>
       </p:sp>
@@ -2209,70 +2196,69 @@
           <a:p>
             <a:pPr lvl="0"/>
             <a:r>
-              <a:rPr kumimoji="1" lang="ja-JP" altLang="en-US" smtClean="0"/>
+              <a:rPr kumimoji="1" lang="ja-JP" altLang="en-US"/>
               <a:t>マスター テキストの書式設定</a:t>
             </a:r>
           </a:p>
           <a:p>
             <a:pPr lvl="1"/>
             <a:r>
-              <a:rPr kumimoji="1" lang="ja-JP" altLang="en-US" smtClean="0"/>
+              <a:rPr kumimoji="1" lang="ja-JP" altLang="en-US"/>
               <a:t>第 </a:t>
             </a:r>
             <a:r>
-              <a:rPr kumimoji="1" lang="en-US" altLang="ja-JP" smtClean="0"/>
+              <a:rPr kumimoji="1" lang="en-US" altLang="ja-JP"/>
               <a:t>2 </a:t>
             </a:r>
             <a:r>
-              <a:rPr kumimoji="1" lang="ja-JP" altLang="en-US" smtClean="0"/>
+              <a:rPr kumimoji="1" lang="ja-JP" altLang="en-US"/>
               <a:t>レベル</a:t>
             </a:r>
           </a:p>
           <a:p>
             <a:pPr lvl="2"/>
             <a:r>
-              <a:rPr kumimoji="1" lang="ja-JP" altLang="en-US" smtClean="0"/>
+              <a:rPr kumimoji="1" lang="ja-JP" altLang="en-US"/>
               <a:t>第 </a:t>
             </a:r>
             <a:r>
-              <a:rPr kumimoji="1" lang="en-US" altLang="ja-JP" smtClean="0"/>
+              <a:rPr kumimoji="1" lang="en-US" altLang="ja-JP"/>
               <a:t>3 </a:t>
             </a:r>
             <a:r>
-              <a:rPr kumimoji="1" lang="ja-JP" altLang="en-US" smtClean="0"/>
+              <a:rPr kumimoji="1" lang="ja-JP" altLang="en-US"/>
               <a:t>レベル</a:t>
             </a:r>
           </a:p>
           <a:p>
             <a:pPr lvl="3"/>
             <a:r>
-              <a:rPr kumimoji="1" lang="ja-JP" altLang="en-US" smtClean="0"/>
+              <a:rPr kumimoji="1" lang="ja-JP" altLang="en-US"/>
               <a:t>第 </a:t>
             </a:r>
             <a:r>
-              <a:rPr kumimoji="1" lang="en-US" altLang="ja-JP" smtClean="0"/>
+              <a:rPr kumimoji="1" lang="en-US" altLang="ja-JP"/>
               <a:t>4 </a:t>
             </a:r>
             <a:r>
-              <a:rPr kumimoji="1" lang="ja-JP" altLang="en-US" smtClean="0"/>
+              <a:rPr kumimoji="1" lang="ja-JP" altLang="en-US"/>
               <a:t>レベル</a:t>
             </a:r>
           </a:p>
           <a:p>
             <a:pPr lvl="4"/>
             <a:r>
-              <a:rPr kumimoji="1" lang="ja-JP" altLang="en-US" smtClean="0"/>
+              <a:rPr kumimoji="1" lang="ja-JP" altLang="en-US"/>
               <a:t>第 </a:t>
             </a:r>
             <a:r>
-              <a:rPr kumimoji="1" lang="en-US" altLang="ja-JP" smtClean="0"/>
+              <a:rPr kumimoji="1" lang="en-US" altLang="ja-JP"/>
               <a:t>5 </a:t>
             </a:r>
             <a:r>
-              <a:rPr kumimoji="1" lang="ja-JP" altLang="en-US" smtClean="0"/>
+              <a:rPr kumimoji="1" lang="ja-JP" altLang="en-US"/>
               <a:t>レベル</a:t>
             </a:r>
-            <a:endParaRPr kumimoji="1" lang="ja-JP" altLang="en-US"/>
           </a:p>
         </p:txBody>
       </p:sp>
@@ -2335,7 +2321,7 @@
           <a:p>
             <a:pPr lvl="0"/>
             <a:r>
-              <a:rPr kumimoji="1" lang="ja-JP" altLang="en-US" smtClean="0"/>
+              <a:rPr kumimoji="1" lang="ja-JP" altLang="en-US"/>
               <a:t>マスター テキストの書式設定</a:t>
             </a:r>
           </a:p>
@@ -2358,7 +2344,7 @@
           <a:p>
             <a:fld id="{0E085FA6-3BB9-47BA-8D81-299A75D1B58A}" type="datetimeFigureOut">
               <a:rPr kumimoji="1" lang="ja-JP" altLang="en-US" smtClean="0"/>
-              <a:t>2025/6/3</a:t>
+              <a:t>2025/10/6</a:t>
             </a:fld>
             <a:endParaRPr kumimoji="1" lang="ja-JP" altLang="en-US"/>
           </a:p>
@@ -2461,10 +2447,9 @@
           </a:lstStyle>
           <a:p>
             <a:r>
-              <a:rPr kumimoji="1" lang="ja-JP" altLang="en-US" smtClean="0"/>
+              <a:rPr kumimoji="1" lang="ja-JP" altLang="en-US"/>
               <a:t>マスター タイトルの書式設定</a:t>
             </a:r>
-            <a:endParaRPr kumimoji="1" lang="ja-JP" altLang="en-US"/>
           </a:p>
         </p:txBody>
       </p:sp>
@@ -2588,7 +2573,7 @@
           <a:p>
             <a:pPr lvl="0"/>
             <a:r>
-              <a:rPr kumimoji="1" lang="ja-JP" altLang="en-US" smtClean="0"/>
+              <a:rPr kumimoji="1" lang="ja-JP" altLang="en-US"/>
               <a:t>マスター テキストの書式設定</a:t>
             </a:r>
           </a:p>
@@ -2611,7 +2596,7 @@
           <a:p>
             <a:fld id="{0E085FA6-3BB9-47BA-8D81-299A75D1B58A}" type="datetimeFigureOut">
               <a:rPr kumimoji="1" lang="ja-JP" altLang="en-US" smtClean="0"/>
-              <a:t>2025/6/3</a:t>
+              <a:t>2025/10/6</a:t>
             </a:fld>
             <a:endParaRPr kumimoji="1" lang="ja-JP" altLang="en-US"/>
           </a:p>
@@ -2720,10 +2705,9 @@
           <a:lstStyle/>
           <a:p>
             <a:r>
-              <a:rPr kumimoji="1" lang="ja-JP" altLang="en-US" smtClean="0"/>
+              <a:rPr kumimoji="1" lang="ja-JP" altLang="en-US"/>
               <a:t>マスター タイトルの書式設定</a:t>
             </a:r>
-            <a:endParaRPr kumimoji="1" lang="ja-JP" altLang="en-US"/>
           </a:p>
         </p:txBody>
       </p:sp>
@@ -2754,70 +2738,69 @@
           <a:p>
             <a:pPr lvl="0"/>
             <a:r>
-              <a:rPr kumimoji="1" lang="ja-JP" altLang="en-US" smtClean="0"/>
+              <a:rPr kumimoji="1" lang="ja-JP" altLang="en-US"/>
               <a:t>マスター テキストの書式設定</a:t>
             </a:r>
           </a:p>
           <a:p>
             <a:pPr lvl="1"/>
             <a:r>
-              <a:rPr kumimoji="1" lang="ja-JP" altLang="en-US" smtClean="0"/>
+              <a:rPr kumimoji="1" lang="ja-JP" altLang="en-US"/>
               <a:t>第 </a:t>
             </a:r>
             <a:r>
-              <a:rPr kumimoji="1" lang="en-US" altLang="ja-JP" smtClean="0"/>
+              <a:rPr kumimoji="1" lang="en-US" altLang="ja-JP"/>
               <a:t>2 </a:t>
             </a:r>
             <a:r>
-              <a:rPr kumimoji="1" lang="ja-JP" altLang="en-US" smtClean="0"/>
+              <a:rPr kumimoji="1" lang="ja-JP" altLang="en-US"/>
               <a:t>レベル</a:t>
             </a:r>
           </a:p>
           <a:p>
             <a:pPr lvl="2"/>
             <a:r>
-              <a:rPr kumimoji="1" lang="ja-JP" altLang="en-US" smtClean="0"/>
+              <a:rPr kumimoji="1" lang="ja-JP" altLang="en-US"/>
               <a:t>第 </a:t>
             </a:r>
             <a:r>
-              <a:rPr kumimoji="1" lang="en-US" altLang="ja-JP" smtClean="0"/>
+              <a:rPr kumimoji="1" lang="en-US" altLang="ja-JP"/>
               <a:t>3 </a:t>
             </a:r>
             <a:r>
-              <a:rPr kumimoji="1" lang="ja-JP" altLang="en-US" smtClean="0"/>
+              <a:rPr kumimoji="1" lang="ja-JP" altLang="en-US"/>
               <a:t>レベル</a:t>
             </a:r>
           </a:p>
           <a:p>
             <a:pPr lvl="3"/>
             <a:r>
-              <a:rPr kumimoji="1" lang="ja-JP" altLang="en-US" smtClean="0"/>
+              <a:rPr kumimoji="1" lang="ja-JP" altLang="en-US"/>
               <a:t>第 </a:t>
             </a:r>
             <a:r>
-              <a:rPr kumimoji="1" lang="en-US" altLang="ja-JP" smtClean="0"/>
+              <a:rPr kumimoji="1" lang="en-US" altLang="ja-JP"/>
               <a:t>4 </a:t>
             </a:r>
             <a:r>
-              <a:rPr kumimoji="1" lang="ja-JP" altLang="en-US" smtClean="0"/>
+              <a:rPr kumimoji="1" lang="ja-JP" altLang="en-US"/>
               <a:t>レベル</a:t>
             </a:r>
           </a:p>
           <a:p>
             <a:pPr lvl="4"/>
             <a:r>
-              <a:rPr kumimoji="1" lang="ja-JP" altLang="en-US" smtClean="0"/>
+              <a:rPr kumimoji="1" lang="ja-JP" altLang="en-US"/>
               <a:t>第 </a:t>
             </a:r>
             <a:r>
-              <a:rPr kumimoji="1" lang="en-US" altLang="ja-JP" smtClean="0"/>
+              <a:rPr kumimoji="1" lang="en-US" altLang="ja-JP"/>
               <a:t>5 </a:t>
             </a:r>
             <a:r>
-              <a:rPr kumimoji="1" lang="ja-JP" altLang="en-US" smtClean="0"/>
+              <a:rPr kumimoji="1" lang="ja-JP" altLang="en-US"/>
               <a:t>レベル</a:t>
             </a:r>
-            <a:endParaRPr kumimoji="1" lang="ja-JP" altLang="en-US"/>
           </a:p>
         </p:txBody>
       </p:sp>
@@ -2856,7 +2839,7 @@
           <a:p>
             <a:fld id="{0E085FA6-3BB9-47BA-8D81-299A75D1B58A}" type="datetimeFigureOut">
               <a:rPr kumimoji="1" lang="ja-JP" altLang="en-US" smtClean="0"/>
-              <a:t>2025/6/3</a:t>
+              <a:t>2025/10/6</a:t>
             </a:fld>
             <a:endParaRPr kumimoji="1" lang="ja-JP" altLang="en-US"/>
           </a:p>
@@ -4635,6 +4618,1254 @@
   <p:cSld>
     <p:spTree>
       <p:nvGrpSpPr>
+        <p:cNvPr id="1" name="">
+          <a:extLst>
+            <a:ext uri="{FF2B5EF4-FFF2-40B4-BE49-F238E27FC236}">
+              <a16:creationId xmlns:a16="http://schemas.microsoft.com/office/drawing/2014/main" id="{41589F94-BCA6-80CB-69ED-DB54EDEDB425}"/>
+            </a:ext>
+          </a:extLst>
+        </p:cNvPr>
+        <p:cNvGrpSpPr/>
+        <p:nvPr/>
+      </p:nvGrpSpPr>
+      <p:grpSpPr>
+        <a:xfrm>
+          <a:off x="0" y="0"/>
+          <a:ext cx="0" cy="0"/>
+          <a:chOff x="0" y="0"/>
+          <a:chExt cx="0" cy="0"/>
+        </a:xfrm>
+      </p:grpSpPr>
+      <p:sp>
+        <p:nvSpPr>
+          <p:cNvPr id="82" name="正方形/長方形 81">
+            <a:extLst>
+              <a:ext uri="{FF2B5EF4-FFF2-40B4-BE49-F238E27FC236}">
+                <a16:creationId xmlns:a16="http://schemas.microsoft.com/office/drawing/2014/main" id="{512F92E0-4A11-EF36-2DF2-47A61DFDBF91}"/>
+              </a:ext>
+            </a:extLst>
+          </p:cNvPr>
+          <p:cNvSpPr/>
+          <p:nvPr/>
+        </p:nvSpPr>
+        <p:spPr>
+          <a:xfrm>
+            <a:off x="327381" y="542400"/>
+            <a:ext cx="2152505" cy="2152505"/>
+          </a:xfrm>
+          <a:prstGeom prst="rect">
+            <a:avLst/>
+          </a:prstGeom>
+          <a:solidFill>
+            <a:schemeClr val="bg1"/>
+          </a:solidFill>
+          <a:ln>
+            <a:solidFill>
+              <a:schemeClr val="tx1"/>
+            </a:solidFill>
+          </a:ln>
+        </p:spPr>
+        <p:style>
+          <a:lnRef idx="2">
+            <a:schemeClr val="accent1">
+              <a:shade val="50000"/>
+            </a:schemeClr>
+          </a:lnRef>
+          <a:fillRef idx="1">
+            <a:schemeClr val="accent1"/>
+          </a:fillRef>
+          <a:effectRef idx="0">
+            <a:schemeClr val="accent1"/>
+          </a:effectRef>
+          <a:fontRef idx="minor">
+            <a:schemeClr val="lt1"/>
+          </a:fontRef>
+        </p:style>
+        <p:txBody>
+          <a:bodyPr rtlCol="0" anchor="ctr"/>
+          <a:lstStyle/>
+          <a:p>
+            <a:pPr algn="ctr"/>
+            <a:endParaRPr kumimoji="1" lang="ja-JP" altLang="en-US"/>
+          </a:p>
+        </p:txBody>
+      </p:sp>
+      <p:sp>
+        <p:nvSpPr>
+          <p:cNvPr id="84" name="正方形/長方形 83">
+            <a:extLst>
+              <a:ext uri="{FF2B5EF4-FFF2-40B4-BE49-F238E27FC236}">
+                <a16:creationId xmlns:a16="http://schemas.microsoft.com/office/drawing/2014/main" id="{993B3F03-80CD-7746-A19B-305BA565FEC6}"/>
+              </a:ext>
+            </a:extLst>
+          </p:cNvPr>
+          <p:cNvSpPr/>
+          <p:nvPr/>
+        </p:nvSpPr>
+        <p:spPr>
+          <a:xfrm>
+            <a:off x="327381" y="2706587"/>
+            <a:ext cx="2152505" cy="2152505"/>
+          </a:xfrm>
+          <a:prstGeom prst="rect">
+            <a:avLst/>
+          </a:prstGeom>
+          <a:solidFill>
+            <a:schemeClr val="bg1"/>
+          </a:solidFill>
+          <a:ln>
+            <a:solidFill>
+              <a:schemeClr val="tx1"/>
+            </a:solidFill>
+          </a:ln>
+        </p:spPr>
+        <p:style>
+          <a:lnRef idx="2">
+            <a:schemeClr val="accent1">
+              <a:shade val="50000"/>
+            </a:schemeClr>
+          </a:lnRef>
+          <a:fillRef idx="1">
+            <a:schemeClr val="accent1"/>
+          </a:fillRef>
+          <a:effectRef idx="0">
+            <a:schemeClr val="accent1"/>
+          </a:effectRef>
+          <a:fontRef idx="minor">
+            <a:schemeClr val="lt1"/>
+          </a:fontRef>
+        </p:style>
+        <p:txBody>
+          <a:bodyPr rtlCol="0" anchor="ctr"/>
+          <a:lstStyle/>
+          <a:p>
+            <a:pPr algn="ctr"/>
+            <a:endParaRPr kumimoji="1" lang="ja-JP" altLang="en-US"/>
+          </a:p>
+        </p:txBody>
+      </p:sp>
+      <p:sp>
+        <p:nvSpPr>
+          <p:cNvPr id="85" name="正方形/長方形 84">
+            <a:extLst>
+              <a:ext uri="{FF2B5EF4-FFF2-40B4-BE49-F238E27FC236}">
+                <a16:creationId xmlns:a16="http://schemas.microsoft.com/office/drawing/2014/main" id="{438DACA5-4EA4-9E36-F20B-8995F0A683E7}"/>
+              </a:ext>
+            </a:extLst>
+          </p:cNvPr>
+          <p:cNvSpPr/>
+          <p:nvPr/>
+        </p:nvSpPr>
+        <p:spPr>
+          <a:xfrm>
+            <a:off x="2497015" y="2706587"/>
+            <a:ext cx="2152505" cy="2152505"/>
+          </a:xfrm>
+          <a:prstGeom prst="rect">
+            <a:avLst/>
+          </a:prstGeom>
+          <a:solidFill>
+            <a:schemeClr val="bg1"/>
+          </a:solidFill>
+          <a:ln>
+            <a:solidFill>
+              <a:schemeClr val="tx1"/>
+            </a:solidFill>
+          </a:ln>
+        </p:spPr>
+        <p:style>
+          <a:lnRef idx="2">
+            <a:schemeClr val="accent1">
+              <a:shade val="50000"/>
+            </a:schemeClr>
+          </a:lnRef>
+          <a:fillRef idx="1">
+            <a:schemeClr val="accent1"/>
+          </a:fillRef>
+          <a:effectRef idx="0">
+            <a:schemeClr val="accent1"/>
+          </a:effectRef>
+          <a:fontRef idx="minor">
+            <a:schemeClr val="lt1"/>
+          </a:fontRef>
+        </p:style>
+        <p:txBody>
+          <a:bodyPr rtlCol="0" anchor="ctr"/>
+          <a:lstStyle/>
+          <a:p>
+            <a:pPr algn="ctr"/>
+            <a:endParaRPr kumimoji="1" lang="ja-JP" altLang="en-US"/>
+          </a:p>
+        </p:txBody>
+      </p:sp>
+      <p:sp>
+        <p:nvSpPr>
+          <p:cNvPr id="90" name="正方形/長方形 89">
+            <a:extLst>
+              <a:ext uri="{FF2B5EF4-FFF2-40B4-BE49-F238E27FC236}">
+                <a16:creationId xmlns:a16="http://schemas.microsoft.com/office/drawing/2014/main" id="{34BEABCE-EF46-D008-77BF-420A98661788}"/>
+              </a:ext>
+            </a:extLst>
+          </p:cNvPr>
+          <p:cNvSpPr/>
+          <p:nvPr/>
+        </p:nvSpPr>
+        <p:spPr>
+          <a:xfrm>
+            <a:off x="4666649" y="2706587"/>
+            <a:ext cx="2152505" cy="2152505"/>
+          </a:xfrm>
+          <a:prstGeom prst="rect">
+            <a:avLst/>
+          </a:prstGeom>
+          <a:solidFill>
+            <a:schemeClr val="bg1"/>
+          </a:solidFill>
+          <a:ln>
+            <a:solidFill>
+              <a:schemeClr val="tx1"/>
+            </a:solidFill>
+          </a:ln>
+        </p:spPr>
+        <p:style>
+          <a:lnRef idx="2">
+            <a:schemeClr val="accent1">
+              <a:shade val="50000"/>
+            </a:schemeClr>
+          </a:lnRef>
+          <a:fillRef idx="1">
+            <a:schemeClr val="accent1"/>
+          </a:fillRef>
+          <a:effectRef idx="0">
+            <a:schemeClr val="accent1"/>
+          </a:effectRef>
+          <a:fontRef idx="minor">
+            <a:schemeClr val="lt1"/>
+          </a:fontRef>
+        </p:style>
+        <p:txBody>
+          <a:bodyPr rtlCol="0" anchor="ctr"/>
+          <a:lstStyle/>
+          <a:p>
+            <a:pPr algn="ctr"/>
+            <a:endParaRPr kumimoji="1" lang="ja-JP" altLang="en-US"/>
+          </a:p>
+        </p:txBody>
+      </p:sp>
+      <p:sp>
+        <p:nvSpPr>
+          <p:cNvPr id="91" name="正方形/長方形 90">
+            <a:extLst>
+              <a:ext uri="{FF2B5EF4-FFF2-40B4-BE49-F238E27FC236}">
+                <a16:creationId xmlns:a16="http://schemas.microsoft.com/office/drawing/2014/main" id="{5B4E1E18-54C0-CFB4-02E7-71BC7F447E9C}"/>
+              </a:ext>
+            </a:extLst>
+          </p:cNvPr>
+          <p:cNvSpPr/>
+          <p:nvPr/>
+        </p:nvSpPr>
+        <p:spPr>
+          <a:xfrm>
+            <a:off x="6823583" y="2706587"/>
+            <a:ext cx="2152505" cy="2152505"/>
+          </a:xfrm>
+          <a:prstGeom prst="rect">
+            <a:avLst/>
+          </a:prstGeom>
+          <a:solidFill>
+            <a:schemeClr val="bg1"/>
+          </a:solidFill>
+          <a:ln>
+            <a:solidFill>
+              <a:schemeClr val="tx1"/>
+            </a:solidFill>
+          </a:ln>
+        </p:spPr>
+        <p:style>
+          <a:lnRef idx="2">
+            <a:schemeClr val="accent1">
+              <a:shade val="50000"/>
+            </a:schemeClr>
+          </a:lnRef>
+          <a:fillRef idx="1">
+            <a:schemeClr val="accent1"/>
+          </a:fillRef>
+          <a:effectRef idx="0">
+            <a:schemeClr val="accent1"/>
+          </a:effectRef>
+          <a:fontRef idx="minor">
+            <a:schemeClr val="lt1"/>
+          </a:fontRef>
+        </p:style>
+        <p:txBody>
+          <a:bodyPr rtlCol="0" anchor="ctr"/>
+          <a:lstStyle/>
+          <a:p>
+            <a:pPr algn="ctr"/>
+            <a:endParaRPr kumimoji="1" lang="ja-JP" altLang="en-US"/>
+          </a:p>
+        </p:txBody>
+      </p:sp>
+      <p:sp>
+        <p:nvSpPr>
+          <p:cNvPr id="95" name="正方形/長方形 94">
+            <a:extLst>
+              <a:ext uri="{FF2B5EF4-FFF2-40B4-BE49-F238E27FC236}">
+                <a16:creationId xmlns:a16="http://schemas.microsoft.com/office/drawing/2014/main" id="{ECC6DB73-85DD-3D77-AA8B-BAA6C785D1D6}"/>
+              </a:ext>
+            </a:extLst>
+          </p:cNvPr>
+          <p:cNvSpPr/>
+          <p:nvPr/>
+        </p:nvSpPr>
+        <p:spPr>
+          <a:xfrm>
+            <a:off x="8980517" y="2706587"/>
+            <a:ext cx="2152505" cy="2152505"/>
+          </a:xfrm>
+          <a:prstGeom prst="rect">
+            <a:avLst/>
+          </a:prstGeom>
+          <a:solidFill>
+            <a:schemeClr val="bg1"/>
+          </a:solidFill>
+          <a:ln>
+            <a:solidFill>
+              <a:schemeClr val="tx1"/>
+            </a:solidFill>
+          </a:ln>
+        </p:spPr>
+        <p:style>
+          <a:lnRef idx="2">
+            <a:schemeClr val="accent1">
+              <a:shade val="50000"/>
+            </a:schemeClr>
+          </a:lnRef>
+          <a:fillRef idx="1">
+            <a:schemeClr val="accent1"/>
+          </a:fillRef>
+          <a:effectRef idx="0">
+            <a:schemeClr val="accent1"/>
+          </a:effectRef>
+          <a:fontRef idx="minor">
+            <a:schemeClr val="lt1"/>
+          </a:fontRef>
+        </p:style>
+        <p:txBody>
+          <a:bodyPr rtlCol="0" anchor="ctr"/>
+          <a:lstStyle/>
+          <a:p>
+            <a:pPr algn="ctr"/>
+            <a:endParaRPr kumimoji="1" lang="ja-JP" altLang="en-US"/>
+          </a:p>
+        </p:txBody>
+      </p:sp>
+      <p:sp>
+        <p:nvSpPr>
+          <p:cNvPr id="14" name="正方形/長方形 13">
+            <a:extLst>
+              <a:ext uri="{FF2B5EF4-FFF2-40B4-BE49-F238E27FC236}">
+                <a16:creationId xmlns:a16="http://schemas.microsoft.com/office/drawing/2014/main" id="{857EE711-7235-3890-B654-AD5BE47D3FF7}"/>
+              </a:ext>
+            </a:extLst>
+          </p:cNvPr>
+          <p:cNvSpPr/>
+          <p:nvPr/>
+        </p:nvSpPr>
+        <p:spPr>
+          <a:xfrm>
+            <a:off x="5196168" y="1122960"/>
+            <a:ext cx="1069260" cy="1069260"/>
+          </a:xfrm>
+          <a:prstGeom prst="rect">
+            <a:avLst/>
+          </a:prstGeom>
+          <a:solidFill>
+            <a:schemeClr val="bg1"/>
+          </a:solidFill>
+          <a:ln>
+            <a:solidFill>
+              <a:schemeClr val="tx1"/>
+            </a:solidFill>
+          </a:ln>
+        </p:spPr>
+        <p:style>
+          <a:lnRef idx="2">
+            <a:schemeClr val="accent1">
+              <a:shade val="50000"/>
+            </a:schemeClr>
+          </a:lnRef>
+          <a:fillRef idx="1">
+            <a:schemeClr val="accent1"/>
+          </a:fillRef>
+          <a:effectRef idx="0">
+            <a:schemeClr val="accent1"/>
+          </a:effectRef>
+          <a:fontRef idx="minor">
+            <a:schemeClr val="lt1"/>
+          </a:fontRef>
+        </p:style>
+        <p:txBody>
+          <a:bodyPr rtlCol="0" anchor="ctr"/>
+          <a:lstStyle/>
+          <a:p>
+            <a:pPr algn="ctr"/>
+            <a:endParaRPr kumimoji="1" lang="ja-JP" altLang="en-US"/>
+          </a:p>
+        </p:txBody>
+      </p:sp>
+      <p:pic>
+        <p:nvPicPr>
+          <p:cNvPr id="3" name="図 2">
+            <a:extLst>
+              <a:ext uri="{FF2B5EF4-FFF2-40B4-BE49-F238E27FC236}">
+                <a16:creationId xmlns:a16="http://schemas.microsoft.com/office/drawing/2014/main" id="{DFDF0E84-DDDC-5911-7A92-420DC1F42AC2}"/>
+              </a:ext>
+            </a:extLst>
+          </p:cNvPr>
+          <p:cNvPicPr>
+            <a:picLocks noChangeAspect="1"/>
+          </p:cNvPicPr>
+          <p:nvPr/>
+        </p:nvPicPr>
+        <p:blipFill>
+          <a:blip r:embed="rId2"/>
+          <a:stretch>
+            <a:fillRect/>
+          </a:stretch>
+        </p:blipFill>
+        <p:spPr>
+          <a:xfrm rot="-600000">
+            <a:off x="977303" y="3414010"/>
+            <a:ext cx="751422" cy="572400"/>
+          </a:xfrm>
+          <a:prstGeom prst="rect">
+            <a:avLst/>
+          </a:prstGeom>
+        </p:spPr>
+      </p:pic>
+      <p:pic>
+        <p:nvPicPr>
+          <p:cNvPr id="4" name="図 3">
+            <a:extLst>
+              <a:ext uri="{FF2B5EF4-FFF2-40B4-BE49-F238E27FC236}">
+                <a16:creationId xmlns:a16="http://schemas.microsoft.com/office/drawing/2014/main" id="{46CDFDF0-1A60-DB36-BB90-92D064268D05}"/>
+              </a:ext>
+            </a:extLst>
+          </p:cNvPr>
+          <p:cNvPicPr>
+            <a:picLocks noChangeAspect="1"/>
+          </p:cNvPicPr>
+          <p:nvPr/>
+        </p:nvPicPr>
+        <p:blipFill>
+          <a:blip r:embed="rId2"/>
+          <a:stretch>
+            <a:fillRect/>
+          </a:stretch>
+        </p:blipFill>
+        <p:spPr>
+          <a:xfrm rot="-1200000">
+            <a:off x="3074708" y="3309103"/>
+            <a:ext cx="751422" cy="572400"/>
+          </a:xfrm>
+          <a:prstGeom prst="rect">
+            <a:avLst/>
+          </a:prstGeom>
+        </p:spPr>
+      </p:pic>
+      <p:pic>
+        <p:nvPicPr>
+          <p:cNvPr id="5" name="図 4">
+            <a:extLst>
+              <a:ext uri="{FF2B5EF4-FFF2-40B4-BE49-F238E27FC236}">
+                <a16:creationId xmlns:a16="http://schemas.microsoft.com/office/drawing/2014/main" id="{6495AF99-60AC-A4EA-A781-9CB8EE358949}"/>
+              </a:ext>
+            </a:extLst>
+          </p:cNvPr>
+          <p:cNvPicPr>
+            <a:picLocks noChangeAspect="1"/>
+          </p:cNvPicPr>
+          <p:nvPr/>
+        </p:nvPicPr>
+        <p:blipFill>
+          <a:blip r:embed="rId2"/>
+          <a:stretch>
+            <a:fillRect/>
+          </a:stretch>
+        </p:blipFill>
+        <p:spPr>
+          <a:xfrm rot="-1800000">
+            <a:off x="5202078" y="3219169"/>
+            <a:ext cx="751422" cy="572400"/>
+          </a:xfrm>
+          <a:prstGeom prst="rect">
+            <a:avLst/>
+          </a:prstGeom>
+        </p:spPr>
+      </p:pic>
+      <p:pic>
+        <p:nvPicPr>
+          <p:cNvPr id="6" name="図 5">
+            <a:extLst>
+              <a:ext uri="{FF2B5EF4-FFF2-40B4-BE49-F238E27FC236}">
+                <a16:creationId xmlns:a16="http://schemas.microsoft.com/office/drawing/2014/main" id="{CC88CCBF-BF0E-7B38-CC2F-7E96763475EF}"/>
+              </a:ext>
+            </a:extLst>
+          </p:cNvPr>
+          <p:cNvPicPr>
+            <a:picLocks noChangeAspect="1"/>
+          </p:cNvPicPr>
+          <p:nvPr/>
+        </p:nvPicPr>
+        <p:blipFill>
+          <a:blip r:embed="rId2"/>
+          <a:stretch>
+            <a:fillRect/>
+          </a:stretch>
+        </p:blipFill>
+        <p:spPr>
+          <a:xfrm rot="-2400000">
+            <a:off x="7314444" y="3368845"/>
+            <a:ext cx="751422" cy="572400"/>
+          </a:xfrm>
+          <a:prstGeom prst="rect">
+            <a:avLst/>
+          </a:prstGeom>
+        </p:spPr>
+      </p:pic>
+      <p:pic>
+        <p:nvPicPr>
+          <p:cNvPr id="7" name="図 6">
+            <a:extLst>
+              <a:ext uri="{FF2B5EF4-FFF2-40B4-BE49-F238E27FC236}">
+                <a16:creationId xmlns:a16="http://schemas.microsoft.com/office/drawing/2014/main" id="{AF991EB7-DABF-2A27-9CF2-19A83CC3A064}"/>
+              </a:ext>
+            </a:extLst>
+          </p:cNvPr>
+          <p:cNvPicPr>
+            <a:picLocks noChangeAspect="1"/>
+          </p:cNvPicPr>
+          <p:nvPr/>
+        </p:nvPicPr>
+        <p:blipFill>
+          <a:blip r:embed="rId2"/>
+          <a:stretch>
+            <a:fillRect/>
+          </a:stretch>
+        </p:blipFill>
+        <p:spPr>
+          <a:xfrm rot="-3000000">
+            <a:off x="9426793" y="3548909"/>
+            <a:ext cx="751422" cy="572400"/>
+          </a:xfrm>
+          <a:prstGeom prst="rect">
+            <a:avLst/>
+          </a:prstGeom>
+        </p:spPr>
+      </p:pic>
+      <p:pic>
+        <p:nvPicPr>
+          <p:cNvPr id="8" name="図 7">
+            <a:extLst>
+              <a:ext uri="{FF2B5EF4-FFF2-40B4-BE49-F238E27FC236}">
+                <a16:creationId xmlns:a16="http://schemas.microsoft.com/office/drawing/2014/main" id="{FD93222D-B924-3F26-A716-22A1F651CC41}"/>
+              </a:ext>
+            </a:extLst>
+          </p:cNvPr>
+          <p:cNvPicPr>
+            <a:picLocks noChangeAspect="1"/>
+          </p:cNvPicPr>
+          <p:nvPr/>
+        </p:nvPicPr>
+        <p:blipFill>
+          <a:blip r:embed="rId2"/>
+          <a:stretch>
+            <a:fillRect/>
+          </a:stretch>
+        </p:blipFill>
+        <p:spPr>
+          <a:xfrm>
+            <a:off x="1052169" y="1351405"/>
+            <a:ext cx="751422" cy="572400"/>
+          </a:xfrm>
+          <a:prstGeom prst="rect">
+            <a:avLst/>
+          </a:prstGeom>
+        </p:spPr>
+      </p:pic>
+      <p:pic>
+        <p:nvPicPr>
+          <p:cNvPr id="9" name="図 8">
+            <a:extLst>
+              <a:ext uri="{FF2B5EF4-FFF2-40B4-BE49-F238E27FC236}">
+                <a16:creationId xmlns:a16="http://schemas.microsoft.com/office/drawing/2014/main" id="{5BA8A062-D6A7-78DE-8A1B-560DED38ADEF}"/>
+              </a:ext>
+            </a:extLst>
+          </p:cNvPr>
+          <p:cNvPicPr>
+            <a:picLocks noChangeAspect="1"/>
+          </p:cNvPicPr>
+          <p:nvPr/>
+        </p:nvPicPr>
+        <p:blipFill>
+          <a:blip r:embed="rId2"/>
+          <a:stretch>
+            <a:fillRect/>
+          </a:stretch>
+        </p:blipFill>
+        <p:spPr>
+          <a:xfrm>
+            <a:off x="5367548" y="1351405"/>
+            <a:ext cx="751422" cy="572400"/>
+          </a:xfrm>
+          <a:prstGeom prst="rect">
+            <a:avLst/>
+          </a:prstGeom>
+        </p:spPr>
+      </p:pic>
+    </p:spTree>
+    <p:extLst>
+      <p:ext uri="{BB962C8B-B14F-4D97-AF65-F5344CB8AC3E}">
+        <p14:creationId xmlns:p14="http://schemas.microsoft.com/office/powerpoint/2010/main" val="2736002858"/>
+      </p:ext>
+    </p:extLst>
+  </p:cSld>
+  <p:clrMapOvr>
+    <a:masterClrMapping/>
+  </p:clrMapOvr>
+</p:sld>
+</file>
+
+<file path=ppt/slides/slide5.xml><?xml version="1.0" encoding="utf-8"?>
+<p:sld xmlns:a="http://schemas.openxmlformats.org/drawingml/2006/main" xmlns:r="http://schemas.openxmlformats.org/officeDocument/2006/relationships" xmlns:p="http://schemas.openxmlformats.org/presentationml/2006/main">
+  <p:cSld>
+    <p:spTree>
+      <p:nvGrpSpPr>
+        <p:cNvPr id="1" name="">
+          <a:extLst>
+            <a:ext uri="{FF2B5EF4-FFF2-40B4-BE49-F238E27FC236}">
+              <a16:creationId xmlns:a16="http://schemas.microsoft.com/office/drawing/2014/main" id="{6D1A06FB-9641-3C29-3200-47184FB635C5}"/>
+            </a:ext>
+          </a:extLst>
+        </p:cNvPr>
+        <p:cNvGrpSpPr/>
+        <p:nvPr/>
+      </p:nvGrpSpPr>
+      <p:grpSpPr>
+        <a:xfrm>
+          <a:off x="0" y="0"/>
+          <a:ext cx="0" cy="0"/>
+          <a:chOff x="0" y="0"/>
+          <a:chExt cx="0" cy="0"/>
+        </a:xfrm>
+      </p:grpSpPr>
+      <p:sp>
+        <p:nvSpPr>
+          <p:cNvPr id="82" name="正方形/長方形 81">
+            <a:extLst>
+              <a:ext uri="{FF2B5EF4-FFF2-40B4-BE49-F238E27FC236}">
+                <a16:creationId xmlns:a16="http://schemas.microsoft.com/office/drawing/2014/main" id="{9B6CC1A8-BBD4-4C43-F9F2-4DB0C38C02A2}"/>
+              </a:ext>
+            </a:extLst>
+          </p:cNvPr>
+          <p:cNvSpPr/>
+          <p:nvPr/>
+        </p:nvSpPr>
+        <p:spPr>
+          <a:xfrm>
+            <a:off x="327381" y="542400"/>
+            <a:ext cx="2152505" cy="2152505"/>
+          </a:xfrm>
+          <a:prstGeom prst="rect">
+            <a:avLst/>
+          </a:prstGeom>
+          <a:solidFill>
+            <a:schemeClr val="bg1"/>
+          </a:solidFill>
+          <a:ln>
+            <a:solidFill>
+              <a:schemeClr val="tx1"/>
+            </a:solidFill>
+          </a:ln>
+        </p:spPr>
+        <p:style>
+          <a:lnRef idx="2">
+            <a:schemeClr val="accent1">
+              <a:shade val="50000"/>
+            </a:schemeClr>
+          </a:lnRef>
+          <a:fillRef idx="1">
+            <a:schemeClr val="accent1"/>
+          </a:fillRef>
+          <a:effectRef idx="0">
+            <a:schemeClr val="accent1"/>
+          </a:effectRef>
+          <a:fontRef idx="minor">
+            <a:schemeClr val="lt1"/>
+          </a:fontRef>
+        </p:style>
+        <p:txBody>
+          <a:bodyPr rtlCol="0" anchor="ctr"/>
+          <a:lstStyle/>
+          <a:p>
+            <a:pPr algn="ctr"/>
+            <a:endParaRPr kumimoji="1" lang="ja-JP" altLang="en-US"/>
+          </a:p>
+        </p:txBody>
+      </p:sp>
+      <p:sp>
+        <p:nvSpPr>
+          <p:cNvPr id="84" name="正方形/長方形 83">
+            <a:extLst>
+              <a:ext uri="{FF2B5EF4-FFF2-40B4-BE49-F238E27FC236}">
+                <a16:creationId xmlns:a16="http://schemas.microsoft.com/office/drawing/2014/main" id="{3FA10A18-345A-4CA1-4932-9222D41F2CBE}"/>
+              </a:ext>
+            </a:extLst>
+          </p:cNvPr>
+          <p:cNvSpPr/>
+          <p:nvPr/>
+        </p:nvSpPr>
+        <p:spPr>
+          <a:xfrm>
+            <a:off x="327381" y="2706587"/>
+            <a:ext cx="2152505" cy="2152505"/>
+          </a:xfrm>
+          <a:prstGeom prst="rect">
+            <a:avLst/>
+          </a:prstGeom>
+          <a:solidFill>
+            <a:schemeClr val="bg1"/>
+          </a:solidFill>
+          <a:ln>
+            <a:solidFill>
+              <a:schemeClr val="tx1"/>
+            </a:solidFill>
+          </a:ln>
+        </p:spPr>
+        <p:style>
+          <a:lnRef idx="2">
+            <a:schemeClr val="accent1">
+              <a:shade val="50000"/>
+            </a:schemeClr>
+          </a:lnRef>
+          <a:fillRef idx="1">
+            <a:schemeClr val="accent1"/>
+          </a:fillRef>
+          <a:effectRef idx="0">
+            <a:schemeClr val="accent1"/>
+          </a:effectRef>
+          <a:fontRef idx="minor">
+            <a:schemeClr val="lt1"/>
+          </a:fontRef>
+        </p:style>
+        <p:txBody>
+          <a:bodyPr rtlCol="0" anchor="ctr"/>
+          <a:lstStyle/>
+          <a:p>
+            <a:pPr algn="ctr"/>
+            <a:endParaRPr kumimoji="1" lang="ja-JP" altLang="en-US"/>
+          </a:p>
+        </p:txBody>
+      </p:sp>
+      <p:sp>
+        <p:nvSpPr>
+          <p:cNvPr id="85" name="正方形/長方形 84">
+            <a:extLst>
+              <a:ext uri="{FF2B5EF4-FFF2-40B4-BE49-F238E27FC236}">
+                <a16:creationId xmlns:a16="http://schemas.microsoft.com/office/drawing/2014/main" id="{41880D74-D451-87FC-2AC1-210119B11A55}"/>
+              </a:ext>
+            </a:extLst>
+          </p:cNvPr>
+          <p:cNvSpPr/>
+          <p:nvPr/>
+        </p:nvSpPr>
+        <p:spPr>
+          <a:xfrm>
+            <a:off x="2497015" y="2706587"/>
+            <a:ext cx="2152505" cy="2152505"/>
+          </a:xfrm>
+          <a:prstGeom prst="rect">
+            <a:avLst/>
+          </a:prstGeom>
+          <a:solidFill>
+            <a:schemeClr val="bg1"/>
+          </a:solidFill>
+          <a:ln>
+            <a:solidFill>
+              <a:schemeClr val="tx1"/>
+            </a:solidFill>
+          </a:ln>
+        </p:spPr>
+        <p:style>
+          <a:lnRef idx="2">
+            <a:schemeClr val="accent1">
+              <a:shade val="50000"/>
+            </a:schemeClr>
+          </a:lnRef>
+          <a:fillRef idx="1">
+            <a:schemeClr val="accent1"/>
+          </a:fillRef>
+          <a:effectRef idx="0">
+            <a:schemeClr val="accent1"/>
+          </a:effectRef>
+          <a:fontRef idx="minor">
+            <a:schemeClr val="lt1"/>
+          </a:fontRef>
+        </p:style>
+        <p:txBody>
+          <a:bodyPr rtlCol="0" anchor="ctr"/>
+          <a:lstStyle/>
+          <a:p>
+            <a:pPr algn="ctr"/>
+            <a:endParaRPr kumimoji="1" lang="ja-JP" altLang="en-US"/>
+          </a:p>
+        </p:txBody>
+      </p:sp>
+      <p:sp>
+        <p:nvSpPr>
+          <p:cNvPr id="90" name="正方形/長方形 89">
+            <a:extLst>
+              <a:ext uri="{FF2B5EF4-FFF2-40B4-BE49-F238E27FC236}">
+                <a16:creationId xmlns:a16="http://schemas.microsoft.com/office/drawing/2014/main" id="{75B0573F-3312-AA26-EA83-BE12EB79E315}"/>
+              </a:ext>
+            </a:extLst>
+          </p:cNvPr>
+          <p:cNvSpPr/>
+          <p:nvPr/>
+        </p:nvSpPr>
+        <p:spPr>
+          <a:xfrm>
+            <a:off x="4666649" y="2706587"/>
+            <a:ext cx="2152505" cy="2152505"/>
+          </a:xfrm>
+          <a:prstGeom prst="rect">
+            <a:avLst/>
+          </a:prstGeom>
+          <a:solidFill>
+            <a:schemeClr val="bg1"/>
+          </a:solidFill>
+          <a:ln>
+            <a:solidFill>
+              <a:schemeClr val="tx1"/>
+            </a:solidFill>
+          </a:ln>
+        </p:spPr>
+        <p:style>
+          <a:lnRef idx="2">
+            <a:schemeClr val="accent1">
+              <a:shade val="50000"/>
+            </a:schemeClr>
+          </a:lnRef>
+          <a:fillRef idx="1">
+            <a:schemeClr val="accent1"/>
+          </a:fillRef>
+          <a:effectRef idx="0">
+            <a:schemeClr val="accent1"/>
+          </a:effectRef>
+          <a:fontRef idx="minor">
+            <a:schemeClr val="lt1"/>
+          </a:fontRef>
+        </p:style>
+        <p:txBody>
+          <a:bodyPr rtlCol="0" anchor="ctr"/>
+          <a:lstStyle/>
+          <a:p>
+            <a:pPr algn="ctr"/>
+            <a:endParaRPr kumimoji="1" lang="ja-JP" altLang="en-US"/>
+          </a:p>
+        </p:txBody>
+      </p:sp>
+      <p:sp>
+        <p:nvSpPr>
+          <p:cNvPr id="91" name="正方形/長方形 90">
+            <a:extLst>
+              <a:ext uri="{FF2B5EF4-FFF2-40B4-BE49-F238E27FC236}">
+                <a16:creationId xmlns:a16="http://schemas.microsoft.com/office/drawing/2014/main" id="{09687092-6FE5-67DA-CDC9-343A24A2BC47}"/>
+              </a:ext>
+            </a:extLst>
+          </p:cNvPr>
+          <p:cNvSpPr/>
+          <p:nvPr/>
+        </p:nvSpPr>
+        <p:spPr>
+          <a:xfrm>
+            <a:off x="6823583" y="2706587"/>
+            <a:ext cx="2152505" cy="2152505"/>
+          </a:xfrm>
+          <a:prstGeom prst="rect">
+            <a:avLst/>
+          </a:prstGeom>
+          <a:solidFill>
+            <a:schemeClr val="bg1"/>
+          </a:solidFill>
+          <a:ln>
+            <a:solidFill>
+              <a:schemeClr val="tx1"/>
+            </a:solidFill>
+          </a:ln>
+        </p:spPr>
+        <p:style>
+          <a:lnRef idx="2">
+            <a:schemeClr val="accent1">
+              <a:shade val="50000"/>
+            </a:schemeClr>
+          </a:lnRef>
+          <a:fillRef idx="1">
+            <a:schemeClr val="accent1"/>
+          </a:fillRef>
+          <a:effectRef idx="0">
+            <a:schemeClr val="accent1"/>
+          </a:effectRef>
+          <a:fontRef idx="minor">
+            <a:schemeClr val="lt1"/>
+          </a:fontRef>
+        </p:style>
+        <p:txBody>
+          <a:bodyPr rtlCol="0" anchor="ctr"/>
+          <a:lstStyle/>
+          <a:p>
+            <a:pPr algn="ctr"/>
+            <a:endParaRPr kumimoji="1" lang="ja-JP" altLang="en-US"/>
+          </a:p>
+        </p:txBody>
+      </p:sp>
+      <p:sp>
+        <p:nvSpPr>
+          <p:cNvPr id="95" name="正方形/長方形 94">
+            <a:extLst>
+              <a:ext uri="{FF2B5EF4-FFF2-40B4-BE49-F238E27FC236}">
+                <a16:creationId xmlns:a16="http://schemas.microsoft.com/office/drawing/2014/main" id="{1127A99F-FC1A-5F5D-1BC2-BB0BB83A87C9}"/>
+              </a:ext>
+            </a:extLst>
+          </p:cNvPr>
+          <p:cNvSpPr/>
+          <p:nvPr/>
+        </p:nvSpPr>
+        <p:spPr>
+          <a:xfrm>
+            <a:off x="8980517" y="2706587"/>
+            <a:ext cx="2152505" cy="2152505"/>
+          </a:xfrm>
+          <a:prstGeom prst="rect">
+            <a:avLst/>
+          </a:prstGeom>
+          <a:solidFill>
+            <a:schemeClr val="bg1"/>
+          </a:solidFill>
+          <a:ln>
+            <a:solidFill>
+              <a:schemeClr val="tx1"/>
+            </a:solidFill>
+          </a:ln>
+        </p:spPr>
+        <p:style>
+          <a:lnRef idx="2">
+            <a:schemeClr val="accent1">
+              <a:shade val="50000"/>
+            </a:schemeClr>
+          </a:lnRef>
+          <a:fillRef idx="1">
+            <a:schemeClr val="accent1"/>
+          </a:fillRef>
+          <a:effectRef idx="0">
+            <a:schemeClr val="accent1"/>
+          </a:effectRef>
+          <a:fontRef idx="minor">
+            <a:schemeClr val="lt1"/>
+          </a:fontRef>
+        </p:style>
+        <p:txBody>
+          <a:bodyPr rtlCol="0" anchor="ctr"/>
+          <a:lstStyle/>
+          <a:p>
+            <a:pPr algn="ctr"/>
+            <a:endParaRPr kumimoji="1" lang="ja-JP" altLang="en-US"/>
+          </a:p>
+        </p:txBody>
+      </p:sp>
+      <p:sp>
+        <p:nvSpPr>
+          <p:cNvPr id="14" name="正方形/長方形 13">
+            <a:extLst>
+              <a:ext uri="{FF2B5EF4-FFF2-40B4-BE49-F238E27FC236}">
+                <a16:creationId xmlns:a16="http://schemas.microsoft.com/office/drawing/2014/main" id="{052A859A-71B6-BA39-699A-7F4D30EF502F}"/>
+              </a:ext>
+            </a:extLst>
+          </p:cNvPr>
+          <p:cNvSpPr/>
+          <p:nvPr/>
+        </p:nvSpPr>
+        <p:spPr>
+          <a:xfrm>
+            <a:off x="5196168" y="1122960"/>
+            <a:ext cx="1069260" cy="1069260"/>
+          </a:xfrm>
+          <a:prstGeom prst="rect">
+            <a:avLst/>
+          </a:prstGeom>
+          <a:solidFill>
+            <a:schemeClr val="bg1"/>
+          </a:solidFill>
+          <a:ln>
+            <a:solidFill>
+              <a:schemeClr val="tx1"/>
+            </a:solidFill>
+          </a:ln>
+        </p:spPr>
+        <p:style>
+          <a:lnRef idx="2">
+            <a:schemeClr val="accent1">
+              <a:shade val="50000"/>
+            </a:schemeClr>
+          </a:lnRef>
+          <a:fillRef idx="1">
+            <a:schemeClr val="accent1"/>
+          </a:fillRef>
+          <a:effectRef idx="0">
+            <a:schemeClr val="accent1"/>
+          </a:effectRef>
+          <a:fontRef idx="minor">
+            <a:schemeClr val="lt1"/>
+          </a:fontRef>
+        </p:style>
+        <p:txBody>
+          <a:bodyPr rtlCol="0" anchor="ctr"/>
+          <a:lstStyle/>
+          <a:p>
+            <a:pPr algn="ctr"/>
+            <a:endParaRPr kumimoji="1" lang="ja-JP" altLang="en-US"/>
+          </a:p>
+        </p:txBody>
+      </p:sp>
+      <p:pic>
+        <p:nvPicPr>
+          <p:cNvPr id="2" name="図 1">
+            <a:extLst>
+              <a:ext uri="{FF2B5EF4-FFF2-40B4-BE49-F238E27FC236}">
+                <a16:creationId xmlns:a16="http://schemas.microsoft.com/office/drawing/2014/main" id="{6EF7BB26-4FEB-E53A-5D1C-62CBC87D08F5}"/>
+              </a:ext>
+            </a:extLst>
+          </p:cNvPr>
+          <p:cNvPicPr>
+            <a:picLocks noChangeAspect="1"/>
+          </p:cNvPicPr>
+          <p:nvPr/>
+        </p:nvPicPr>
+        <p:blipFill>
+          <a:blip r:embed="rId2"/>
+          <a:stretch>
+            <a:fillRect/>
+          </a:stretch>
+        </p:blipFill>
+        <p:spPr>
+          <a:xfrm>
+            <a:off x="5367548" y="1351405"/>
+            <a:ext cx="751422" cy="572400"/>
+          </a:xfrm>
+          <a:prstGeom prst="rect">
+            <a:avLst/>
+          </a:prstGeom>
+        </p:spPr>
+      </p:pic>
+      <p:pic>
+        <p:nvPicPr>
+          <p:cNvPr id="10" name="図 9">
+            <a:extLst>
+              <a:ext uri="{FF2B5EF4-FFF2-40B4-BE49-F238E27FC236}">
+                <a16:creationId xmlns:a16="http://schemas.microsoft.com/office/drawing/2014/main" id="{BF8B791B-E3F2-A488-B9C4-350BF087571A}"/>
+              </a:ext>
+            </a:extLst>
+          </p:cNvPr>
+          <p:cNvPicPr>
+            <a:picLocks noChangeAspect="1"/>
+          </p:cNvPicPr>
+          <p:nvPr/>
+        </p:nvPicPr>
+        <p:blipFill>
+          <a:blip r:embed="rId2"/>
+          <a:stretch>
+            <a:fillRect/>
+          </a:stretch>
+        </p:blipFill>
+        <p:spPr>
+          <a:xfrm>
+            <a:off x="1052169" y="1351405"/>
+            <a:ext cx="751422" cy="572400"/>
+          </a:xfrm>
+          <a:prstGeom prst="rect">
+            <a:avLst/>
+          </a:prstGeom>
+        </p:spPr>
+      </p:pic>
+      <p:pic>
+        <p:nvPicPr>
+          <p:cNvPr id="11" name="図 10">
+            <a:extLst>
+              <a:ext uri="{FF2B5EF4-FFF2-40B4-BE49-F238E27FC236}">
+                <a16:creationId xmlns:a16="http://schemas.microsoft.com/office/drawing/2014/main" id="{C4BF4D70-433D-F41C-7913-62EF1A2FFD55}"/>
+              </a:ext>
+            </a:extLst>
+          </p:cNvPr>
+          <p:cNvPicPr>
+            <a:picLocks noChangeAspect="1"/>
+          </p:cNvPicPr>
+          <p:nvPr/>
+        </p:nvPicPr>
+        <p:blipFill>
+          <a:blip r:embed="rId2"/>
+          <a:stretch>
+            <a:fillRect/>
+          </a:stretch>
+        </p:blipFill>
+        <p:spPr>
+          <a:xfrm rot="-600000">
+            <a:off x="977303" y="3414010"/>
+            <a:ext cx="751422" cy="572400"/>
+          </a:xfrm>
+          <a:prstGeom prst="rect">
+            <a:avLst/>
+          </a:prstGeom>
+        </p:spPr>
+      </p:pic>
+      <p:pic>
+        <p:nvPicPr>
+          <p:cNvPr id="12" name="図 11">
+            <a:extLst>
+              <a:ext uri="{FF2B5EF4-FFF2-40B4-BE49-F238E27FC236}">
+                <a16:creationId xmlns:a16="http://schemas.microsoft.com/office/drawing/2014/main" id="{8ECB4ED2-B735-49A3-98C3-3EEF85F67795}"/>
+              </a:ext>
+            </a:extLst>
+          </p:cNvPr>
+          <p:cNvPicPr>
+            <a:picLocks noChangeAspect="1"/>
+          </p:cNvPicPr>
+          <p:nvPr/>
+        </p:nvPicPr>
+        <p:blipFill>
+          <a:blip r:embed="rId2"/>
+          <a:stretch>
+            <a:fillRect/>
+          </a:stretch>
+        </p:blipFill>
+        <p:spPr>
+          <a:xfrm rot="-1200000">
+            <a:off x="3074708" y="3309103"/>
+            <a:ext cx="751422" cy="572400"/>
+          </a:xfrm>
+          <a:prstGeom prst="rect">
+            <a:avLst/>
+          </a:prstGeom>
+        </p:spPr>
+      </p:pic>
+      <p:pic>
+        <p:nvPicPr>
+          <p:cNvPr id="13" name="図 12">
+            <a:extLst>
+              <a:ext uri="{FF2B5EF4-FFF2-40B4-BE49-F238E27FC236}">
+                <a16:creationId xmlns:a16="http://schemas.microsoft.com/office/drawing/2014/main" id="{58DA3995-B619-7936-140C-19B5691C1ECD}"/>
+              </a:ext>
+            </a:extLst>
+          </p:cNvPr>
+          <p:cNvPicPr>
+            <a:picLocks noChangeAspect="1"/>
+          </p:cNvPicPr>
+          <p:nvPr/>
+        </p:nvPicPr>
+        <p:blipFill>
+          <a:blip r:embed="rId2"/>
+          <a:stretch>
+            <a:fillRect/>
+          </a:stretch>
+        </p:blipFill>
+        <p:spPr>
+          <a:xfrm rot="-1800000">
+            <a:off x="5202078" y="3219169"/>
+            <a:ext cx="751422" cy="572400"/>
+          </a:xfrm>
+          <a:prstGeom prst="rect">
+            <a:avLst/>
+          </a:prstGeom>
+        </p:spPr>
+      </p:pic>
+      <p:pic>
+        <p:nvPicPr>
+          <p:cNvPr id="15" name="図 14">
+            <a:extLst>
+              <a:ext uri="{FF2B5EF4-FFF2-40B4-BE49-F238E27FC236}">
+                <a16:creationId xmlns:a16="http://schemas.microsoft.com/office/drawing/2014/main" id="{FE9CB2E5-2492-C5D9-E1DA-50A23BB6EB30}"/>
+              </a:ext>
+            </a:extLst>
+          </p:cNvPr>
+          <p:cNvPicPr>
+            <a:picLocks noChangeAspect="1"/>
+          </p:cNvPicPr>
+          <p:nvPr/>
+        </p:nvPicPr>
+        <p:blipFill>
+          <a:blip r:embed="rId2"/>
+          <a:stretch>
+            <a:fillRect/>
+          </a:stretch>
+        </p:blipFill>
+        <p:spPr>
+          <a:xfrm rot="-2400000">
+            <a:off x="7314444" y="3368845"/>
+            <a:ext cx="751422" cy="572400"/>
+          </a:xfrm>
+          <a:prstGeom prst="rect">
+            <a:avLst/>
+          </a:prstGeom>
+        </p:spPr>
+      </p:pic>
+      <p:pic>
+        <p:nvPicPr>
+          <p:cNvPr id="16" name="図 15">
+            <a:extLst>
+              <a:ext uri="{FF2B5EF4-FFF2-40B4-BE49-F238E27FC236}">
+                <a16:creationId xmlns:a16="http://schemas.microsoft.com/office/drawing/2014/main" id="{B0E6F8F9-D4D4-2B43-5460-B73671CCA4F1}"/>
+              </a:ext>
+            </a:extLst>
+          </p:cNvPr>
+          <p:cNvPicPr>
+            <a:picLocks noChangeAspect="1"/>
+          </p:cNvPicPr>
+          <p:nvPr/>
+        </p:nvPicPr>
+        <p:blipFill>
+          <a:blip r:embed="rId2"/>
+          <a:stretch>
+            <a:fillRect/>
+          </a:stretch>
+        </p:blipFill>
+        <p:spPr>
+          <a:xfrm rot="-3000000">
+            <a:off x="9426793" y="3548909"/>
+            <a:ext cx="751422" cy="572400"/>
+          </a:xfrm>
+          <a:prstGeom prst="rect">
+            <a:avLst/>
+          </a:prstGeom>
+        </p:spPr>
+      </p:pic>
+    </p:spTree>
+    <p:extLst>
+      <p:ext uri="{BB962C8B-B14F-4D97-AF65-F5344CB8AC3E}">
+        <p14:creationId xmlns:p14="http://schemas.microsoft.com/office/powerpoint/2010/main" val="789617277"/>
+      </p:ext>
+    </p:extLst>
+  </p:cSld>
+  <p:clrMapOvr>
+    <a:masterClrMapping/>
+  </p:clrMapOvr>
+</p:sld>
+</file>
+
+<file path=ppt/slides/slide6.xml><?xml version="1.0" encoding="utf-8"?>
+<p:sld xmlns:a="http://schemas.openxmlformats.org/drawingml/2006/main" xmlns:r="http://schemas.openxmlformats.org/officeDocument/2006/relationships" xmlns:p="http://schemas.openxmlformats.org/presentationml/2006/main">
+  <p:cSld>
+    <p:spTree>
+      <p:nvGrpSpPr>
         <p:cNvPr id="1" name=""/>
         <p:cNvGrpSpPr/>
         <p:nvPr/>
@@ -5201,7 +6432,7 @@
 </p:sld>
 </file>
 
-<file path=ppt/slides/slide5.xml><?xml version="1.0" encoding="utf-8"?>
+<file path=ppt/slides/slide7.xml><?xml version="1.0" encoding="utf-8"?>
 <p:sld xmlns:a="http://schemas.openxmlformats.org/drawingml/2006/main" xmlns:r="http://schemas.openxmlformats.org/officeDocument/2006/relationships" xmlns:p="http://schemas.openxmlformats.org/presentationml/2006/main">
   <p:cSld>
     <p:spTree>
@@ -5760,6 +6991,1369 @@
     <p:extLst>
       <p:ext uri="{BB962C8B-B14F-4D97-AF65-F5344CB8AC3E}">
         <p14:creationId xmlns:p14="http://schemas.microsoft.com/office/powerpoint/2010/main" val="2557406677"/>
+      </p:ext>
+    </p:extLst>
+  </p:cSld>
+  <p:clrMapOvr>
+    <a:masterClrMapping/>
+  </p:clrMapOvr>
+</p:sld>
+</file>
+
+<file path=ppt/slides/slide8.xml><?xml version="1.0" encoding="utf-8"?>
+<p:sld xmlns:a="http://schemas.openxmlformats.org/drawingml/2006/main" xmlns:r="http://schemas.openxmlformats.org/officeDocument/2006/relationships" xmlns:p="http://schemas.openxmlformats.org/presentationml/2006/main">
+  <p:cSld>
+    <p:spTree>
+      <p:nvGrpSpPr>
+        <p:cNvPr id="1" name="">
+          <a:extLst>
+            <a:ext uri="{FF2B5EF4-FFF2-40B4-BE49-F238E27FC236}">
+              <a16:creationId xmlns:a16="http://schemas.microsoft.com/office/drawing/2014/main" id="{8B6146F7-E699-9D6D-7C2F-CF9C15237FD1}"/>
+            </a:ext>
+          </a:extLst>
+        </p:cNvPr>
+        <p:cNvGrpSpPr/>
+        <p:nvPr/>
+      </p:nvGrpSpPr>
+      <p:grpSpPr>
+        <a:xfrm>
+          <a:off x="0" y="0"/>
+          <a:ext cx="0" cy="0"/>
+          <a:chOff x="0" y="0"/>
+          <a:chExt cx="0" cy="0"/>
+        </a:xfrm>
+      </p:grpSpPr>
+      <p:pic>
+        <p:nvPicPr>
+          <p:cNvPr id="4" name="図 3">
+            <a:extLst>
+              <a:ext uri="{FF2B5EF4-FFF2-40B4-BE49-F238E27FC236}">
+                <a16:creationId xmlns:a16="http://schemas.microsoft.com/office/drawing/2014/main" id="{73A69C09-2190-3E84-8139-8F3E250D5575}"/>
+              </a:ext>
+            </a:extLst>
+          </p:cNvPr>
+          <p:cNvPicPr>
+            <a:picLocks noChangeAspect="1"/>
+          </p:cNvPicPr>
+          <p:nvPr/>
+        </p:nvPicPr>
+        <p:blipFill>
+          <a:blip r:embed="rId2">
+            <a:duotone>
+              <a:schemeClr val="accent6">
+                <a:shade val="45000"/>
+                <a:satMod val="135000"/>
+              </a:schemeClr>
+              <a:prstClr val="white"/>
+            </a:duotone>
+          </a:blip>
+          <a:stretch>
+            <a:fillRect/>
+          </a:stretch>
+        </p:blipFill>
+        <p:spPr>
+          <a:xfrm>
+            <a:off x="6346155" y="1488358"/>
+            <a:ext cx="5834378" cy="4444369"/>
+          </a:xfrm>
+          <a:prstGeom prst="rect">
+            <a:avLst/>
+          </a:prstGeom>
+          <a:effectLst>
+            <a:innerShdw blurRad="635000" dist="508000" dir="8100000">
+              <a:prstClr val="black">
+                <a:alpha val="25000"/>
+              </a:prstClr>
+            </a:innerShdw>
+            <a:softEdge rad="127000"/>
+          </a:effectLst>
+        </p:spPr>
+      </p:pic>
+      <p:sp>
+        <p:nvSpPr>
+          <p:cNvPr id="14" name="円/楕円 13">
+            <a:extLst>
+              <a:ext uri="{FF2B5EF4-FFF2-40B4-BE49-F238E27FC236}">
+                <a16:creationId xmlns:a16="http://schemas.microsoft.com/office/drawing/2014/main" id="{2690D817-46B7-D4D2-D07E-A72B73167AAA}"/>
+              </a:ext>
+            </a:extLst>
+          </p:cNvPr>
+          <p:cNvSpPr/>
+          <p:nvPr/>
+        </p:nvSpPr>
+        <p:spPr>
+          <a:xfrm>
+            <a:off x="8291125" y="2770775"/>
+            <a:ext cx="502276" cy="1013984"/>
+          </a:xfrm>
+          <a:prstGeom prst="ellipse">
+            <a:avLst/>
+          </a:prstGeom>
+          <a:solidFill>
+            <a:schemeClr val="accent6">
+              <a:lumMod val="75000"/>
+            </a:schemeClr>
+          </a:solidFill>
+          <a:ln>
+            <a:noFill/>
+          </a:ln>
+        </p:spPr>
+        <p:style>
+          <a:lnRef idx="2">
+            <a:schemeClr val="accent1">
+              <a:shade val="50000"/>
+            </a:schemeClr>
+          </a:lnRef>
+          <a:fillRef idx="1">
+            <a:schemeClr val="accent1"/>
+          </a:fillRef>
+          <a:effectRef idx="0">
+            <a:schemeClr val="accent1"/>
+          </a:effectRef>
+          <a:fontRef idx="minor">
+            <a:schemeClr val="lt1"/>
+          </a:fontRef>
+        </p:style>
+        <p:txBody>
+          <a:bodyPr rtlCol="0" anchor="ctr"/>
+          <a:lstStyle/>
+          <a:p>
+            <a:pPr algn="ctr"/>
+            <a:endParaRPr kumimoji="1" lang="ja-JP" altLang="en-US"/>
+          </a:p>
+        </p:txBody>
+      </p:sp>
+      <p:sp>
+        <p:nvSpPr>
+          <p:cNvPr id="15" name="円/楕円 14">
+            <a:extLst>
+              <a:ext uri="{FF2B5EF4-FFF2-40B4-BE49-F238E27FC236}">
+                <a16:creationId xmlns:a16="http://schemas.microsoft.com/office/drawing/2014/main" id="{D5C59135-2C8F-24D8-FEA7-99616DBC42A1}"/>
+              </a:ext>
+            </a:extLst>
+          </p:cNvPr>
+          <p:cNvSpPr/>
+          <p:nvPr/>
+        </p:nvSpPr>
+        <p:spPr>
+          <a:xfrm>
+            <a:off x="8499333" y="3129942"/>
+            <a:ext cx="269700" cy="523881"/>
+          </a:xfrm>
+          <a:prstGeom prst="ellipse">
+            <a:avLst/>
+          </a:prstGeom>
+          <a:solidFill>
+            <a:schemeClr val="accent6">
+              <a:lumMod val="20000"/>
+              <a:lumOff val="80000"/>
+            </a:schemeClr>
+          </a:solidFill>
+          <a:ln>
+            <a:noFill/>
+          </a:ln>
+        </p:spPr>
+        <p:style>
+          <a:lnRef idx="2">
+            <a:schemeClr val="accent1">
+              <a:shade val="50000"/>
+            </a:schemeClr>
+          </a:lnRef>
+          <a:fillRef idx="1">
+            <a:schemeClr val="accent1"/>
+          </a:fillRef>
+          <a:effectRef idx="0">
+            <a:schemeClr val="accent1"/>
+          </a:effectRef>
+          <a:fontRef idx="minor">
+            <a:schemeClr val="lt1"/>
+          </a:fontRef>
+        </p:style>
+        <p:txBody>
+          <a:bodyPr rtlCol="0" anchor="ctr"/>
+          <a:lstStyle/>
+          <a:p>
+            <a:pPr algn="ctr"/>
+            <a:endParaRPr kumimoji="1" lang="ja-JP" altLang="en-US"/>
+          </a:p>
+        </p:txBody>
+      </p:sp>
+      <p:sp>
+        <p:nvSpPr>
+          <p:cNvPr id="16" name="円/楕円 15">
+            <a:extLst>
+              <a:ext uri="{FF2B5EF4-FFF2-40B4-BE49-F238E27FC236}">
+                <a16:creationId xmlns:a16="http://schemas.microsoft.com/office/drawing/2014/main" id="{921B5D52-5D07-5255-9A5E-FEA57B7E89DB}"/>
+              </a:ext>
+            </a:extLst>
+          </p:cNvPr>
+          <p:cNvSpPr/>
+          <p:nvPr/>
+        </p:nvSpPr>
+        <p:spPr>
+          <a:xfrm>
+            <a:off x="9707045" y="2770775"/>
+            <a:ext cx="502276" cy="1013984"/>
+          </a:xfrm>
+          <a:prstGeom prst="ellipse">
+            <a:avLst/>
+          </a:prstGeom>
+          <a:solidFill>
+            <a:schemeClr val="accent6">
+              <a:lumMod val="75000"/>
+            </a:schemeClr>
+          </a:solidFill>
+          <a:ln>
+            <a:noFill/>
+          </a:ln>
+        </p:spPr>
+        <p:style>
+          <a:lnRef idx="2">
+            <a:schemeClr val="accent1">
+              <a:shade val="50000"/>
+            </a:schemeClr>
+          </a:lnRef>
+          <a:fillRef idx="1">
+            <a:schemeClr val="accent1"/>
+          </a:fillRef>
+          <a:effectRef idx="0">
+            <a:schemeClr val="accent1"/>
+          </a:effectRef>
+          <a:fontRef idx="minor">
+            <a:schemeClr val="lt1"/>
+          </a:fontRef>
+        </p:style>
+        <p:txBody>
+          <a:bodyPr rtlCol="0" anchor="ctr"/>
+          <a:lstStyle/>
+          <a:p>
+            <a:pPr algn="ctr"/>
+            <a:endParaRPr kumimoji="1" lang="ja-JP" altLang="en-US"/>
+          </a:p>
+        </p:txBody>
+      </p:sp>
+      <p:sp>
+        <p:nvSpPr>
+          <p:cNvPr id="17" name="円/楕円 16">
+            <a:extLst>
+              <a:ext uri="{FF2B5EF4-FFF2-40B4-BE49-F238E27FC236}">
+                <a16:creationId xmlns:a16="http://schemas.microsoft.com/office/drawing/2014/main" id="{CD11592C-2192-E8E6-6B37-63857859476B}"/>
+              </a:ext>
+            </a:extLst>
+          </p:cNvPr>
+          <p:cNvSpPr/>
+          <p:nvPr/>
+        </p:nvSpPr>
+        <p:spPr>
+          <a:xfrm>
+            <a:off x="9734947" y="3129942"/>
+            <a:ext cx="269700" cy="523881"/>
+          </a:xfrm>
+          <a:prstGeom prst="ellipse">
+            <a:avLst/>
+          </a:prstGeom>
+          <a:solidFill>
+            <a:schemeClr val="accent6">
+              <a:lumMod val="20000"/>
+              <a:lumOff val="80000"/>
+            </a:schemeClr>
+          </a:solidFill>
+          <a:ln>
+            <a:noFill/>
+          </a:ln>
+        </p:spPr>
+        <p:style>
+          <a:lnRef idx="2">
+            <a:schemeClr val="accent1">
+              <a:shade val="50000"/>
+            </a:schemeClr>
+          </a:lnRef>
+          <a:fillRef idx="1">
+            <a:schemeClr val="accent1"/>
+          </a:fillRef>
+          <a:effectRef idx="0">
+            <a:schemeClr val="accent1"/>
+          </a:effectRef>
+          <a:fontRef idx="minor">
+            <a:schemeClr val="lt1"/>
+          </a:fontRef>
+        </p:style>
+        <p:txBody>
+          <a:bodyPr rtlCol="0" anchor="ctr"/>
+          <a:lstStyle/>
+          <a:p>
+            <a:pPr algn="ctr"/>
+            <a:endParaRPr kumimoji="1" lang="ja-JP" altLang="en-US"/>
+          </a:p>
+        </p:txBody>
+      </p:sp>
+      <p:sp>
+        <p:nvSpPr>
+          <p:cNvPr id="19" name="円/楕円 18">
+            <a:extLst>
+              <a:ext uri="{FF2B5EF4-FFF2-40B4-BE49-F238E27FC236}">
+                <a16:creationId xmlns:a16="http://schemas.microsoft.com/office/drawing/2014/main" id="{292AD128-9E05-968A-0361-6FD1D6167CE4}"/>
+              </a:ext>
+            </a:extLst>
+          </p:cNvPr>
+          <p:cNvSpPr/>
+          <p:nvPr/>
+        </p:nvSpPr>
+        <p:spPr>
+          <a:xfrm rot="19800000">
+            <a:off x="-47054" y="1624942"/>
+            <a:ext cx="5130520" cy="4087744"/>
+          </a:xfrm>
+          <a:prstGeom prst="ellipse">
+            <a:avLst/>
+          </a:prstGeom>
+          <a:solidFill>
+            <a:schemeClr val="accent6">
+              <a:lumMod val="40000"/>
+              <a:lumOff val="60000"/>
+            </a:schemeClr>
+          </a:solidFill>
+          <a:ln>
+            <a:noFill/>
+          </a:ln>
+        </p:spPr>
+        <p:style>
+          <a:lnRef idx="2">
+            <a:schemeClr val="accent1">
+              <a:shade val="50000"/>
+            </a:schemeClr>
+          </a:lnRef>
+          <a:fillRef idx="1">
+            <a:schemeClr val="accent1"/>
+          </a:fillRef>
+          <a:effectRef idx="0">
+            <a:schemeClr val="accent1"/>
+          </a:effectRef>
+          <a:fontRef idx="minor">
+            <a:schemeClr val="lt1"/>
+          </a:fontRef>
+        </p:style>
+        <p:txBody>
+          <a:bodyPr rtlCol="0" anchor="ctr"/>
+          <a:lstStyle/>
+          <a:p>
+            <a:pPr algn="ctr"/>
+            <a:endParaRPr kumimoji="1" lang="ja-JP" altLang="en-US"/>
+          </a:p>
+        </p:txBody>
+      </p:sp>
+      <p:sp>
+        <p:nvSpPr>
+          <p:cNvPr id="20" name="円/楕円 19">
+            <a:extLst>
+              <a:ext uri="{FF2B5EF4-FFF2-40B4-BE49-F238E27FC236}">
+                <a16:creationId xmlns:a16="http://schemas.microsoft.com/office/drawing/2014/main" id="{DAAA7CB7-E4FD-DAC6-386A-1EBE77FBD2E3}"/>
+              </a:ext>
+            </a:extLst>
+          </p:cNvPr>
+          <p:cNvSpPr/>
+          <p:nvPr/>
+        </p:nvSpPr>
+        <p:spPr>
+          <a:xfrm rot="1800000" flipH="1">
+            <a:off x="890958" y="1624941"/>
+            <a:ext cx="5130520" cy="4087744"/>
+          </a:xfrm>
+          <a:prstGeom prst="ellipse">
+            <a:avLst/>
+          </a:prstGeom>
+          <a:solidFill>
+            <a:srgbClr val="C5E0B4"/>
+          </a:solidFill>
+          <a:ln>
+            <a:noFill/>
+          </a:ln>
+        </p:spPr>
+        <p:style>
+          <a:lnRef idx="2">
+            <a:schemeClr val="accent1">
+              <a:shade val="50000"/>
+            </a:schemeClr>
+          </a:lnRef>
+          <a:fillRef idx="1">
+            <a:schemeClr val="accent1"/>
+          </a:fillRef>
+          <a:effectRef idx="0">
+            <a:schemeClr val="accent1"/>
+          </a:effectRef>
+          <a:fontRef idx="minor">
+            <a:schemeClr val="lt1"/>
+          </a:fontRef>
+        </p:style>
+        <p:txBody>
+          <a:bodyPr rtlCol="0" anchor="ctr"/>
+          <a:lstStyle/>
+          <a:p>
+            <a:pPr algn="ctr"/>
+            <a:endParaRPr kumimoji="1" lang="ja-JP" altLang="en-US"/>
+          </a:p>
+        </p:txBody>
+      </p:sp>
+      <p:sp>
+        <p:nvSpPr>
+          <p:cNvPr id="21" name="円/楕円 20">
+            <a:extLst>
+              <a:ext uri="{FF2B5EF4-FFF2-40B4-BE49-F238E27FC236}">
+                <a16:creationId xmlns:a16="http://schemas.microsoft.com/office/drawing/2014/main" id="{E3D907A7-92AD-1136-3AC1-870A88CE1DC6}"/>
+              </a:ext>
+            </a:extLst>
+          </p:cNvPr>
+          <p:cNvSpPr/>
+          <p:nvPr/>
+        </p:nvSpPr>
+        <p:spPr>
+          <a:xfrm>
+            <a:off x="1048624" y="5179088"/>
+            <a:ext cx="3812146" cy="746975"/>
+          </a:xfrm>
+          <a:prstGeom prst="ellipse">
+            <a:avLst/>
+          </a:prstGeom>
+          <a:solidFill>
+            <a:schemeClr val="accent6">
+              <a:lumMod val="40000"/>
+              <a:lumOff val="60000"/>
+            </a:schemeClr>
+          </a:solidFill>
+          <a:ln>
+            <a:noFill/>
+          </a:ln>
+        </p:spPr>
+        <p:style>
+          <a:lnRef idx="2">
+            <a:schemeClr val="accent1">
+              <a:shade val="50000"/>
+            </a:schemeClr>
+          </a:lnRef>
+          <a:fillRef idx="1">
+            <a:schemeClr val="accent1"/>
+          </a:fillRef>
+          <a:effectRef idx="0">
+            <a:schemeClr val="accent1"/>
+          </a:effectRef>
+          <a:fontRef idx="minor">
+            <a:schemeClr val="lt1"/>
+          </a:fontRef>
+        </p:style>
+        <p:txBody>
+          <a:bodyPr rtlCol="0" anchor="ctr"/>
+          <a:lstStyle/>
+          <a:p>
+            <a:pPr algn="ctr"/>
+            <a:endParaRPr kumimoji="1" lang="ja-JP" altLang="en-US"/>
+          </a:p>
+        </p:txBody>
+      </p:sp>
+      <p:sp>
+        <p:nvSpPr>
+          <p:cNvPr id="22" name="円/楕円 21">
+            <a:extLst>
+              <a:ext uri="{FF2B5EF4-FFF2-40B4-BE49-F238E27FC236}">
+                <a16:creationId xmlns:a16="http://schemas.microsoft.com/office/drawing/2014/main" id="{CDAB6D6E-FED7-434D-C73C-23AF4C62FA2D}"/>
+              </a:ext>
+            </a:extLst>
+          </p:cNvPr>
+          <p:cNvSpPr/>
+          <p:nvPr/>
+        </p:nvSpPr>
+        <p:spPr>
+          <a:xfrm>
+            <a:off x="2015930" y="2764110"/>
+            <a:ext cx="502276" cy="1013984"/>
+          </a:xfrm>
+          <a:prstGeom prst="ellipse">
+            <a:avLst/>
+          </a:prstGeom>
+          <a:solidFill>
+            <a:schemeClr val="accent6">
+              <a:lumMod val="75000"/>
+            </a:schemeClr>
+          </a:solidFill>
+          <a:ln>
+            <a:noFill/>
+          </a:ln>
+        </p:spPr>
+        <p:style>
+          <a:lnRef idx="2">
+            <a:schemeClr val="accent1">
+              <a:shade val="50000"/>
+            </a:schemeClr>
+          </a:lnRef>
+          <a:fillRef idx="1">
+            <a:schemeClr val="accent1"/>
+          </a:fillRef>
+          <a:effectRef idx="0">
+            <a:schemeClr val="accent1"/>
+          </a:effectRef>
+          <a:fontRef idx="minor">
+            <a:schemeClr val="lt1"/>
+          </a:fontRef>
+        </p:style>
+        <p:txBody>
+          <a:bodyPr rtlCol="0" anchor="ctr"/>
+          <a:lstStyle/>
+          <a:p>
+            <a:pPr algn="ctr"/>
+            <a:endParaRPr kumimoji="1" lang="ja-JP" altLang="en-US"/>
+          </a:p>
+        </p:txBody>
+      </p:sp>
+      <p:sp>
+        <p:nvSpPr>
+          <p:cNvPr id="23" name="円/楕円 22">
+            <a:extLst>
+              <a:ext uri="{FF2B5EF4-FFF2-40B4-BE49-F238E27FC236}">
+                <a16:creationId xmlns:a16="http://schemas.microsoft.com/office/drawing/2014/main" id="{398F19B8-61DF-3BDA-DE1A-97801A7891FC}"/>
+              </a:ext>
+            </a:extLst>
+          </p:cNvPr>
+          <p:cNvSpPr/>
+          <p:nvPr/>
+        </p:nvSpPr>
+        <p:spPr>
+          <a:xfrm>
+            <a:off x="2224138" y="3123277"/>
+            <a:ext cx="269700" cy="523881"/>
+          </a:xfrm>
+          <a:prstGeom prst="ellipse">
+            <a:avLst/>
+          </a:prstGeom>
+          <a:solidFill>
+            <a:schemeClr val="accent6">
+              <a:lumMod val="20000"/>
+              <a:lumOff val="80000"/>
+            </a:schemeClr>
+          </a:solidFill>
+          <a:ln>
+            <a:noFill/>
+          </a:ln>
+        </p:spPr>
+        <p:style>
+          <a:lnRef idx="2">
+            <a:schemeClr val="accent1">
+              <a:shade val="50000"/>
+            </a:schemeClr>
+          </a:lnRef>
+          <a:fillRef idx="1">
+            <a:schemeClr val="accent1"/>
+          </a:fillRef>
+          <a:effectRef idx="0">
+            <a:schemeClr val="accent1"/>
+          </a:effectRef>
+          <a:fontRef idx="minor">
+            <a:schemeClr val="lt1"/>
+          </a:fontRef>
+        </p:style>
+        <p:txBody>
+          <a:bodyPr rtlCol="0" anchor="ctr"/>
+          <a:lstStyle/>
+          <a:p>
+            <a:pPr algn="ctr"/>
+            <a:endParaRPr kumimoji="1" lang="ja-JP" altLang="en-US"/>
+          </a:p>
+        </p:txBody>
+      </p:sp>
+      <p:sp>
+        <p:nvSpPr>
+          <p:cNvPr id="24" name="円/楕円 23">
+            <a:extLst>
+              <a:ext uri="{FF2B5EF4-FFF2-40B4-BE49-F238E27FC236}">
+                <a16:creationId xmlns:a16="http://schemas.microsoft.com/office/drawing/2014/main" id="{807F97E4-70A4-47CA-E01C-1F4F5718972F}"/>
+              </a:ext>
+            </a:extLst>
+          </p:cNvPr>
+          <p:cNvSpPr/>
+          <p:nvPr/>
+        </p:nvSpPr>
+        <p:spPr>
+          <a:xfrm>
+            <a:off x="3431850" y="2764110"/>
+            <a:ext cx="502276" cy="1013984"/>
+          </a:xfrm>
+          <a:prstGeom prst="ellipse">
+            <a:avLst/>
+          </a:prstGeom>
+          <a:solidFill>
+            <a:schemeClr val="accent6">
+              <a:lumMod val="75000"/>
+            </a:schemeClr>
+          </a:solidFill>
+          <a:ln>
+            <a:noFill/>
+          </a:ln>
+        </p:spPr>
+        <p:style>
+          <a:lnRef idx="2">
+            <a:schemeClr val="accent1">
+              <a:shade val="50000"/>
+            </a:schemeClr>
+          </a:lnRef>
+          <a:fillRef idx="1">
+            <a:schemeClr val="accent1"/>
+          </a:fillRef>
+          <a:effectRef idx="0">
+            <a:schemeClr val="accent1"/>
+          </a:effectRef>
+          <a:fontRef idx="minor">
+            <a:schemeClr val="lt1"/>
+          </a:fontRef>
+        </p:style>
+        <p:txBody>
+          <a:bodyPr rtlCol="0" anchor="ctr"/>
+          <a:lstStyle/>
+          <a:p>
+            <a:pPr algn="ctr"/>
+            <a:endParaRPr kumimoji="1" lang="ja-JP" altLang="en-US"/>
+          </a:p>
+        </p:txBody>
+      </p:sp>
+      <p:sp>
+        <p:nvSpPr>
+          <p:cNvPr id="25" name="円/楕円 24">
+            <a:extLst>
+              <a:ext uri="{FF2B5EF4-FFF2-40B4-BE49-F238E27FC236}">
+                <a16:creationId xmlns:a16="http://schemas.microsoft.com/office/drawing/2014/main" id="{233D974F-85DA-11A1-386A-7CC67F55BD03}"/>
+              </a:ext>
+            </a:extLst>
+          </p:cNvPr>
+          <p:cNvSpPr/>
+          <p:nvPr/>
+        </p:nvSpPr>
+        <p:spPr>
+          <a:xfrm>
+            <a:off x="3459752" y="3123277"/>
+            <a:ext cx="269700" cy="523881"/>
+          </a:xfrm>
+          <a:prstGeom prst="ellipse">
+            <a:avLst/>
+          </a:prstGeom>
+          <a:solidFill>
+            <a:schemeClr val="accent6">
+              <a:lumMod val="20000"/>
+              <a:lumOff val="80000"/>
+            </a:schemeClr>
+          </a:solidFill>
+          <a:ln>
+            <a:noFill/>
+          </a:ln>
+        </p:spPr>
+        <p:style>
+          <a:lnRef idx="2">
+            <a:schemeClr val="accent1">
+              <a:shade val="50000"/>
+            </a:schemeClr>
+          </a:lnRef>
+          <a:fillRef idx="1">
+            <a:schemeClr val="accent1"/>
+          </a:fillRef>
+          <a:effectRef idx="0">
+            <a:schemeClr val="accent1"/>
+          </a:effectRef>
+          <a:fontRef idx="minor">
+            <a:schemeClr val="lt1"/>
+          </a:fontRef>
+        </p:style>
+        <p:txBody>
+          <a:bodyPr rtlCol="0" anchor="ctr"/>
+          <a:lstStyle/>
+          <a:p>
+            <a:pPr algn="ctr"/>
+            <a:endParaRPr kumimoji="1" lang="ja-JP" altLang="en-US"/>
+          </a:p>
+        </p:txBody>
+      </p:sp>
+    </p:spTree>
+    <p:extLst>
+      <p:ext uri="{BB962C8B-B14F-4D97-AF65-F5344CB8AC3E}">
+        <p14:creationId xmlns:p14="http://schemas.microsoft.com/office/powerpoint/2010/main" val="1223276308"/>
+      </p:ext>
+    </p:extLst>
+  </p:cSld>
+  <p:clrMapOvr>
+    <a:masterClrMapping/>
+  </p:clrMapOvr>
+</p:sld>
+</file>
+
+<file path=ppt/slides/slide9.xml><?xml version="1.0" encoding="utf-8"?>
+<p:sld xmlns:a="http://schemas.openxmlformats.org/drawingml/2006/main" xmlns:r="http://schemas.openxmlformats.org/officeDocument/2006/relationships" xmlns:p="http://schemas.openxmlformats.org/presentationml/2006/main">
+  <p:cSld>
+    <p:spTree>
+      <p:nvGrpSpPr>
+        <p:cNvPr id="1" name="">
+          <a:extLst>
+            <a:ext uri="{FF2B5EF4-FFF2-40B4-BE49-F238E27FC236}">
+              <a16:creationId xmlns:a16="http://schemas.microsoft.com/office/drawing/2014/main" id="{231E612F-C01C-A1BB-AF0C-840874130AB4}"/>
+            </a:ext>
+          </a:extLst>
+        </p:cNvPr>
+        <p:cNvGrpSpPr/>
+        <p:nvPr/>
+      </p:nvGrpSpPr>
+      <p:grpSpPr>
+        <a:xfrm>
+          <a:off x="0" y="0"/>
+          <a:ext cx="0" cy="0"/>
+          <a:chOff x="0" y="0"/>
+          <a:chExt cx="0" cy="0"/>
+        </a:xfrm>
+      </p:grpSpPr>
+      <p:pic>
+        <p:nvPicPr>
+          <p:cNvPr id="4" name="図 3">
+            <a:extLst>
+              <a:ext uri="{FF2B5EF4-FFF2-40B4-BE49-F238E27FC236}">
+                <a16:creationId xmlns:a16="http://schemas.microsoft.com/office/drawing/2014/main" id="{4E63FED6-768C-7D40-8DE6-523D551ADB46}"/>
+              </a:ext>
+            </a:extLst>
+          </p:cNvPr>
+          <p:cNvPicPr>
+            <a:picLocks noChangeAspect="1"/>
+          </p:cNvPicPr>
+          <p:nvPr/>
+        </p:nvPicPr>
+        <p:blipFill>
+          <a:blip r:embed="rId2">
+            <a:duotone>
+              <a:schemeClr val="accent4">
+                <a:shade val="45000"/>
+                <a:satMod val="135000"/>
+              </a:schemeClr>
+              <a:prstClr val="white"/>
+            </a:duotone>
+          </a:blip>
+          <a:stretch>
+            <a:fillRect/>
+          </a:stretch>
+        </p:blipFill>
+        <p:spPr>
+          <a:xfrm>
+            <a:off x="6346155" y="1488358"/>
+            <a:ext cx="5834378" cy="4444369"/>
+          </a:xfrm>
+          <a:prstGeom prst="rect">
+            <a:avLst/>
+          </a:prstGeom>
+          <a:effectLst>
+            <a:innerShdw blurRad="635000" dist="508000" dir="8100000">
+              <a:prstClr val="black">
+                <a:alpha val="25000"/>
+              </a:prstClr>
+            </a:innerShdw>
+            <a:softEdge rad="127000"/>
+          </a:effectLst>
+        </p:spPr>
+      </p:pic>
+      <p:sp>
+        <p:nvSpPr>
+          <p:cNvPr id="14" name="円/楕円 13">
+            <a:extLst>
+              <a:ext uri="{FF2B5EF4-FFF2-40B4-BE49-F238E27FC236}">
+                <a16:creationId xmlns:a16="http://schemas.microsoft.com/office/drawing/2014/main" id="{335FA8B7-82A4-6080-1469-223A2BFE1B2C}"/>
+              </a:ext>
+            </a:extLst>
+          </p:cNvPr>
+          <p:cNvSpPr/>
+          <p:nvPr/>
+        </p:nvSpPr>
+        <p:spPr>
+          <a:xfrm>
+            <a:off x="8291125" y="2770775"/>
+            <a:ext cx="502276" cy="1013984"/>
+          </a:xfrm>
+          <a:prstGeom prst="ellipse">
+            <a:avLst/>
+          </a:prstGeom>
+          <a:solidFill>
+            <a:schemeClr val="accent4">
+              <a:lumMod val="75000"/>
+            </a:schemeClr>
+          </a:solidFill>
+          <a:ln>
+            <a:noFill/>
+          </a:ln>
+        </p:spPr>
+        <p:style>
+          <a:lnRef idx="2">
+            <a:schemeClr val="accent1">
+              <a:shade val="50000"/>
+            </a:schemeClr>
+          </a:lnRef>
+          <a:fillRef idx="1">
+            <a:schemeClr val="accent1"/>
+          </a:fillRef>
+          <a:effectRef idx="0">
+            <a:schemeClr val="accent1"/>
+          </a:effectRef>
+          <a:fontRef idx="minor">
+            <a:schemeClr val="lt1"/>
+          </a:fontRef>
+        </p:style>
+        <p:txBody>
+          <a:bodyPr rtlCol="0" anchor="ctr"/>
+          <a:lstStyle/>
+          <a:p>
+            <a:pPr algn="ctr"/>
+            <a:endParaRPr kumimoji="1" lang="ja-JP" altLang="en-US"/>
+          </a:p>
+        </p:txBody>
+      </p:sp>
+      <p:sp>
+        <p:nvSpPr>
+          <p:cNvPr id="15" name="円/楕円 14">
+            <a:extLst>
+              <a:ext uri="{FF2B5EF4-FFF2-40B4-BE49-F238E27FC236}">
+                <a16:creationId xmlns:a16="http://schemas.microsoft.com/office/drawing/2014/main" id="{6D659C7C-2495-46AA-DC92-2393C40358B7}"/>
+              </a:ext>
+            </a:extLst>
+          </p:cNvPr>
+          <p:cNvSpPr/>
+          <p:nvPr/>
+        </p:nvSpPr>
+        <p:spPr>
+          <a:xfrm>
+            <a:off x="8499333" y="3129942"/>
+            <a:ext cx="269700" cy="523881"/>
+          </a:xfrm>
+          <a:prstGeom prst="ellipse">
+            <a:avLst/>
+          </a:prstGeom>
+          <a:solidFill>
+            <a:schemeClr val="accent4">
+              <a:lumMod val="60000"/>
+              <a:lumOff val="40000"/>
+            </a:schemeClr>
+          </a:solidFill>
+          <a:ln>
+            <a:noFill/>
+          </a:ln>
+        </p:spPr>
+        <p:style>
+          <a:lnRef idx="2">
+            <a:schemeClr val="accent1">
+              <a:shade val="50000"/>
+            </a:schemeClr>
+          </a:lnRef>
+          <a:fillRef idx="1">
+            <a:schemeClr val="accent1"/>
+          </a:fillRef>
+          <a:effectRef idx="0">
+            <a:schemeClr val="accent1"/>
+          </a:effectRef>
+          <a:fontRef idx="minor">
+            <a:schemeClr val="lt1"/>
+          </a:fontRef>
+        </p:style>
+        <p:txBody>
+          <a:bodyPr rtlCol="0" anchor="ctr"/>
+          <a:lstStyle/>
+          <a:p>
+            <a:pPr algn="ctr"/>
+            <a:endParaRPr kumimoji="1" lang="ja-JP" altLang="en-US"/>
+          </a:p>
+        </p:txBody>
+      </p:sp>
+      <p:sp>
+        <p:nvSpPr>
+          <p:cNvPr id="16" name="円/楕円 15">
+            <a:extLst>
+              <a:ext uri="{FF2B5EF4-FFF2-40B4-BE49-F238E27FC236}">
+                <a16:creationId xmlns:a16="http://schemas.microsoft.com/office/drawing/2014/main" id="{11CDD796-4BB8-B134-004A-BC3C1B394329}"/>
+              </a:ext>
+            </a:extLst>
+          </p:cNvPr>
+          <p:cNvSpPr/>
+          <p:nvPr/>
+        </p:nvSpPr>
+        <p:spPr>
+          <a:xfrm>
+            <a:off x="9707045" y="2770775"/>
+            <a:ext cx="502276" cy="1013984"/>
+          </a:xfrm>
+          <a:prstGeom prst="ellipse">
+            <a:avLst/>
+          </a:prstGeom>
+          <a:solidFill>
+            <a:schemeClr val="accent4">
+              <a:lumMod val="75000"/>
+            </a:schemeClr>
+          </a:solidFill>
+          <a:ln>
+            <a:noFill/>
+          </a:ln>
+        </p:spPr>
+        <p:style>
+          <a:lnRef idx="2">
+            <a:schemeClr val="accent1">
+              <a:shade val="50000"/>
+            </a:schemeClr>
+          </a:lnRef>
+          <a:fillRef idx="1">
+            <a:schemeClr val="accent1"/>
+          </a:fillRef>
+          <a:effectRef idx="0">
+            <a:schemeClr val="accent1"/>
+          </a:effectRef>
+          <a:fontRef idx="minor">
+            <a:schemeClr val="lt1"/>
+          </a:fontRef>
+        </p:style>
+        <p:txBody>
+          <a:bodyPr rtlCol="0" anchor="ctr"/>
+          <a:lstStyle/>
+          <a:p>
+            <a:pPr algn="ctr"/>
+            <a:endParaRPr kumimoji="1" lang="ja-JP" altLang="en-US"/>
+          </a:p>
+        </p:txBody>
+      </p:sp>
+      <p:sp>
+        <p:nvSpPr>
+          <p:cNvPr id="17" name="円/楕円 16">
+            <a:extLst>
+              <a:ext uri="{FF2B5EF4-FFF2-40B4-BE49-F238E27FC236}">
+                <a16:creationId xmlns:a16="http://schemas.microsoft.com/office/drawing/2014/main" id="{56D16683-6980-C15F-423F-E716C9133DAA}"/>
+              </a:ext>
+            </a:extLst>
+          </p:cNvPr>
+          <p:cNvSpPr/>
+          <p:nvPr/>
+        </p:nvSpPr>
+        <p:spPr>
+          <a:xfrm>
+            <a:off x="9734947" y="3129942"/>
+            <a:ext cx="269700" cy="523881"/>
+          </a:xfrm>
+          <a:prstGeom prst="ellipse">
+            <a:avLst/>
+          </a:prstGeom>
+          <a:solidFill>
+            <a:schemeClr val="accent4">
+              <a:lumMod val="60000"/>
+              <a:lumOff val="40000"/>
+            </a:schemeClr>
+          </a:solidFill>
+          <a:ln>
+            <a:noFill/>
+          </a:ln>
+        </p:spPr>
+        <p:style>
+          <a:lnRef idx="2">
+            <a:schemeClr val="accent1">
+              <a:shade val="50000"/>
+            </a:schemeClr>
+          </a:lnRef>
+          <a:fillRef idx="1">
+            <a:schemeClr val="accent1"/>
+          </a:fillRef>
+          <a:effectRef idx="0">
+            <a:schemeClr val="accent1"/>
+          </a:effectRef>
+          <a:fontRef idx="minor">
+            <a:schemeClr val="lt1"/>
+          </a:fontRef>
+        </p:style>
+        <p:txBody>
+          <a:bodyPr rtlCol="0" anchor="ctr"/>
+          <a:lstStyle/>
+          <a:p>
+            <a:pPr algn="ctr"/>
+            <a:endParaRPr kumimoji="1" lang="ja-JP" altLang="en-US"/>
+          </a:p>
+        </p:txBody>
+      </p:sp>
+      <p:sp>
+        <p:nvSpPr>
+          <p:cNvPr id="19" name="円/楕円 18">
+            <a:extLst>
+              <a:ext uri="{FF2B5EF4-FFF2-40B4-BE49-F238E27FC236}">
+                <a16:creationId xmlns:a16="http://schemas.microsoft.com/office/drawing/2014/main" id="{AF6EBA17-3566-BCE3-784C-71365DB8FC11}"/>
+              </a:ext>
+            </a:extLst>
+          </p:cNvPr>
+          <p:cNvSpPr/>
+          <p:nvPr/>
+        </p:nvSpPr>
+        <p:spPr>
+          <a:xfrm rot="19800000">
+            <a:off x="-47054" y="1624942"/>
+            <a:ext cx="5130520" cy="4087744"/>
+          </a:xfrm>
+          <a:prstGeom prst="ellipse">
+            <a:avLst/>
+          </a:prstGeom>
+          <a:solidFill>
+            <a:schemeClr val="accent4">
+              <a:lumMod val="40000"/>
+              <a:lumOff val="60000"/>
+            </a:schemeClr>
+          </a:solidFill>
+          <a:ln>
+            <a:noFill/>
+          </a:ln>
+        </p:spPr>
+        <p:style>
+          <a:lnRef idx="2">
+            <a:schemeClr val="accent1">
+              <a:shade val="50000"/>
+            </a:schemeClr>
+          </a:lnRef>
+          <a:fillRef idx="1">
+            <a:schemeClr val="accent1"/>
+          </a:fillRef>
+          <a:effectRef idx="0">
+            <a:schemeClr val="accent1"/>
+          </a:effectRef>
+          <a:fontRef idx="minor">
+            <a:schemeClr val="lt1"/>
+          </a:fontRef>
+        </p:style>
+        <p:txBody>
+          <a:bodyPr rtlCol="0" anchor="ctr"/>
+          <a:lstStyle/>
+          <a:p>
+            <a:pPr algn="ctr"/>
+            <a:endParaRPr kumimoji="1" lang="ja-JP" altLang="en-US"/>
+          </a:p>
+        </p:txBody>
+      </p:sp>
+      <p:sp>
+        <p:nvSpPr>
+          <p:cNvPr id="20" name="円/楕円 19">
+            <a:extLst>
+              <a:ext uri="{FF2B5EF4-FFF2-40B4-BE49-F238E27FC236}">
+                <a16:creationId xmlns:a16="http://schemas.microsoft.com/office/drawing/2014/main" id="{4D1BB2D7-1F6A-22EB-39DF-09C668D4909A}"/>
+              </a:ext>
+            </a:extLst>
+          </p:cNvPr>
+          <p:cNvSpPr/>
+          <p:nvPr/>
+        </p:nvSpPr>
+        <p:spPr>
+          <a:xfrm rot="1800000" flipH="1">
+            <a:off x="890958" y="1624941"/>
+            <a:ext cx="5130520" cy="4087744"/>
+          </a:xfrm>
+          <a:prstGeom prst="ellipse">
+            <a:avLst/>
+          </a:prstGeom>
+          <a:solidFill>
+            <a:schemeClr val="accent4">
+              <a:lumMod val="40000"/>
+              <a:lumOff val="60000"/>
+            </a:schemeClr>
+          </a:solidFill>
+          <a:ln>
+            <a:noFill/>
+          </a:ln>
+        </p:spPr>
+        <p:style>
+          <a:lnRef idx="2">
+            <a:schemeClr val="accent1">
+              <a:shade val="50000"/>
+            </a:schemeClr>
+          </a:lnRef>
+          <a:fillRef idx="1">
+            <a:schemeClr val="accent1"/>
+          </a:fillRef>
+          <a:effectRef idx="0">
+            <a:schemeClr val="accent1"/>
+          </a:effectRef>
+          <a:fontRef idx="minor">
+            <a:schemeClr val="lt1"/>
+          </a:fontRef>
+        </p:style>
+        <p:txBody>
+          <a:bodyPr rtlCol="0" anchor="ctr"/>
+          <a:lstStyle/>
+          <a:p>
+            <a:pPr algn="ctr"/>
+            <a:endParaRPr kumimoji="1" lang="ja-JP" altLang="en-US"/>
+          </a:p>
+        </p:txBody>
+      </p:sp>
+      <p:sp>
+        <p:nvSpPr>
+          <p:cNvPr id="21" name="円/楕円 20">
+            <a:extLst>
+              <a:ext uri="{FF2B5EF4-FFF2-40B4-BE49-F238E27FC236}">
+                <a16:creationId xmlns:a16="http://schemas.microsoft.com/office/drawing/2014/main" id="{8216F909-87EE-1BEB-99DA-4B1ED89B8584}"/>
+              </a:ext>
+            </a:extLst>
+          </p:cNvPr>
+          <p:cNvSpPr/>
+          <p:nvPr/>
+        </p:nvSpPr>
+        <p:spPr>
+          <a:xfrm>
+            <a:off x="1048624" y="5179088"/>
+            <a:ext cx="3812146" cy="746975"/>
+          </a:xfrm>
+          <a:prstGeom prst="ellipse">
+            <a:avLst/>
+          </a:prstGeom>
+          <a:solidFill>
+            <a:schemeClr val="accent4">
+              <a:lumMod val="40000"/>
+              <a:lumOff val="60000"/>
+            </a:schemeClr>
+          </a:solidFill>
+          <a:ln>
+            <a:noFill/>
+          </a:ln>
+        </p:spPr>
+        <p:style>
+          <a:lnRef idx="2">
+            <a:schemeClr val="accent1">
+              <a:shade val="50000"/>
+            </a:schemeClr>
+          </a:lnRef>
+          <a:fillRef idx="1">
+            <a:schemeClr val="accent1"/>
+          </a:fillRef>
+          <a:effectRef idx="0">
+            <a:schemeClr val="accent1"/>
+          </a:effectRef>
+          <a:fontRef idx="minor">
+            <a:schemeClr val="lt1"/>
+          </a:fontRef>
+        </p:style>
+        <p:txBody>
+          <a:bodyPr rtlCol="0" anchor="ctr"/>
+          <a:lstStyle/>
+          <a:p>
+            <a:pPr algn="ctr"/>
+            <a:endParaRPr kumimoji="1" lang="ja-JP" altLang="en-US"/>
+          </a:p>
+        </p:txBody>
+      </p:sp>
+      <p:sp>
+        <p:nvSpPr>
+          <p:cNvPr id="22" name="円/楕円 21">
+            <a:extLst>
+              <a:ext uri="{FF2B5EF4-FFF2-40B4-BE49-F238E27FC236}">
+                <a16:creationId xmlns:a16="http://schemas.microsoft.com/office/drawing/2014/main" id="{1ADAFCC3-28EA-0F18-D83A-57B11C9F7393}"/>
+              </a:ext>
+            </a:extLst>
+          </p:cNvPr>
+          <p:cNvSpPr/>
+          <p:nvPr/>
+        </p:nvSpPr>
+        <p:spPr>
+          <a:xfrm>
+            <a:off x="2015930" y="2764110"/>
+            <a:ext cx="502276" cy="1013984"/>
+          </a:xfrm>
+          <a:prstGeom prst="ellipse">
+            <a:avLst/>
+          </a:prstGeom>
+          <a:solidFill>
+            <a:schemeClr val="accent4">
+              <a:lumMod val="75000"/>
+            </a:schemeClr>
+          </a:solidFill>
+          <a:ln>
+            <a:noFill/>
+          </a:ln>
+        </p:spPr>
+        <p:style>
+          <a:lnRef idx="2">
+            <a:schemeClr val="accent1">
+              <a:shade val="50000"/>
+            </a:schemeClr>
+          </a:lnRef>
+          <a:fillRef idx="1">
+            <a:schemeClr val="accent1"/>
+          </a:fillRef>
+          <a:effectRef idx="0">
+            <a:schemeClr val="accent1"/>
+          </a:effectRef>
+          <a:fontRef idx="minor">
+            <a:schemeClr val="lt1"/>
+          </a:fontRef>
+        </p:style>
+        <p:txBody>
+          <a:bodyPr rtlCol="0" anchor="ctr"/>
+          <a:lstStyle/>
+          <a:p>
+            <a:pPr algn="ctr"/>
+            <a:endParaRPr kumimoji="1" lang="ja-JP" altLang="en-US"/>
+          </a:p>
+        </p:txBody>
+      </p:sp>
+      <p:sp>
+        <p:nvSpPr>
+          <p:cNvPr id="23" name="円/楕円 22">
+            <a:extLst>
+              <a:ext uri="{FF2B5EF4-FFF2-40B4-BE49-F238E27FC236}">
+                <a16:creationId xmlns:a16="http://schemas.microsoft.com/office/drawing/2014/main" id="{1EFC42C8-E666-E3D2-DB09-7ED813E29CFE}"/>
+              </a:ext>
+            </a:extLst>
+          </p:cNvPr>
+          <p:cNvSpPr/>
+          <p:nvPr/>
+        </p:nvSpPr>
+        <p:spPr>
+          <a:xfrm>
+            <a:off x="2224138" y="3123277"/>
+            <a:ext cx="269700" cy="523881"/>
+          </a:xfrm>
+          <a:prstGeom prst="ellipse">
+            <a:avLst/>
+          </a:prstGeom>
+          <a:solidFill>
+            <a:schemeClr val="accent4">
+              <a:lumMod val="60000"/>
+              <a:lumOff val="40000"/>
+            </a:schemeClr>
+          </a:solidFill>
+          <a:ln>
+            <a:noFill/>
+          </a:ln>
+        </p:spPr>
+        <p:style>
+          <a:lnRef idx="2">
+            <a:schemeClr val="accent1">
+              <a:shade val="50000"/>
+            </a:schemeClr>
+          </a:lnRef>
+          <a:fillRef idx="1">
+            <a:schemeClr val="accent1"/>
+          </a:fillRef>
+          <a:effectRef idx="0">
+            <a:schemeClr val="accent1"/>
+          </a:effectRef>
+          <a:fontRef idx="minor">
+            <a:schemeClr val="lt1"/>
+          </a:fontRef>
+        </p:style>
+        <p:txBody>
+          <a:bodyPr rtlCol="0" anchor="ctr"/>
+          <a:lstStyle/>
+          <a:p>
+            <a:pPr algn="ctr"/>
+            <a:endParaRPr kumimoji="1" lang="ja-JP" altLang="en-US"/>
+          </a:p>
+        </p:txBody>
+      </p:sp>
+      <p:sp>
+        <p:nvSpPr>
+          <p:cNvPr id="24" name="円/楕円 23">
+            <a:extLst>
+              <a:ext uri="{FF2B5EF4-FFF2-40B4-BE49-F238E27FC236}">
+                <a16:creationId xmlns:a16="http://schemas.microsoft.com/office/drawing/2014/main" id="{C4BDA62F-2069-4821-73C9-CDD3249DCC10}"/>
+              </a:ext>
+            </a:extLst>
+          </p:cNvPr>
+          <p:cNvSpPr/>
+          <p:nvPr/>
+        </p:nvSpPr>
+        <p:spPr>
+          <a:xfrm>
+            <a:off x="3431850" y="2764110"/>
+            <a:ext cx="502276" cy="1013984"/>
+          </a:xfrm>
+          <a:prstGeom prst="ellipse">
+            <a:avLst/>
+          </a:prstGeom>
+          <a:solidFill>
+            <a:schemeClr val="accent4">
+              <a:lumMod val="75000"/>
+            </a:schemeClr>
+          </a:solidFill>
+          <a:ln>
+            <a:noFill/>
+          </a:ln>
+        </p:spPr>
+        <p:style>
+          <a:lnRef idx="2">
+            <a:schemeClr val="accent1">
+              <a:shade val="50000"/>
+            </a:schemeClr>
+          </a:lnRef>
+          <a:fillRef idx="1">
+            <a:schemeClr val="accent1"/>
+          </a:fillRef>
+          <a:effectRef idx="0">
+            <a:schemeClr val="accent1"/>
+          </a:effectRef>
+          <a:fontRef idx="minor">
+            <a:schemeClr val="lt1"/>
+          </a:fontRef>
+        </p:style>
+        <p:txBody>
+          <a:bodyPr rtlCol="0" anchor="ctr"/>
+          <a:lstStyle/>
+          <a:p>
+            <a:pPr algn="ctr"/>
+            <a:endParaRPr kumimoji="1" lang="ja-JP" altLang="en-US"/>
+          </a:p>
+        </p:txBody>
+      </p:sp>
+      <p:sp>
+        <p:nvSpPr>
+          <p:cNvPr id="25" name="円/楕円 24">
+            <a:extLst>
+              <a:ext uri="{FF2B5EF4-FFF2-40B4-BE49-F238E27FC236}">
+                <a16:creationId xmlns:a16="http://schemas.microsoft.com/office/drawing/2014/main" id="{752FAA75-A230-8B45-6C3F-FE7E3BB65BE8}"/>
+              </a:ext>
+            </a:extLst>
+          </p:cNvPr>
+          <p:cNvSpPr/>
+          <p:nvPr/>
+        </p:nvSpPr>
+        <p:spPr>
+          <a:xfrm>
+            <a:off x="3459752" y="3123277"/>
+            <a:ext cx="269700" cy="523881"/>
+          </a:xfrm>
+          <a:prstGeom prst="ellipse">
+            <a:avLst/>
+          </a:prstGeom>
+          <a:solidFill>
+            <a:schemeClr val="accent4">
+              <a:lumMod val="60000"/>
+              <a:lumOff val="40000"/>
+            </a:schemeClr>
+          </a:solidFill>
+          <a:ln>
+            <a:noFill/>
+          </a:ln>
+        </p:spPr>
+        <p:style>
+          <a:lnRef idx="2">
+            <a:schemeClr val="accent1">
+              <a:shade val="50000"/>
+            </a:schemeClr>
+          </a:lnRef>
+          <a:fillRef idx="1">
+            <a:schemeClr val="accent1"/>
+          </a:fillRef>
+          <a:effectRef idx="0">
+            <a:schemeClr val="accent1"/>
+          </a:effectRef>
+          <a:fontRef idx="minor">
+            <a:schemeClr val="lt1"/>
+          </a:fontRef>
+        </p:style>
+        <p:txBody>
+          <a:bodyPr rtlCol="0" anchor="ctr"/>
+          <a:lstStyle/>
+          <a:p>
+            <a:pPr algn="ctr"/>
+            <a:endParaRPr kumimoji="1" lang="ja-JP" altLang="en-US"/>
+          </a:p>
+        </p:txBody>
+      </p:sp>
+    </p:spTree>
+    <p:extLst>
+      <p:ext uri="{BB962C8B-B14F-4D97-AF65-F5344CB8AC3E}">
+        <p14:creationId xmlns:p14="http://schemas.microsoft.com/office/powerpoint/2010/main" val="1240884523"/>
       </p:ext>
     </p:extLst>
   </p:cSld>

--- a/default/enemy.pptx
+++ b/default/enemy.pptx
@@ -10,10 +10,12 @@
     <p:sldId id="260" r:id="rId4"/>
     <p:sldId id="262" r:id="rId5"/>
     <p:sldId id="265" r:id="rId6"/>
-    <p:sldId id="258" r:id="rId7"/>
-    <p:sldId id="261" r:id="rId8"/>
-    <p:sldId id="263" r:id="rId9"/>
-    <p:sldId id="264" r:id="rId10"/>
+    <p:sldId id="267" r:id="rId7"/>
+    <p:sldId id="258" r:id="rId8"/>
+    <p:sldId id="261" r:id="rId9"/>
+    <p:sldId id="263" r:id="rId10"/>
+    <p:sldId id="264" r:id="rId11"/>
+    <p:sldId id="266" r:id="rId12"/>
   </p:sldIdLst>
   <p:sldSz cx="12192000" cy="6858000"/>
   <p:notesSz cx="6858000" cy="9144000"/>
@@ -3545,6 +3547,1369 @@
 </p:sld>
 </file>
 
+<file path=ppt/slides/slide10.xml><?xml version="1.0" encoding="utf-8"?>
+<p:sld xmlns:a="http://schemas.openxmlformats.org/drawingml/2006/main" xmlns:r="http://schemas.openxmlformats.org/officeDocument/2006/relationships" xmlns:p="http://schemas.openxmlformats.org/presentationml/2006/main">
+  <p:cSld>
+    <p:spTree>
+      <p:nvGrpSpPr>
+        <p:cNvPr id="1" name="">
+          <a:extLst>
+            <a:ext uri="{FF2B5EF4-FFF2-40B4-BE49-F238E27FC236}">
+              <a16:creationId xmlns:a16="http://schemas.microsoft.com/office/drawing/2014/main" id="{231E612F-C01C-A1BB-AF0C-840874130AB4}"/>
+            </a:ext>
+          </a:extLst>
+        </p:cNvPr>
+        <p:cNvGrpSpPr/>
+        <p:nvPr/>
+      </p:nvGrpSpPr>
+      <p:grpSpPr>
+        <a:xfrm>
+          <a:off x="0" y="0"/>
+          <a:ext cx="0" cy="0"/>
+          <a:chOff x="0" y="0"/>
+          <a:chExt cx="0" cy="0"/>
+        </a:xfrm>
+      </p:grpSpPr>
+      <p:pic>
+        <p:nvPicPr>
+          <p:cNvPr id="4" name="図 3">
+            <a:extLst>
+              <a:ext uri="{FF2B5EF4-FFF2-40B4-BE49-F238E27FC236}">
+                <a16:creationId xmlns:a16="http://schemas.microsoft.com/office/drawing/2014/main" id="{4E63FED6-768C-7D40-8DE6-523D551ADB46}"/>
+              </a:ext>
+            </a:extLst>
+          </p:cNvPr>
+          <p:cNvPicPr>
+            <a:picLocks noChangeAspect="1"/>
+          </p:cNvPicPr>
+          <p:nvPr/>
+        </p:nvPicPr>
+        <p:blipFill>
+          <a:blip r:embed="rId2">
+            <a:duotone>
+              <a:schemeClr val="accent4">
+                <a:shade val="45000"/>
+                <a:satMod val="135000"/>
+              </a:schemeClr>
+              <a:prstClr val="white"/>
+            </a:duotone>
+          </a:blip>
+          <a:stretch>
+            <a:fillRect/>
+          </a:stretch>
+        </p:blipFill>
+        <p:spPr>
+          <a:xfrm>
+            <a:off x="6346155" y="1488358"/>
+            <a:ext cx="5834378" cy="4444369"/>
+          </a:xfrm>
+          <a:prstGeom prst="rect">
+            <a:avLst/>
+          </a:prstGeom>
+          <a:effectLst>
+            <a:innerShdw blurRad="635000" dist="508000" dir="8100000">
+              <a:prstClr val="black">
+                <a:alpha val="25000"/>
+              </a:prstClr>
+            </a:innerShdw>
+            <a:softEdge rad="127000"/>
+          </a:effectLst>
+        </p:spPr>
+      </p:pic>
+      <p:sp>
+        <p:nvSpPr>
+          <p:cNvPr id="14" name="円/楕円 13">
+            <a:extLst>
+              <a:ext uri="{FF2B5EF4-FFF2-40B4-BE49-F238E27FC236}">
+                <a16:creationId xmlns:a16="http://schemas.microsoft.com/office/drawing/2014/main" id="{335FA8B7-82A4-6080-1469-223A2BFE1B2C}"/>
+              </a:ext>
+            </a:extLst>
+          </p:cNvPr>
+          <p:cNvSpPr/>
+          <p:nvPr/>
+        </p:nvSpPr>
+        <p:spPr>
+          <a:xfrm>
+            <a:off x="8291125" y="2770775"/>
+            <a:ext cx="502276" cy="1013984"/>
+          </a:xfrm>
+          <a:prstGeom prst="ellipse">
+            <a:avLst/>
+          </a:prstGeom>
+          <a:solidFill>
+            <a:schemeClr val="accent4">
+              <a:lumMod val="75000"/>
+            </a:schemeClr>
+          </a:solidFill>
+          <a:ln>
+            <a:noFill/>
+          </a:ln>
+        </p:spPr>
+        <p:style>
+          <a:lnRef idx="2">
+            <a:schemeClr val="accent1">
+              <a:shade val="50000"/>
+            </a:schemeClr>
+          </a:lnRef>
+          <a:fillRef idx="1">
+            <a:schemeClr val="accent1"/>
+          </a:fillRef>
+          <a:effectRef idx="0">
+            <a:schemeClr val="accent1"/>
+          </a:effectRef>
+          <a:fontRef idx="minor">
+            <a:schemeClr val="lt1"/>
+          </a:fontRef>
+        </p:style>
+        <p:txBody>
+          <a:bodyPr rtlCol="0" anchor="ctr"/>
+          <a:lstStyle/>
+          <a:p>
+            <a:pPr algn="ctr"/>
+            <a:endParaRPr kumimoji="1" lang="ja-JP" altLang="en-US"/>
+          </a:p>
+        </p:txBody>
+      </p:sp>
+      <p:sp>
+        <p:nvSpPr>
+          <p:cNvPr id="15" name="円/楕円 14">
+            <a:extLst>
+              <a:ext uri="{FF2B5EF4-FFF2-40B4-BE49-F238E27FC236}">
+                <a16:creationId xmlns:a16="http://schemas.microsoft.com/office/drawing/2014/main" id="{6D659C7C-2495-46AA-DC92-2393C40358B7}"/>
+              </a:ext>
+            </a:extLst>
+          </p:cNvPr>
+          <p:cNvSpPr/>
+          <p:nvPr/>
+        </p:nvSpPr>
+        <p:spPr>
+          <a:xfrm>
+            <a:off x="8499333" y="3129942"/>
+            <a:ext cx="269700" cy="523881"/>
+          </a:xfrm>
+          <a:prstGeom prst="ellipse">
+            <a:avLst/>
+          </a:prstGeom>
+          <a:solidFill>
+            <a:schemeClr val="accent4">
+              <a:lumMod val="60000"/>
+              <a:lumOff val="40000"/>
+            </a:schemeClr>
+          </a:solidFill>
+          <a:ln>
+            <a:noFill/>
+          </a:ln>
+        </p:spPr>
+        <p:style>
+          <a:lnRef idx="2">
+            <a:schemeClr val="accent1">
+              <a:shade val="50000"/>
+            </a:schemeClr>
+          </a:lnRef>
+          <a:fillRef idx="1">
+            <a:schemeClr val="accent1"/>
+          </a:fillRef>
+          <a:effectRef idx="0">
+            <a:schemeClr val="accent1"/>
+          </a:effectRef>
+          <a:fontRef idx="minor">
+            <a:schemeClr val="lt1"/>
+          </a:fontRef>
+        </p:style>
+        <p:txBody>
+          <a:bodyPr rtlCol="0" anchor="ctr"/>
+          <a:lstStyle/>
+          <a:p>
+            <a:pPr algn="ctr"/>
+            <a:endParaRPr kumimoji="1" lang="ja-JP" altLang="en-US"/>
+          </a:p>
+        </p:txBody>
+      </p:sp>
+      <p:sp>
+        <p:nvSpPr>
+          <p:cNvPr id="16" name="円/楕円 15">
+            <a:extLst>
+              <a:ext uri="{FF2B5EF4-FFF2-40B4-BE49-F238E27FC236}">
+                <a16:creationId xmlns:a16="http://schemas.microsoft.com/office/drawing/2014/main" id="{11CDD796-4BB8-B134-004A-BC3C1B394329}"/>
+              </a:ext>
+            </a:extLst>
+          </p:cNvPr>
+          <p:cNvSpPr/>
+          <p:nvPr/>
+        </p:nvSpPr>
+        <p:spPr>
+          <a:xfrm>
+            <a:off x="9707045" y="2770775"/>
+            <a:ext cx="502276" cy="1013984"/>
+          </a:xfrm>
+          <a:prstGeom prst="ellipse">
+            <a:avLst/>
+          </a:prstGeom>
+          <a:solidFill>
+            <a:schemeClr val="accent4">
+              <a:lumMod val="75000"/>
+            </a:schemeClr>
+          </a:solidFill>
+          <a:ln>
+            <a:noFill/>
+          </a:ln>
+        </p:spPr>
+        <p:style>
+          <a:lnRef idx="2">
+            <a:schemeClr val="accent1">
+              <a:shade val="50000"/>
+            </a:schemeClr>
+          </a:lnRef>
+          <a:fillRef idx="1">
+            <a:schemeClr val="accent1"/>
+          </a:fillRef>
+          <a:effectRef idx="0">
+            <a:schemeClr val="accent1"/>
+          </a:effectRef>
+          <a:fontRef idx="minor">
+            <a:schemeClr val="lt1"/>
+          </a:fontRef>
+        </p:style>
+        <p:txBody>
+          <a:bodyPr rtlCol="0" anchor="ctr"/>
+          <a:lstStyle/>
+          <a:p>
+            <a:pPr algn="ctr"/>
+            <a:endParaRPr kumimoji="1" lang="ja-JP" altLang="en-US"/>
+          </a:p>
+        </p:txBody>
+      </p:sp>
+      <p:sp>
+        <p:nvSpPr>
+          <p:cNvPr id="17" name="円/楕円 16">
+            <a:extLst>
+              <a:ext uri="{FF2B5EF4-FFF2-40B4-BE49-F238E27FC236}">
+                <a16:creationId xmlns:a16="http://schemas.microsoft.com/office/drawing/2014/main" id="{56D16683-6980-C15F-423F-E716C9133DAA}"/>
+              </a:ext>
+            </a:extLst>
+          </p:cNvPr>
+          <p:cNvSpPr/>
+          <p:nvPr/>
+        </p:nvSpPr>
+        <p:spPr>
+          <a:xfrm>
+            <a:off x="9734947" y="3129942"/>
+            <a:ext cx="269700" cy="523881"/>
+          </a:xfrm>
+          <a:prstGeom prst="ellipse">
+            <a:avLst/>
+          </a:prstGeom>
+          <a:solidFill>
+            <a:schemeClr val="accent4">
+              <a:lumMod val="60000"/>
+              <a:lumOff val="40000"/>
+            </a:schemeClr>
+          </a:solidFill>
+          <a:ln>
+            <a:noFill/>
+          </a:ln>
+        </p:spPr>
+        <p:style>
+          <a:lnRef idx="2">
+            <a:schemeClr val="accent1">
+              <a:shade val="50000"/>
+            </a:schemeClr>
+          </a:lnRef>
+          <a:fillRef idx="1">
+            <a:schemeClr val="accent1"/>
+          </a:fillRef>
+          <a:effectRef idx="0">
+            <a:schemeClr val="accent1"/>
+          </a:effectRef>
+          <a:fontRef idx="minor">
+            <a:schemeClr val="lt1"/>
+          </a:fontRef>
+        </p:style>
+        <p:txBody>
+          <a:bodyPr rtlCol="0" anchor="ctr"/>
+          <a:lstStyle/>
+          <a:p>
+            <a:pPr algn="ctr"/>
+            <a:endParaRPr kumimoji="1" lang="ja-JP" altLang="en-US"/>
+          </a:p>
+        </p:txBody>
+      </p:sp>
+      <p:sp>
+        <p:nvSpPr>
+          <p:cNvPr id="19" name="円/楕円 18">
+            <a:extLst>
+              <a:ext uri="{FF2B5EF4-FFF2-40B4-BE49-F238E27FC236}">
+                <a16:creationId xmlns:a16="http://schemas.microsoft.com/office/drawing/2014/main" id="{AF6EBA17-3566-BCE3-784C-71365DB8FC11}"/>
+              </a:ext>
+            </a:extLst>
+          </p:cNvPr>
+          <p:cNvSpPr/>
+          <p:nvPr/>
+        </p:nvSpPr>
+        <p:spPr>
+          <a:xfrm rot="19800000">
+            <a:off x="-47054" y="1624942"/>
+            <a:ext cx="5130520" cy="4087744"/>
+          </a:xfrm>
+          <a:prstGeom prst="ellipse">
+            <a:avLst/>
+          </a:prstGeom>
+          <a:solidFill>
+            <a:schemeClr val="accent4">
+              <a:lumMod val="40000"/>
+              <a:lumOff val="60000"/>
+            </a:schemeClr>
+          </a:solidFill>
+          <a:ln>
+            <a:noFill/>
+          </a:ln>
+        </p:spPr>
+        <p:style>
+          <a:lnRef idx="2">
+            <a:schemeClr val="accent1">
+              <a:shade val="50000"/>
+            </a:schemeClr>
+          </a:lnRef>
+          <a:fillRef idx="1">
+            <a:schemeClr val="accent1"/>
+          </a:fillRef>
+          <a:effectRef idx="0">
+            <a:schemeClr val="accent1"/>
+          </a:effectRef>
+          <a:fontRef idx="minor">
+            <a:schemeClr val="lt1"/>
+          </a:fontRef>
+        </p:style>
+        <p:txBody>
+          <a:bodyPr rtlCol="0" anchor="ctr"/>
+          <a:lstStyle/>
+          <a:p>
+            <a:pPr algn="ctr"/>
+            <a:endParaRPr kumimoji="1" lang="ja-JP" altLang="en-US"/>
+          </a:p>
+        </p:txBody>
+      </p:sp>
+      <p:sp>
+        <p:nvSpPr>
+          <p:cNvPr id="20" name="円/楕円 19">
+            <a:extLst>
+              <a:ext uri="{FF2B5EF4-FFF2-40B4-BE49-F238E27FC236}">
+                <a16:creationId xmlns:a16="http://schemas.microsoft.com/office/drawing/2014/main" id="{4D1BB2D7-1F6A-22EB-39DF-09C668D4909A}"/>
+              </a:ext>
+            </a:extLst>
+          </p:cNvPr>
+          <p:cNvSpPr/>
+          <p:nvPr/>
+        </p:nvSpPr>
+        <p:spPr>
+          <a:xfrm rot="1800000" flipH="1">
+            <a:off x="890958" y="1624941"/>
+            <a:ext cx="5130520" cy="4087744"/>
+          </a:xfrm>
+          <a:prstGeom prst="ellipse">
+            <a:avLst/>
+          </a:prstGeom>
+          <a:solidFill>
+            <a:schemeClr val="accent4">
+              <a:lumMod val="40000"/>
+              <a:lumOff val="60000"/>
+            </a:schemeClr>
+          </a:solidFill>
+          <a:ln>
+            <a:noFill/>
+          </a:ln>
+        </p:spPr>
+        <p:style>
+          <a:lnRef idx="2">
+            <a:schemeClr val="accent1">
+              <a:shade val="50000"/>
+            </a:schemeClr>
+          </a:lnRef>
+          <a:fillRef idx="1">
+            <a:schemeClr val="accent1"/>
+          </a:fillRef>
+          <a:effectRef idx="0">
+            <a:schemeClr val="accent1"/>
+          </a:effectRef>
+          <a:fontRef idx="minor">
+            <a:schemeClr val="lt1"/>
+          </a:fontRef>
+        </p:style>
+        <p:txBody>
+          <a:bodyPr rtlCol="0" anchor="ctr"/>
+          <a:lstStyle/>
+          <a:p>
+            <a:pPr algn="ctr"/>
+            <a:endParaRPr kumimoji="1" lang="ja-JP" altLang="en-US"/>
+          </a:p>
+        </p:txBody>
+      </p:sp>
+      <p:sp>
+        <p:nvSpPr>
+          <p:cNvPr id="21" name="円/楕円 20">
+            <a:extLst>
+              <a:ext uri="{FF2B5EF4-FFF2-40B4-BE49-F238E27FC236}">
+                <a16:creationId xmlns:a16="http://schemas.microsoft.com/office/drawing/2014/main" id="{8216F909-87EE-1BEB-99DA-4B1ED89B8584}"/>
+              </a:ext>
+            </a:extLst>
+          </p:cNvPr>
+          <p:cNvSpPr/>
+          <p:nvPr/>
+        </p:nvSpPr>
+        <p:spPr>
+          <a:xfrm>
+            <a:off x="1048624" y="5179088"/>
+            <a:ext cx="3812146" cy="746975"/>
+          </a:xfrm>
+          <a:prstGeom prst="ellipse">
+            <a:avLst/>
+          </a:prstGeom>
+          <a:solidFill>
+            <a:schemeClr val="accent4">
+              <a:lumMod val="40000"/>
+              <a:lumOff val="60000"/>
+            </a:schemeClr>
+          </a:solidFill>
+          <a:ln>
+            <a:noFill/>
+          </a:ln>
+        </p:spPr>
+        <p:style>
+          <a:lnRef idx="2">
+            <a:schemeClr val="accent1">
+              <a:shade val="50000"/>
+            </a:schemeClr>
+          </a:lnRef>
+          <a:fillRef idx="1">
+            <a:schemeClr val="accent1"/>
+          </a:fillRef>
+          <a:effectRef idx="0">
+            <a:schemeClr val="accent1"/>
+          </a:effectRef>
+          <a:fontRef idx="minor">
+            <a:schemeClr val="lt1"/>
+          </a:fontRef>
+        </p:style>
+        <p:txBody>
+          <a:bodyPr rtlCol="0" anchor="ctr"/>
+          <a:lstStyle/>
+          <a:p>
+            <a:pPr algn="ctr"/>
+            <a:endParaRPr kumimoji="1" lang="ja-JP" altLang="en-US"/>
+          </a:p>
+        </p:txBody>
+      </p:sp>
+      <p:sp>
+        <p:nvSpPr>
+          <p:cNvPr id="22" name="円/楕円 21">
+            <a:extLst>
+              <a:ext uri="{FF2B5EF4-FFF2-40B4-BE49-F238E27FC236}">
+                <a16:creationId xmlns:a16="http://schemas.microsoft.com/office/drawing/2014/main" id="{1ADAFCC3-28EA-0F18-D83A-57B11C9F7393}"/>
+              </a:ext>
+            </a:extLst>
+          </p:cNvPr>
+          <p:cNvSpPr/>
+          <p:nvPr/>
+        </p:nvSpPr>
+        <p:spPr>
+          <a:xfrm>
+            <a:off x="2015930" y="2764110"/>
+            <a:ext cx="502276" cy="1013984"/>
+          </a:xfrm>
+          <a:prstGeom prst="ellipse">
+            <a:avLst/>
+          </a:prstGeom>
+          <a:solidFill>
+            <a:schemeClr val="accent4">
+              <a:lumMod val="75000"/>
+            </a:schemeClr>
+          </a:solidFill>
+          <a:ln>
+            <a:noFill/>
+          </a:ln>
+        </p:spPr>
+        <p:style>
+          <a:lnRef idx="2">
+            <a:schemeClr val="accent1">
+              <a:shade val="50000"/>
+            </a:schemeClr>
+          </a:lnRef>
+          <a:fillRef idx="1">
+            <a:schemeClr val="accent1"/>
+          </a:fillRef>
+          <a:effectRef idx="0">
+            <a:schemeClr val="accent1"/>
+          </a:effectRef>
+          <a:fontRef idx="minor">
+            <a:schemeClr val="lt1"/>
+          </a:fontRef>
+        </p:style>
+        <p:txBody>
+          <a:bodyPr rtlCol="0" anchor="ctr"/>
+          <a:lstStyle/>
+          <a:p>
+            <a:pPr algn="ctr"/>
+            <a:endParaRPr kumimoji="1" lang="ja-JP" altLang="en-US"/>
+          </a:p>
+        </p:txBody>
+      </p:sp>
+      <p:sp>
+        <p:nvSpPr>
+          <p:cNvPr id="23" name="円/楕円 22">
+            <a:extLst>
+              <a:ext uri="{FF2B5EF4-FFF2-40B4-BE49-F238E27FC236}">
+                <a16:creationId xmlns:a16="http://schemas.microsoft.com/office/drawing/2014/main" id="{1EFC42C8-E666-E3D2-DB09-7ED813E29CFE}"/>
+              </a:ext>
+            </a:extLst>
+          </p:cNvPr>
+          <p:cNvSpPr/>
+          <p:nvPr/>
+        </p:nvSpPr>
+        <p:spPr>
+          <a:xfrm>
+            <a:off x="2224138" y="3123277"/>
+            <a:ext cx="269700" cy="523881"/>
+          </a:xfrm>
+          <a:prstGeom prst="ellipse">
+            <a:avLst/>
+          </a:prstGeom>
+          <a:solidFill>
+            <a:schemeClr val="accent4">
+              <a:lumMod val="60000"/>
+              <a:lumOff val="40000"/>
+            </a:schemeClr>
+          </a:solidFill>
+          <a:ln>
+            <a:noFill/>
+          </a:ln>
+        </p:spPr>
+        <p:style>
+          <a:lnRef idx="2">
+            <a:schemeClr val="accent1">
+              <a:shade val="50000"/>
+            </a:schemeClr>
+          </a:lnRef>
+          <a:fillRef idx="1">
+            <a:schemeClr val="accent1"/>
+          </a:fillRef>
+          <a:effectRef idx="0">
+            <a:schemeClr val="accent1"/>
+          </a:effectRef>
+          <a:fontRef idx="minor">
+            <a:schemeClr val="lt1"/>
+          </a:fontRef>
+        </p:style>
+        <p:txBody>
+          <a:bodyPr rtlCol="0" anchor="ctr"/>
+          <a:lstStyle/>
+          <a:p>
+            <a:pPr algn="ctr"/>
+            <a:endParaRPr kumimoji="1" lang="ja-JP" altLang="en-US"/>
+          </a:p>
+        </p:txBody>
+      </p:sp>
+      <p:sp>
+        <p:nvSpPr>
+          <p:cNvPr id="24" name="円/楕円 23">
+            <a:extLst>
+              <a:ext uri="{FF2B5EF4-FFF2-40B4-BE49-F238E27FC236}">
+                <a16:creationId xmlns:a16="http://schemas.microsoft.com/office/drawing/2014/main" id="{C4BDA62F-2069-4821-73C9-CDD3249DCC10}"/>
+              </a:ext>
+            </a:extLst>
+          </p:cNvPr>
+          <p:cNvSpPr/>
+          <p:nvPr/>
+        </p:nvSpPr>
+        <p:spPr>
+          <a:xfrm>
+            <a:off x="3431850" y="2764110"/>
+            <a:ext cx="502276" cy="1013984"/>
+          </a:xfrm>
+          <a:prstGeom prst="ellipse">
+            <a:avLst/>
+          </a:prstGeom>
+          <a:solidFill>
+            <a:schemeClr val="accent4">
+              <a:lumMod val="75000"/>
+            </a:schemeClr>
+          </a:solidFill>
+          <a:ln>
+            <a:noFill/>
+          </a:ln>
+        </p:spPr>
+        <p:style>
+          <a:lnRef idx="2">
+            <a:schemeClr val="accent1">
+              <a:shade val="50000"/>
+            </a:schemeClr>
+          </a:lnRef>
+          <a:fillRef idx="1">
+            <a:schemeClr val="accent1"/>
+          </a:fillRef>
+          <a:effectRef idx="0">
+            <a:schemeClr val="accent1"/>
+          </a:effectRef>
+          <a:fontRef idx="minor">
+            <a:schemeClr val="lt1"/>
+          </a:fontRef>
+        </p:style>
+        <p:txBody>
+          <a:bodyPr rtlCol="0" anchor="ctr"/>
+          <a:lstStyle/>
+          <a:p>
+            <a:pPr algn="ctr"/>
+            <a:endParaRPr kumimoji="1" lang="ja-JP" altLang="en-US"/>
+          </a:p>
+        </p:txBody>
+      </p:sp>
+      <p:sp>
+        <p:nvSpPr>
+          <p:cNvPr id="25" name="円/楕円 24">
+            <a:extLst>
+              <a:ext uri="{FF2B5EF4-FFF2-40B4-BE49-F238E27FC236}">
+                <a16:creationId xmlns:a16="http://schemas.microsoft.com/office/drawing/2014/main" id="{752FAA75-A230-8B45-6C3F-FE7E3BB65BE8}"/>
+              </a:ext>
+            </a:extLst>
+          </p:cNvPr>
+          <p:cNvSpPr/>
+          <p:nvPr/>
+        </p:nvSpPr>
+        <p:spPr>
+          <a:xfrm>
+            <a:off x="3459752" y="3123277"/>
+            <a:ext cx="269700" cy="523881"/>
+          </a:xfrm>
+          <a:prstGeom prst="ellipse">
+            <a:avLst/>
+          </a:prstGeom>
+          <a:solidFill>
+            <a:schemeClr val="accent4">
+              <a:lumMod val="60000"/>
+              <a:lumOff val="40000"/>
+            </a:schemeClr>
+          </a:solidFill>
+          <a:ln>
+            <a:noFill/>
+          </a:ln>
+        </p:spPr>
+        <p:style>
+          <a:lnRef idx="2">
+            <a:schemeClr val="accent1">
+              <a:shade val="50000"/>
+            </a:schemeClr>
+          </a:lnRef>
+          <a:fillRef idx="1">
+            <a:schemeClr val="accent1"/>
+          </a:fillRef>
+          <a:effectRef idx="0">
+            <a:schemeClr val="accent1"/>
+          </a:effectRef>
+          <a:fontRef idx="minor">
+            <a:schemeClr val="lt1"/>
+          </a:fontRef>
+        </p:style>
+        <p:txBody>
+          <a:bodyPr rtlCol="0" anchor="ctr"/>
+          <a:lstStyle/>
+          <a:p>
+            <a:pPr algn="ctr"/>
+            <a:endParaRPr kumimoji="1" lang="ja-JP" altLang="en-US"/>
+          </a:p>
+        </p:txBody>
+      </p:sp>
+    </p:spTree>
+    <p:extLst>
+      <p:ext uri="{BB962C8B-B14F-4D97-AF65-F5344CB8AC3E}">
+        <p14:creationId xmlns:p14="http://schemas.microsoft.com/office/powerpoint/2010/main" val="1240884523"/>
+      </p:ext>
+    </p:extLst>
+  </p:cSld>
+  <p:clrMapOvr>
+    <a:masterClrMapping/>
+  </p:clrMapOvr>
+</p:sld>
+</file>
+
+<file path=ppt/slides/slide11.xml><?xml version="1.0" encoding="utf-8"?>
+<p:sld xmlns:a="http://schemas.openxmlformats.org/drawingml/2006/main" xmlns:r="http://schemas.openxmlformats.org/officeDocument/2006/relationships" xmlns:p="http://schemas.openxmlformats.org/presentationml/2006/main">
+  <p:cSld>
+    <p:spTree>
+      <p:nvGrpSpPr>
+        <p:cNvPr id="1" name="">
+          <a:extLst>
+            <a:ext uri="{FF2B5EF4-FFF2-40B4-BE49-F238E27FC236}">
+              <a16:creationId xmlns:a16="http://schemas.microsoft.com/office/drawing/2014/main" id="{056A5444-9A4B-CD1B-B9E5-8990D921FEAA}"/>
+            </a:ext>
+          </a:extLst>
+        </p:cNvPr>
+        <p:cNvGrpSpPr/>
+        <p:nvPr/>
+      </p:nvGrpSpPr>
+      <p:grpSpPr>
+        <a:xfrm>
+          <a:off x="0" y="0"/>
+          <a:ext cx="0" cy="0"/>
+          <a:chOff x="0" y="0"/>
+          <a:chExt cx="0" cy="0"/>
+        </a:xfrm>
+      </p:grpSpPr>
+      <p:pic>
+        <p:nvPicPr>
+          <p:cNvPr id="4" name="図 3">
+            <a:extLst>
+              <a:ext uri="{FF2B5EF4-FFF2-40B4-BE49-F238E27FC236}">
+                <a16:creationId xmlns:a16="http://schemas.microsoft.com/office/drawing/2014/main" id="{7D872DCD-D986-D644-6065-6BEF1697A9D2}"/>
+              </a:ext>
+            </a:extLst>
+          </p:cNvPr>
+          <p:cNvPicPr>
+            <a:picLocks noChangeAspect="1"/>
+          </p:cNvPicPr>
+          <p:nvPr/>
+        </p:nvPicPr>
+        <p:blipFill>
+          <a:blip r:embed="rId2">
+            <a:duotone>
+              <a:prstClr val="black"/>
+              <a:schemeClr val="accent3">
+                <a:tint val="45000"/>
+                <a:satMod val="400000"/>
+              </a:schemeClr>
+            </a:duotone>
+          </a:blip>
+          <a:stretch>
+            <a:fillRect/>
+          </a:stretch>
+        </p:blipFill>
+        <p:spPr>
+          <a:xfrm>
+            <a:off x="6346155" y="1488358"/>
+            <a:ext cx="5834378" cy="4444369"/>
+          </a:xfrm>
+          <a:prstGeom prst="rect">
+            <a:avLst/>
+          </a:prstGeom>
+          <a:effectLst>
+            <a:innerShdw blurRad="635000" dist="508000" dir="8100000">
+              <a:prstClr val="black">
+                <a:alpha val="25000"/>
+              </a:prstClr>
+            </a:innerShdw>
+            <a:softEdge rad="127000"/>
+          </a:effectLst>
+        </p:spPr>
+      </p:pic>
+      <p:sp>
+        <p:nvSpPr>
+          <p:cNvPr id="14" name="円/楕円 13">
+            <a:extLst>
+              <a:ext uri="{FF2B5EF4-FFF2-40B4-BE49-F238E27FC236}">
+                <a16:creationId xmlns:a16="http://schemas.microsoft.com/office/drawing/2014/main" id="{747093C5-5A84-253F-28F2-224CA54DA59E}"/>
+              </a:ext>
+            </a:extLst>
+          </p:cNvPr>
+          <p:cNvSpPr/>
+          <p:nvPr/>
+        </p:nvSpPr>
+        <p:spPr>
+          <a:xfrm>
+            <a:off x="8291125" y="2770775"/>
+            <a:ext cx="502276" cy="1013984"/>
+          </a:xfrm>
+          <a:prstGeom prst="ellipse">
+            <a:avLst/>
+          </a:prstGeom>
+          <a:solidFill>
+            <a:schemeClr val="bg2">
+              <a:lumMod val="25000"/>
+            </a:schemeClr>
+          </a:solidFill>
+          <a:ln>
+            <a:noFill/>
+          </a:ln>
+        </p:spPr>
+        <p:style>
+          <a:lnRef idx="2">
+            <a:schemeClr val="accent1">
+              <a:shade val="50000"/>
+            </a:schemeClr>
+          </a:lnRef>
+          <a:fillRef idx="1">
+            <a:schemeClr val="accent1"/>
+          </a:fillRef>
+          <a:effectRef idx="0">
+            <a:schemeClr val="accent1"/>
+          </a:effectRef>
+          <a:fontRef idx="minor">
+            <a:schemeClr val="lt1"/>
+          </a:fontRef>
+        </p:style>
+        <p:txBody>
+          <a:bodyPr rtlCol="0" anchor="ctr"/>
+          <a:lstStyle/>
+          <a:p>
+            <a:pPr algn="ctr"/>
+            <a:endParaRPr kumimoji="1" lang="ja-JP" altLang="en-US"/>
+          </a:p>
+        </p:txBody>
+      </p:sp>
+      <p:sp>
+        <p:nvSpPr>
+          <p:cNvPr id="15" name="円/楕円 14">
+            <a:extLst>
+              <a:ext uri="{FF2B5EF4-FFF2-40B4-BE49-F238E27FC236}">
+                <a16:creationId xmlns:a16="http://schemas.microsoft.com/office/drawing/2014/main" id="{A9C22D38-8E71-4B28-0246-382B467CC3A1}"/>
+              </a:ext>
+            </a:extLst>
+          </p:cNvPr>
+          <p:cNvSpPr/>
+          <p:nvPr/>
+        </p:nvSpPr>
+        <p:spPr>
+          <a:xfrm>
+            <a:off x="8499333" y="3129942"/>
+            <a:ext cx="269700" cy="523881"/>
+          </a:xfrm>
+          <a:prstGeom prst="ellipse">
+            <a:avLst/>
+          </a:prstGeom>
+          <a:solidFill>
+            <a:schemeClr val="accent3">
+              <a:lumMod val="40000"/>
+              <a:lumOff val="60000"/>
+            </a:schemeClr>
+          </a:solidFill>
+          <a:ln>
+            <a:noFill/>
+          </a:ln>
+        </p:spPr>
+        <p:style>
+          <a:lnRef idx="2">
+            <a:schemeClr val="accent1">
+              <a:shade val="50000"/>
+            </a:schemeClr>
+          </a:lnRef>
+          <a:fillRef idx="1">
+            <a:schemeClr val="accent1"/>
+          </a:fillRef>
+          <a:effectRef idx="0">
+            <a:schemeClr val="accent1"/>
+          </a:effectRef>
+          <a:fontRef idx="minor">
+            <a:schemeClr val="lt1"/>
+          </a:fontRef>
+        </p:style>
+        <p:txBody>
+          <a:bodyPr rtlCol="0" anchor="ctr"/>
+          <a:lstStyle/>
+          <a:p>
+            <a:pPr algn="ctr"/>
+            <a:endParaRPr kumimoji="1" lang="ja-JP" altLang="en-US"/>
+          </a:p>
+        </p:txBody>
+      </p:sp>
+      <p:sp>
+        <p:nvSpPr>
+          <p:cNvPr id="16" name="円/楕円 15">
+            <a:extLst>
+              <a:ext uri="{FF2B5EF4-FFF2-40B4-BE49-F238E27FC236}">
+                <a16:creationId xmlns:a16="http://schemas.microsoft.com/office/drawing/2014/main" id="{E23F79F2-9B42-E567-E3C9-3F0D29FE17B5}"/>
+              </a:ext>
+            </a:extLst>
+          </p:cNvPr>
+          <p:cNvSpPr/>
+          <p:nvPr/>
+        </p:nvSpPr>
+        <p:spPr>
+          <a:xfrm>
+            <a:off x="9707045" y="2770775"/>
+            <a:ext cx="502276" cy="1013984"/>
+          </a:xfrm>
+          <a:prstGeom prst="ellipse">
+            <a:avLst/>
+          </a:prstGeom>
+          <a:solidFill>
+            <a:schemeClr val="bg2">
+              <a:lumMod val="25000"/>
+            </a:schemeClr>
+          </a:solidFill>
+          <a:ln>
+            <a:noFill/>
+          </a:ln>
+        </p:spPr>
+        <p:style>
+          <a:lnRef idx="2">
+            <a:schemeClr val="accent1">
+              <a:shade val="50000"/>
+            </a:schemeClr>
+          </a:lnRef>
+          <a:fillRef idx="1">
+            <a:schemeClr val="accent1"/>
+          </a:fillRef>
+          <a:effectRef idx="0">
+            <a:schemeClr val="accent1"/>
+          </a:effectRef>
+          <a:fontRef idx="minor">
+            <a:schemeClr val="lt1"/>
+          </a:fontRef>
+        </p:style>
+        <p:txBody>
+          <a:bodyPr rtlCol="0" anchor="ctr"/>
+          <a:lstStyle/>
+          <a:p>
+            <a:pPr algn="ctr"/>
+            <a:endParaRPr kumimoji="1" lang="ja-JP" altLang="en-US"/>
+          </a:p>
+        </p:txBody>
+      </p:sp>
+      <p:sp>
+        <p:nvSpPr>
+          <p:cNvPr id="17" name="円/楕円 16">
+            <a:extLst>
+              <a:ext uri="{FF2B5EF4-FFF2-40B4-BE49-F238E27FC236}">
+                <a16:creationId xmlns:a16="http://schemas.microsoft.com/office/drawing/2014/main" id="{754FFC95-7B9D-1FAD-94E9-14754B703632}"/>
+              </a:ext>
+            </a:extLst>
+          </p:cNvPr>
+          <p:cNvSpPr/>
+          <p:nvPr/>
+        </p:nvSpPr>
+        <p:spPr>
+          <a:xfrm>
+            <a:off x="9734947" y="3129942"/>
+            <a:ext cx="269700" cy="523881"/>
+          </a:xfrm>
+          <a:prstGeom prst="ellipse">
+            <a:avLst/>
+          </a:prstGeom>
+          <a:solidFill>
+            <a:schemeClr val="accent3">
+              <a:lumMod val="40000"/>
+              <a:lumOff val="60000"/>
+            </a:schemeClr>
+          </a:solidFill>
+          <a:ln>
+            <a:noFill/>
+          </a:ln>
+        </p:spPr>
+        <p:style>
+          <a:lnRef idx="2">
+            <a:schemeClr val="accent1">
+              <a:shade val="50000"/>
+            </a:schemeClr>
+          </a:lnRef>
+          <a:fillRef idx="1">
+            <a:schemeClr val="accent1"/>
+          </a:fillRef>
+          <a:effectRef idx="0">
+            <a:schemeClr val="accent1"/>
+          </a:effectRef>
+          <a:fontRef idx="minor">
+            <a:schemeClr val="lt1"/>
+          </a:fontRef>
+        </p:style>
+        <p:txBody>
+          <a:bodyPr rtlCol="0" anchor="ctr"/>
+          <a:lstStyle/>
+          <a:p>
+            <a:pPr algn="ctr"/>
+            <a:endParaRPr kumimoji="1" lang="ja-JP" altLang="en-US"/>
+          </a:p>
+        </p:txBody>
+      </p:sp>
+      <p:sp>
+        <p:nvSpPr>
+          <p:cNvPr id="19" name="円/楕円 18">
+            <a:extLst>
+              <a:ext uri="{FF2B5EF4-FFF2-40B4-BE49-F238E27FC236}">
+                <a16:creationId xmlns:a16="http://schemas.microsoft.com/office/drawing/2014/main" id="{EAA008D3-F0AB-8AC0-3FE7-7F3D687AE170}"/>
+              </a:ext>
+            </a:extLst>
+          </p:cNvPr>
+          <p:cNvSpPr/>
+          <p:nvPr/>
+        </p:nvSpPr>
+        <p:spPr>
+          <a:xfrm rot="19800000">
+            <a:off x="-47054" y="1624942"/>
+            <a:ext cx="5130520" cy="4087744"/>
+          </a:xfrm>
+          <a:prstGeom prst="ellipse">
+            <a:avLst/>
+          </a:prstGeom>
+          <a:solidFill>
+            <a:schemeClr val="bg1">
+              <a:lumMod val="65000"/>
+            </a:schemeClr>
+          </a:solidFill>
+          <a:ln>
+            <a:noFill/>
+          </a:ln>
+        </p:spPr>
+        <p:style>
+          <a:lnRef idx="2">
+            <a:schemeClr val="accent1">
+              <a:shade val="50000"/>
+            </a:schemeClr>
+          </a:lnRef>
+          <a:fillRef idx="1">
+            <a:schemeClr val="accent1"/>
+          </a:fillRef>
+          <a:effectRef idx="0">
+            <a:schemeClr val="accent1"/>
+          </a:effectRef>
+          <a:fontRef idx="minor">
+            <a:schemeClr val="lt1"/>
+          </a:fontRef>
+        </p:style>
+        <p:txBody>
+          <a:bodyPr rtlCol="0" anchor="ctr"/>
+          <a:lstStyle/>
+          <a:p>
+            <a:pPr algn="ctr"/>
+            <a:endParaRPr kumimoji="1" lang="ja-JP" altLang="en-US"/>
+          </a:p>
+        </p:txBody>
+      </p:sp>
+      <p:sp>
+        <p:nvSpPr>
+          <p:cNvPr id="20" name="円/楕円 19">
+            <a:extLst>
+              <a:ext uri="{FF2B5EF4-FFF2-40B4-BE49-F238E27FC236}">
+                <a16:creationId xmlns:a16="http://schemas.microsoft.com/office/drawing/2014/main" id="{3E46F4CE-7C54-256A-5E7F-20C5BB198168}"/>
+              </a:ext>
+            </a:extLst>
+          </p:cNvPr>
+          <p:cNvSpPr/>
+          <p:nvPr/>
+        </p:nvSpPr>
+        <p:spPr>
+          <a:xfrm rot="1800000" flipH="1">
+            <a:off x="890958" y="1624941"/>
+            <a:ext cx="5130520" cy="4087744"/>
+          </a:xfrm>
+          <a:prstGeom prst="ellipse">
+            <a:avLst/>
+          </a:prstGeom>
+          <a:solidFill>
+            <a:schemeClr val="bg1">
+              <a:lumMod val="65000"/>
+            </a:schemeClr>
+          </a:solidFill>
+          <a:ln>
+            <a:noFill/>
+          </a:ln>
+        </p:spPr>
+        <p:style>
+          <a:lnRef idx="2">
+            <a:schemeClr val="accent1">
+              <a:shade val="50000"/>
+            </a:schemeClr>
+          </a:lnRef>
+          <a:fillRef idx="1">
+            <a:schemeClr val="accent1"/>
+          </a:fillRef>
+          <a:effectRef idx="0">
+            <a:schemeClr val="accent1"/>
+          </a:effectRef>
+          <a:fontRef idx="minor">
+            <a:schemeClr val="lt1"/>
+          </a:fontRef>
+        </p:style>
+        <p:txBody>
+          <a:bodyPr rtlCol="0" anchor="ctr"/>
+          <a:lstStyle/>
+          <a:p>
+            <a:pPr algn="ctr"/>
+            <a:endParaRPr kumimoji="1" lang="ja-JP" altLang="en-US"/>
+          </a:p>
+        </p:txBody>
+      </p:sp>
+      <p:sp>
+        <p:nvSpPr>
+          <p:cNvPr id="21" name="円/楕円 20">
+            <a:extLst>
+              <a:ext uri="{FF2B5EF4-FFF2-40B4-BE49-F238E27FC236}">
+                <a16:creationId xmlns:a16="http://schemas.microsoft.com/office/drawing/2014/main" id="{52212F1C-E0B5-CCB7-C807-026348604E77}"/>
+              </a:ext>
+            </a:extLst>
+          </p:cNvPr>
+          <p:cNvSpPr/>
+          <p:nvPr/>
+        </p:nvSpPr>
+        <p:spPr>
+          <a:xfrm>
+            <a:off x="1048624" y="5179088"/>
+            <a:ext cx="3812146" cy="746975"/>
+          </a:xfrm>
+          <a:prstGeom prst="ellipse">
+            <a:avLst/>
+          </a:prstGeom>
+          <a:solidFill>
+            <a:schemeClr val="bg1">
+              <a:lumMod val="65000"/>
+            </a:schemeClr>
+          </a:solidFill>
+          <a:ln>
+            <a:noFill/>
+          </a:ln>
+        </p:spPr>
+        <p:style>
+          <a:lnRef idx="2">
+            <a:schemeClr val="accent1">
+              <a:shade val="50000"/>
+            </a:schemeClr>
+          </a:lnRef>
+          <a:fillRef idx="1">
+            <a:schemeClr val="accent1"/>
+          </a:fillRef>
+          <a:effectRef idx="0">
+            <a:schemeClr val="accent1"/>
+          </a:effectRef>
+          <a:fontRef idx="minor">
+            <a:schemeClr val="lt1"/>
+          </a:fontRef>
+        </p:style>
+        <p:txBody>
+          <a:bodyPr rtlCol="0" anchor="ctr"/>
+          <a:lstStyle/>
+          <a:p>
+            <a:pPr algn="ctr"/>
+            <a:endParaRPr kumimoji="1" lang="ja-JP" altLang="en-US"/>
+          </a:p>
+        </p:txBody>
+      </p:sp>
+      <p:sp>
+        <p:nvSpPr>
+          <p:cNvPr id="22" name="円/楕円 21">
+            <a:extLst>
+              <a:ext uri="{FF2B5EF4-FFF2-40B4-BE49-F238E27FC236}">
+                <a16:creationId xmlns:a16="http://schemas.microsoft.com/office/drawing/2014/main" id="{9F2F92AD-19FF-4788-CF9E-F5208FB8C9FE}"/>
+              </a:ext>
+            </a:extLst>
+          </p:cNvPr>
+          <p:cNvSpPr/>
+          <p:nvPr/>
+        </p:nvSpPr>
+        <p:spPr>
+          <a:xfrm>
+            <a:off x="2015930" y="2764110"/>
+            <a:ext cx="502276" cy="1013984"/>
+          </a:xfrm>
+          <a:prstGeom prst="ellipse">
+            <a:avLst/>
+          </a:prstGeom>
+          <a:solidFill>
+            <a:schemeClr val="bg2">
+              <a:lumMod val="25000"/>
+            </a:schemeClr>
+          </a:solidFill>
+          <a:ln>
+            <a:noFill/>
+          </a:ln>
+        </p:spPr>
+        <p:style>
+          <a:lnRef idx="2">
+            <a:schemeClr val="accent1">
+              <a:shade val="50000"/>
+            </a:schemeClr>
+          </a:lnRef>
+          <a:fillRef idx="1">
+            <a:schemeClr val="accent1"/>
+          </a:fillRef>
+          <a:effectRef idx="0">
+            <a:schemeClr val="accent1"/>
+          </a:effectRef>
+          <a:fontRef idx="minor">
+            <a:schemeClr val="lt1"/>
+          </a:fontRef>
+        </p:style>
+        <p:txBody>
+          <a:bodyPr rtlCol="0" anchor="ctr"/>
+          <a:lstStyle/>
+          <a:p>
+            <a:pPr algn="ctr"/>
+            <a:endParaRPr kumimoji="1" lang="ja-JP" altLang="en-US"/>
+          </a:p>
+        </p:txBody>
+      </p:sp>
+      <p:sp>
+        <p:nvSpPr>
+          <p:cNvPr id="23" name="円/楕円 22">
+            <a:extLst>
+              <a:ext uri="{FF2B5EF4-FFF2-40B4-BE49-F238E27FC236}">
+                <a16:creationId xmlns:a16="http://schemas.microsoft.com/office/drawing/2014/main" id="{47AE3250-E007-2D9C-B98B-EF059AC35D8A}"/>
+              </a:ext>
+            </a:extLst>
+          </p:cNvPr>
+          <p:cNvSpPr/>
+          <p:nvPr/>
+        </p:nvSpPr>
+        <p:spPr>
+          <a:xfrm>
+            <a:off x="2224138" y="3123277"/>
+            <a:ext cx="269700" cy="523881"/>
+          </a:xfrm>
+          <a:prstGeom prst="ellipse">
+            <a:avLst/>
+          </a:prstGeom>
+          <a:solidFill>
+            <a:schemeClr val="accent3">
+              <a:lumMod val="40000"/>
+              <a:lumOff val="60000"/>
+            </a:schemeClr>
+          </a:solidFill>
+          <a:ln>
+            <a:noFill/>
+          </a:ln>
+        </p:spPr>
+        <p:style>
+          <a:lnRef idx="2">
+            <a:schemeClr val="accent1">
+              <a:shade val="50000"/>
+            </a:schemeClr>
+          </a:lnRef>
+          <a:fillRef idx="1">
+            <a:schemeClr val="accent1"/>
+          </a:fillRef>
+          <a:effectRef idx="0">
+            <a:schemeClr val="accent1"/>
+          </a:effectRef>
+          <a:fontRef idx="minor">
+            <a:schemeClr val="lt1"/>
+          </a:fontRef>
+        </p:style>
+        <p:txBody>
+          <a:bodyPr rtlCol="0" anchor="ctr"/>
+          <a:lstStyle/>
+          <a:p>
+            <a:pPr algn="ctr"/>
+            <a:endParaRPr kumimoji="1" lang="ja-JP" altLang="en-US"/>
+          </a:p>
+        </p:txBody>
+      </p:sp>
+      <p:sp>
+        <p:nvSpPr>
+          <p:cNvPr id="24" name="円/楕円 23">
+            <a:extLst>
+              <a:ext uri="{FF2B5EF4-FFF2-40B4-BE49-F238E27FC236}">
+                <a16:creationId xmlns:a16="http://schemas.microsoft.com/office/drawing/2014/main" id="{B1E67C9E-A004-BC4A-6E19-D85D06B35E70}"/>
+              </a:ext>
+            </a:extLst>
+          </p:cNvPr>
+          <p:cNvSpPr/>
+          <p:nvPr/>
+        </p:nvSpPr>
+        <p:spPr>
+          <a:xfrm>
+            <a:off x="3431850" y="2764110"/>
+            <a:ext cx="502276" cy="1013984"/>
+          </a:xfrm>
+          <a:prstGeom prst="ellipse">
+            <a:avLst/>
+          </a:prstGeom>
+          <a:solidFill>
+            <a:schemeClr val="bg2">
+              <a:lumMod val="25000"/>
+            </a:schemeClr>
+          </a:solidFill>
+          <a:ln>
+            <a:noFill/>
+          </a:ln>
+        </p:spPr>
+        <p:style>
+          <a:lnRef idx="2">
+            <a:schemeClr val="accent1">
+              <a:shade val="50000"/>
+            </a:schemeClr>
+          </a:lnRef>
+          <a:fillRef idx="1">
+            <a:schemeClr val="accent1"/>
+          </a:fillRef>
+          <a:effectRef idx="0">
+            <a:schemeClr val="accent1"/>
+          </a:effectRef>
+          <a:fontRef idx="minor">
+            <a:schemeClr val="lt1"/>
+          </a:fontRef>
+        </p:style>
+        <p:txBody>
+          <a:bodyPr rtlCol="0" anchor="ctr"/>
+          <a:lstStyle/>
+          <a:p>
+            <a:pPr algn="ctr"/>
+            <a:endParaRPr kumimoji="1" lang="ja-JP" altLang="en-US"/>
+          </a:p>
+        </p:txBody>
+      </p:sp>
+      <p:sp>
+        <p:nvSpPr>
+          <p:cNvPr id="25" name="円/楕円 24">
+            <a:extLst>
+              <a:ext uri="{FF2B5EF4-FFF2-40B4-BE49-F238E27FC236}">
+                <a16:creationId xmlns:a16="http://schemas.microsoft.com/office/drawing/2014/main" id="{8F63CD51-DC32-F5A6-628F-1B58041147B8}"/>
+              </a:ext>
+            </a:extLst>
+          </p:cNvPr>
+          <p:cNvSpPr/>
+          <p:nvPr/>
+        </p:nvSpPr>
+        <p:spPr>
+          <a:xfrm>
+            <a:off x="3459752" y="3123277"/>
+            <a:ext cx="269700" cy="523881"/>
+          </a:xfrm>
+          <a:prstGeom prst="ellipse">
+            <a:avLst/>
+          </a:prstGeom>
+          <a:solidFill>
+            <a:schemeClr val="accent3">
+              <a:lumMod val="40000"/>
+              <a:lumOff val="60000"/>
+            </a:schemeClr>
+          </a:solidFill>
+          <a:ln>
+            <a:noFill/>
+          </a:ln>
+        </p:spPr>
+        <p:style>
+          <a:lnRef idx="2">
+            <a:schemeClr val="accent1">
+              <a:shade val="50000"/>
+            </a:schemeClr>
+          </a:lnRef>
+          <a:fillRef idx="1">
+            <a:schemeClr val="accent1"/>
+          </a:fillRef>
+          <a:effectRef idx="0">
+            <a:schemeClr val="accent1"/>
+          </a:effectRef>
+          <a:fontRef idx="minor">
+            <a:schemeClr val="lt1"/>
+          </a:fontRef>
+        </p:style>
+        <p:txBody>
+          <a:bodyPr rtlCol="0" anchor="ctr"/>
+          <a:lstStyle/>
+          <a:p>
+            <a:pPr algn="ctr"/>
+            <a:endParaRPr kumimoji="1" lang="ja-JP" altLang="en-US"/>
+          </a:p>
+        </p:txBody>
+      </p:sp>
+    </p:spTree>
+    <p:extLst>
+      <p:ext uri="{BB962C8B-B14F-4D97-AF65-F5344CB8AC3E}">
+        <p14:creationId xmlns:p14="http://schemas.microsoft.com/office/powerpoint/2010/main" val="2613944412"/>
+      </p:ext>
+    </p:extLst>
+  </p:cSld>
+  <p:clrMapOvr>
+    <a:masterClrMapping/>
+  </p:clrMapOvr>
+</p:sld>
+</file>
+
 <file path=ppt/slides/slide2.xml><?xml version="1.0" encoding="utf-8"?>
 <p:sld xmlns:a="http://schemas.openxmlformats.org/drawingml/2006/main" xmlns:r="http://schemas.openxmlformats.org/officeDocument/2006/relationships" xmlns:p="http://schemas.openxmlformats.org/presentationml/2006/main">
   <p:cSld>
@@ -5866,7 +7231,13 @@
   <p:cSld>
     <p:spTree>
       <p:nvGrpSpPr>
-        <p:cNvPr id="1" name=""/>
+        <p:cNvPr id="1" name="">
+          <a:extLst>
+            <a:ext uri="{FF2B5EF4-FFF2-40B4-BE49-F238E27FC236}">
+              <a16:creationId xmlns:a16="http://schemas.microsoft.com/office/drawing/2014/main" id="{455D19A2-4F95-7465-B931-227C76FFC6C0}"/>
+            </a:ext>
+          </a:extLst>
+        </p:cNvPr>
         <p:cNvGrpSpPr/>
         <p:nvPr/>
       </p:nvGrpSpPr>
@@ -5880,20 +7251,31 @@
       </p:grpSpPr>
       <p:sp>
         <p:nvSpPr>
-          <p:cNvPr id="3" name="円/楕円 2"/>
+          <p:cNvPr id="82" name="正方形/長方形 81">
+            <a:extLst>
+              <a:ext uri="{FF2B5EF4-FFF2-40B4-BE49-F238E27FC236}">
+                <a16:creationId xmlns:a16="http://schemas.microsoft.com/office/drawing/2014/main" id="{9AE828E2-3EEE-DD69-2419-9EE259D299CB}"/>
+              </a:ext>
+            </a:extLst>
+          </p:cNvPr>
           <p:cNvSpPr/>
           <p:nvPr/>
         </p:nvSpPr>
         <p:spPr>
-          <a:xfrm rot="19800000">
-            <a:off x="-40244" y="1631606"/>
-            <a:ext cx="5130520" cy="4087744"/>
-          </a:xfrm>
-          <a:prstGeom prst="ellipse">
-            <a:avLst/>
-          </a:prstGeom>
+          <a:xfrm>
+            <a:off x="327381" y="542400"/>
+            <a:ext cx="2152505" cy="2152505"/>
+          </a:xfrm>
+          <a:prstGeom prst="rect">
+            <a:avLst/>
+          </a:prstGeom>
+          <a:solidFill>
+            <a:schemeClr val="bg1"/>
+          </a:solidFill>
           <a:ln>
-            <a:noFill/>
+            <a:solidFill>
+              <a:schemeClr val="tx1"/>
+            </a:solidFill>
           </a:ln>
         </p:spPr>
         <p:style>
@@ -5923,20 +7305,31 @@
       </p:sp>
       <p:sp>
         <p:nvSpPr>
-          <p:cNvPr id="5" name="円/楕円 4"/>
+          <p:cNvPr id="84" name="正方形/長方形 83">
+            <a:extLst>
+              <a:ext uri="{FF2B5EF4-FFF2-40B4-BE49-F238E27FC236}">
+                <a16:creationId xmlns:a16="http://schemas.microsoft.com/office/drawing/2014/main" id="{2ACB092E-5059-931A-637F-22B403409CD1}"/>
+              </a:ext>
+            </a:extLst>
+          </p:cNvPr>
           <p:cNvSpPr/>
           <p:nvPr/>
         </p:nvSpPr>
         <p:spPr>
-          <a:xfrm rot="1800000" flipH="1">
-            <a:off x="897768" y="1631605"/>
-            <a:ext cx="5130520" cy="4087744"/>
-          </a:xfrm>
-          <a:prstGeom prst="ellipse">
-            <a:avLst/>
-          </a:prstGeom>
+          <a:xfrm>
+            <a:off x="327381" y="2706587"/>
+            <a:ext cx="2152505" cy="2152505"/>
+          </a:xfrm>
+          <a:prstGeom prst="rect">
+            <a:avLst/>
+          </a:prstGeom>
+          <a:solidFill>
+            <a:schemeClr val="bg1"/>
+          </a:solidFill>
           <a:ln>
-            <a:noFill/>
+            <a:solidFill>
+              <a:schemeClr val="tx1"/>
+            </a:solidFill>
           </a:ln>
         </p:spPr>
         <p:style>
@@ -5966,20 +7359,31 @@
       </p:sp>
       <p:sp>
         <p:nvSpPr>
-          <p:cNvPr id="6" name="円/楕円 5"/>
+          <p:cNvPr id="85" name="正方形/長方形 84">
+            <a:extLst>
+              <a:ext uri="{FF2B5EF4-FFF2-40B4-BE49-F238E27FC236}">
+                <a16:creationId xmlns:a16="http://schemas.microsoft.com/office/drawing/2014/main" id="{68A76731-D17B-AAA8-6312-18B6078DDBD1}"/>
+              </a:ext>
+            </a:extLst>
+          </p:cNvPr>
           <p:cNvSpPr/>
           <p:nvPr/>
         </p:nvSpPr>
         <p:spPr>
           <a:xfrm>
-            <a:off x="1055434" y="5185752"/>
-            <a:ext cx="3812146" cy="746975"/>
-          </a:xfrm>
-          <a:prstGeom prst="ellipse">
-            <a:avLst/>
-          </a:prstGeom>
+            <a:off x="2497015" y="2706587"/>
+            <a:ext cx="2152505" cy="2152505"/>
+          </a:xfrm>
+          <a:prstGeom prst="rect">
+            <a:avLst/>
+          </a:prstGeom>
+          <a:solidFill>
+            <a:schemeClr val="bg1"/>
+          </a:solidFill>
           <a:ln>
-            <a:noFill/>
+            <a:solidFill>
+              <a:schemeClr val="tx1"/>
+            </a:solidFill>
           </a:ln>
         </p:spPr>
         <p:style>
@@ -6009,23 +7413,31 @@
       </p:sp>
       <p:sp>
         <p:nvSpPr>
-          <p:cNvPr id="7" name="円/楕円 6"/>
+          <p:cNvPr id="90" name="正方形/長方形 89">
+            <a:extLst>
+              <a:ext uri="{FF2B5EF4-FFF2-40B4-BE49-F238E27FC236}">
+                <a16:creationId xmlns:a16="http://schemas.microsoft.com/office/drawing/2014/main" id="{E0AA4E58-8CF5-E1B4-3C85-554D1880B1BB}"/>
+              </a:ext>
+            </a:extLst>
+          </p:cNvPr>
           <p:cNvSpPr/>
           <p:nvPr/>
         </p:nvSpPr>
         <p:spPr>
           <a:xfrm>
-            <a:off x="2022740" y="2770774"/>
-            <a:ext cx="502276" cy="1013984"/>
-          </a:xfrm>
-          <a:prstGeom prst="ellipse">
-            <a:avLst/>
-          </a:prstGeom>
-          <a:solidFill>
-            <a:srgbClr val="0070C0"/>
+            <a:off x="4666649" y="2706587"/>
+            <a:ext cx="2152505" cy="2152505"/>
+          </a:xfrm>
+          <a:prstGeom prst="rect">
+            <a:avLst/>
+          </a:prstGeom>
+          <a:solidFill>
+            <a:schemeClr val="bg1"/>
           </a:solidFill>
           <a:ln>
-            <a:noFill/>
+            <a:solidFill>
+              <a:schemeClr val="tx1"/>
+            </a:solidFill>
           </a:ln>
         </p:spPr>
         <p:style>
@@ -6055,26 +7467,31 @@
       </p:sp>
       <p:sp>
         <p:nvSpPr>
-          <p:cNvPr id="8" name="円/楕円 7"/>
+          <p:cNvPr id="91" name="正方形/長方形 90">
+            <a:extLst>
+              <a:ext uri="{FF2B5EF4-FFF2-40B4-BE49-F238E27FC236}">
+                <a16:creationId xmlns:a16="http://schemas.microsoft.com/office/drawing/2014/main" id="{265479DE-F675-99BB-46F2-ACC150C402E1}"/>
+              </a:ext>
+            </a:extLst>
+          </p:cNvPr>
           <p:cNvSpPr/>
           <p:nvPr/>
         </p:nvSpPr>
         <p:spPr>
           <a:xfrm>
-            <a:off x="2230948" y="3129941"/>
-            <a:ext cx="269700" cy="523881"/>
-          </a:xfrm>
-          <a:prstGeom prst="ellipse">
-            <a:avLst/>
-          </a:prstGeom>
-          <a:solidFill>
-            <a:schemeClr val="accent1">
-              <a:lumMod val="60000"/>
-              <a:lumOff val="40000"/>
-            </a:schemeClr>
+            <a:off x="6823583" y="2706587"/>
+            <a:ext cx="2152505" cy="2152505"/>
+          </a:xfrm>
+          <a:prstGeom prst="rect">
+            <a:avLst/>
+          </a:prstGeom>
+          <a:solidFill>
+            <a:schemeClr val="bg1"/>
           </a:solidFill>
           <a:ln>
-            <a:noFill/>
+            <a:solidFill>
+              <a:schemeClr val="tx1"/>
+            </a:solidFill>
           </a:ln>
         </p:spPr>
         <p:style>
@@ -6104,23 +7521,31 @@
       </p:sp>
       <p:sp>
         <p:nvSpPr>
-          <p:cNvPr id="9" name="円/楕円 8"/>
+          <p:cNvPr id="95" name="正方形/長方形 94">
+            <a:extLst>
+              <a:ext uri="{FF2B5EF4-FFF2-40B4-BE49-F238E27FC236}">
+                <a16:creationId xmlns:a16="http://schemas.microsoft.com/office/drawing/2014/main" id="{EAD4004C-9398-A4F7-E966-123F42250705}"/>
+              </a:ext>
+            </a:extLst>
+          </p:cNvPr>
           <p:cNvSpPr/>
           <p:nvPr/>
         </p:nvSpPr>
         <p:spPr>
           <a:xfrm>
-            <a:off x="3438660" y="2770774"/>
-            <a:ext cx="502276" cy="1013984"/>
-          </a:xfrm>
-          <a:prstGeom prst="ellipse">
-            <a:avLst/>
-          </a:prstGeom>
-          <a:solidFill>
-            <a:srgbClr val="0070C0"/>
+            <a:off x="8980517" y="2706587"/>
+            <a:ext cx="2152505" cy="2152505"/>
+          </a:xfrm>
+          <a:prstGeom prst="rect">
+            <a:avLst/>
+          </a:prstGeom>
+          <a:solidFill>
+            <a:schemeClr val="bg1"/>
           </a:solidFill>
           <a:ln>
-            <a:noFill/>
+            <a:solidFill>
+              <a:schemeClr val="tx1"/>
+            </a:solidFill>
           </a:ln>
         </p:spPr>
         <p:style>
@@ -6150,26 +7575,31 @@
       </p:sp>
       <p:sp>
         <p:nvSpPr>
-          <p:cNvPr id="10" name="円/楕円 9"/>
+          <p:cNvPr id="14" name="正方形/長方形 13">
+            <a:extLst>
+              <a:ext uri="{FF2B5EF4-FFF2-40B4-BE49-F238E27FC236}">
+                <a16:creationId xmlns:a16="http://schemas.microsoft.com/office/drawing/2014/main" id="{FA5CF6B0-2C22-9E07-6E1C-2992E7DB4D3F}"/>
+              </a:ext>
+            </a:extLst>
+          </p:cNvPr>
           <p:cNvSpPr/>
           <p:nvPr/>
         </p:nvSpPr>
         <p:spPr>
           <a:xfrm>
-            <a:off x="3466562" y="3129941"/>
-            <a:ext cx="269700" cy="523881"/>
-          </a:xfrm>
-          <a:prstGeom prst="ellipse">
-            <a:avLst/>
-          </a:prstGeom>
-          <a:solidFill>
-            <a:schemeClr val="accent1">
-              <a:lumMod val="60000"/>
-              <a:lumOff val="40000"/>
-            </a:schemeClr>
+            <a:off x="5196168" y="1122960"/>
+            <a:ext cx="1069260" cy="1069260"/>
+          </a:xfrm>
+          <a:prstGeom prst="rect">
+            <a:avLst/>
+          </a:prstGeom>
+          <a:solidFill>
+            <a:schemeClr val="bg1"/>
           </a:solidFill>
           <a:ln>
-            <a:noFill/>
+            <a:solidFill>
+              <a:schemeClr val="tx1"/>
+            </a:solidFill>
           </a:ln>
         </p:spPr>
         <p:style>
@@ -6199,7 +7629,13 @@
       </p:sp>
       <p:pic>
         <p:nvPicPr>
-          <p:cNvPr id="18" name="図 17"/>
+          <p:cNvPr id="3" name="図 2">
+            <a:extLst>
+              <a:ext uri="{FF2B5EF4-FFF2-40B4-BE49-F238E27FC236}">
+                <a16:creationId xmlns:a16="http://schemas.microsoft.com/office/drawing/2014/main" id="{E8DF9AF0-7ED6-E517-2DC4-2A7A937FB3E0}"/>
+              </a:ext>
+            </a:extLst>
+          </p:cNvPr>
           <p:cNvPicPr>
             <a:picLocks noChangeAspect="1"/>
           </p:cNvPicPr>
@@ -6213,216 +7649,198 @@
         </p:blipFill>
         <p:spPr>
           <a:xfrm>
-            <a:off x="6351526" y="1488358"/>
-            <a:ext cx="5840474" cy="4444369"/>
+            <a:off x="5367548" y="1351405"/>
+            <a:ext cx="751422" cy="572400"/>
           </a:xfrm>
           <a:prstGeom prst="rect">
             <a:avLst/>
           </a:prstGeom>
-          <a:effectLst>
-            <a:innerShdw blurRad="635000" dist="508000" dir="8100000">
-              <a:prstClr val="black">
-                <a:alpha val="25000"/>
-              </a:prstClr>
-            </a:innerShdw>
-            <a:softEdge rad="127000"/>
-          </a:effectLst>
         </p:spPr>
       </p:pic>
-      <p:sp>
-        <p:nvSpPr>
-          <p:cNvPr id="19" name="円/楕円 18"/>
-          <p:cNvSpPr/>
-          <p:nvPr/>
-        </p:nvSpPr>
-        <p:spPr>
-          <a:xfrm>
-            <a:off x="8295330" y="2770774"/>
-            <a:ext cx="502276" cy="1013984"/>
-          </a:xfrm>
-          <a:prstGeom prst="ellipse">
-            <a:avLst/>
-          </a:prstGeom>
-          <a:solidFill>
-            <a:srgbClr val="0070C0"/>
-          </a:solidFill>
-          <a:ln>
-            <a:noFill/>
-          </a:ln>
-        </p:spPr>
-        <p:style>
-          <a:lnRef idx="2">
-            <a:schemeClr val="accent1">
-              <a:shade val="50000"/>
-            </a:schemeClr>
-          </a:lnRef>
-          <a:fillRef idx="1">
-            <a:schemeClr val="accent1"/>
-          </a:fillRef>
-          <a:effectRef idx="0">
-            <a:schemeClr val="accent1"/>
-          </a:effectRef>
-          <a:fontRef idx="minor">
-            <a:schemeClr val="lt1"/>
-          </a:fontRef>
-        </p:style>
-        <p:txBody>
-          <a:bodyPr rtlCol="0" anchor="ctr"/>
-          <a:lstStyle/>
-          <a:p>
-            <a:pPr algn="ctr"/>
-            <a:endParaRPr kumimoji="1" lang="ja-JP" altLang="en-US"/>
-          </a:p>
-        </p:txBody>
-      </p:sp>
-      <p:sp>
-        <p:nvSpPr>
-          <p:cNvPr id="20" name="円/楕円 19"/>
-          <p:cNvSpPr/>
-          <p:nvPr/>
-        </p:nvSpPr>
-        <p:spPr>
-          <a:xfrm>
-            <a:off x="8503538" y="3129941"/>
-            <a:ext cx="269700" cy="523881"/>
-          </a:xfrm>
-          <a:prstGeom prst="ellipse">
-            <a:avLst/>
-          </a:prstGeom>
-          <a:solidFill>
-            <a:schemeClr val="accent1">
-              <a:lumMod val="60000"/>
-              <a:lumOff val="40000"/>
-            </a:schemeClr>
-          </a:solidFill>
-          <a:ln>
-            <a:noFill/>
-          </a:ln>
-        </p:spPr>
-        <p:style>
-          <a:lnRef idx="2">
-            <a:schemeClr val="accent1">
-              <a:shade val="50000"/>
-            </a:schemeClr>
-          </a:lnRef>
-          <a:fillRef idx="1">
-            <a:schemeClr val="accent1"/>
-          </a:fillRef>
-          <a:effectRef idx="0">
-            <a:schemeClr val="accent1"/>
-          </a:effectRef>
-          <a:fontRef idx="minor">
-            <a:schemeClr val="lt1"/>
-          </a:fontRef>
-        </p:style>
-        <p:txBody>
-          <a:bodyPr rtlCol="0" anchor="ctr"/>
-          <a:lstStyle/>
-          <a:p>
-            <a:pPr algn="ctr"/>
-            <a:endParaRPr kumimoji="1" lang="ja-JP" altLang="en-US"/>
-          </a:p>
-        </p:txBody>
-      </p:sp>
-      <p:sp>
-        <p:nvSpPr>
-          <p:cNvPr id="21" name="円/楕円 20"/>
-          <p:cNvSpPr/>
-          <p:nvPr/>
-        </p:nvSpPr>
-        <p:spPr>
-          <a:xfrm>
-            <a:off x="9711250" y="2770774"/>
-            <a:ext cx="502276" cy="1013984"/>
-          </a:xfrm>
-          <a:prstGeom prst="ellipse">
-            <a:avLst/>
-          </a:prstGeom>
-          <a:solidFill>
-            <a:srgbClr val="0070C0"/>
-          </a:solidFill>
-          <a:ln>
-            <a:noFill/>
-          </a:ln>
-        </p:spPr>
-        <p:style>
-          <a:lnRef idx="2">
-            <a:schemeClr val="accent1">
-              <a:shade val="50000"/>
-            </a:schemeClr>
-          </a:lnRef>
-          <a:fillRef idx="1">
-            <a:schemeClr val="accent1"/>
-          </a:fillRef>
-          <a:effectRef idx="0">
-            <a:schemeClr val="accent1"/>
-          </a:effectRef>
-          <a:fontRef idx="minor">
-            <a:schemeClr val="lt1"/>
-          </a:fontRef>
-        </p:style>
-        <p:txBody>
-          <a:bodyPr rtlCol="0" anchor="ctr"/>
-          <a:lstStyle/>
-          <a:p>
-            <a:pPr algn="ctr"/>
-            <a:endParaRPr kumimoji="1" lang="ja-JP" altLang="en-US"/>
-          </a:p>
-        </p:txBody>
-      </p:sp>
-      <p:sp>
-        <p:nvSpPr>
-          <p:cNvPr id="22" name="円/楕円 21"/>
-          <p:cNvSpPr/>
-          <p:nvPr/>
-        </p:nvSpPr>
-        <p:spPr>
-          <a:xfrm>
-            <a:off x="9739152" y="3129941"/>
-            <a:ext cx="269700" cy="523881"/>
-          </a:xfrm>
-          <a:prstGeom prst="ellipse">
-            <a:avLst/>
-          </a:prstGeom>
-          <a:solidFill>
-            <a:schemeClr val="accent1">
-              <a:lumMod val="60000"/>
-              <a:lumOff val="40000"/>
-            </a:schemeClr>
-          </a:solidFill>
-          <a:ln>
-            <a:noFill/>
-          </a:ln>
-        </p:spPr>
-        <p:style>
-          <a:lnRef idx="2">
-            <a:schemeClr val="accent1">
-              <a:shade val="50000"/>
-            </a:schemeClr>
-          </a:lnRef>
-          <a:fillRef idx="1">
-            <a:schemeClr val="accent1"/>
-          </a:fillRef>
-          <a:effectRef idx="0">
-            <a:schemeClr val="accent1"/>
-          </a:effectRef>
-          <a:fontRef idx="minor">
-            <a:schemeClr val="lt1"/>
-          </a:fontRef>
-        </p:style>
-        <p:txBody>
-          <a:bodyPr rtlCol="0" anchor="ctr"/>
-          <a:lstStyle/>
-          <a:p>
-            <a:pPr algn="ctr"/>
-            <a:endParaRPr kumimoji="1" lang="ja-JP" altLang="en-US"/>
-          </a:p>
-        </p:txBody>
-      </p:sp>
+      <p:pic>
+        <p:nvPicPr>
+          <p:cNvPr id="4" name="図 3">
+            <a:extLst>
+              <a:ext uri="{FF2B5EF4-FFF2-40B4-BE49-F238E27FC236}">
+                <a16:creationId xmlns:a16="http://schemas.microsoft.com/office/drawing/2014/main" id="{D48E545E-DB13-26DF-DD5E-AA28B16D730D}"/>
+              </a:ext>
+            </a:extLst>
+          </p:cNvPr>
+          <p:cNvPicPr>
+            <a:picLocks noChangeAspect="1"/>
+          </p:cNvPicPr>
+          <p:nvPr/>
+        </p:nvPicPr>
+        <p:blipFill>
+          <a:blip r:embed="rId2"/>
+          <a:stretch>
+            <a:fillRect/>
+          </a:stretch>
+        </p:blipFill>
+        <p:spPr>
+          <a:xfrm>
+            <a:off x="1052169" y="1351405"/>
+            <a:ext cx="751422" cy="572400"/>
+          </a:xfrm>
+          <a:prstGeom prst="rect">
+            <a:avLst/>
+          </a:prstGeom>
+        </p:spPr>
+      </p:pic>
+      <p:pic>
+        <p:nvPicPr>
+          <p:cNvPr id="5" name="図 4">
+            <a:extLst>
+              <a:ext uri="{FF2B5EF4-FFF2-40B4-BE49-F238E27FC236}">
+                <a16:creationId xmlns:a16="http://schemas.microsoft.com/office/drawing/2014/main" id="{67A46C60-7B5E-807D-1C00-E42D89E5FF6D}"/>
+              </a:ext>
+            </a:extLst>
+          </p:cNvPr>
+          <p:cNvPicPr>
+            <a:picLocks noChangeAspect="1"/>
+          </p:cNvPicPr>
+          <p:nvPr/>
+        </p:nvPicPr>
+        <p:blipFill>
+          <a:blip r:embed="rId2"/>
+          <a:stretch>
+            <a:fillRect/>
+          </a:stretch>
+        </p:blipFill>
+        <p:spPr>
+          <a:xfrm rot="-600000">
+            <a:off x="977303" y="3414010"/>
+            <a:ext cx="751422" cy="572400"/>
+          </a:xfrm>
+          <a:prstGeom prst="rect">
+            <a:avLst/>
+          </a:prstGeom>
+        </p:spPr>
+      </p:pic>
+      <p:pic>
+        <p:nvPicPr>
+          <p:cNvPr id="6" name="図 5">
+            <a:extLst>
+              <a:ext uri="{FF2B5EF4-FFF2-40B4-BE49-F238E27FC236}">
+                <a16:creationId xmlns:a16="http://schemas.microsoft.com/office/drawing/2014/main" id="{A9611F68-808D-FD23-4B99-95E48ADAEC90}"/>
+              </a:ext>
+            </a:extLst>
+          </p:cNvPr>
+          <p:cNvPicPr>
+            <a:picLocks noChangeAspect="1"/>
+          </p:cNvPicPr>
+          <p:nvPr/>
+        </p:nvPicPr>
+        <p:blipFill>
+          <a:blip r:embed="rId2"/>
+          <a:stretch>
+            <a:fillRect/>
+          </a:stretch>
+        </p:blipFill>
+        <p:spPr>
+          <a:xfrm rot="-1200000">
+            <a:off x="3074708" y="3309103"/>
+            <a:ext cx="751422" cy="572400"/>
+          </a:xfrm>
+          <a:prstGeom prst="rect">
+            <a:avLst/>
+          </a:prstGeom>
+        </p:spPr>
+      </p:pic>
+      <p:pic>
+        <p:nvPicPr>
+          <p:cNvPr id="7" name="図 6">
+            <a:extLst>
+              <a:ext uri="{FF2B5EF4-FFF2-40B4-BE49-F238E27FC236}">
+                <a16:creationId xmlns:a16="http://schemas.microsoft.com/office/drawing/2014/main" id="{754623C6-400C-D5D9-E6D2-9623A11AE701}"/>
+              </a:ext>
+            </a:extLst>
+          </p:cNvPr>
+          <p:cNvPicPr>
+            <a:picLocks noChangeAspect="1"/>
+          </p:cNvPicPr>
+          <p:nvPr/>
+        </p:nvPicPr>
+        <p:blipFill>
+          <a:blip r:embed="rId2"/>
+          <a:stretch>
+            <a:fillRect/>
+          </a:stretch>
+        </p:blipFill>
+        <p:spPr>
+          <a:xfrm rot="-1800000">
+            <a:off x="5202078" y="3219169"/>
+            <a:ext cx="751422" cy="572400"/>
+          </a:xfrm>
+          <a:prstGeom prst="rect">
+            <a:avLst/>
+          </a:prstGeom>
+        </p:spPr>
+      </p:pic>
+      <p:pic>
+        <p:nvPicPr>
+          <p:cNvPr id="8" name="図 7">
+            <a:extLst>
+              <a:ext uri="{FF2B5EF4-FFF2-40B4-BE49-F238E27FC236}">
+                <a16:creationId xmlns:a16="http://schemas.microsoft.com/office/drawing/2014/main" id="{F7DC4310-2D63-3522-9E32-36D8C73CAC93}"/>
+              </a:ext>
+            </a:extLst>
+          </p:cNvPr>
+          <p:cNvPicPr>
+            <a:picLocks noChangeAspect="1"/>
+          </p:cNvPicPr>
+          <p:nvPr/>
+        </p:nvPicPr>
+        <p:blipFill>
+          <a:blip r:embed="rId2"/>
+          <a:stretch>
+            <a:fillRect/>
+          </a:stretch>
+        </p:blipFill>
+        <p:spPr>
+          <a:xfrm rot="-2400000">
+            <a:off x="7314444" y="3368845"/>
+            <a:ext cx="751422" cy="572400"/>
+          </a:xfrm>
+          <a:prstGeom prst="rect">
+            <a:avLst/>
+          </a:prstGeom>
+        </p:spPr>
+      </p:pic>
+      <p:pic>
+        <p:nvPicPr>
+          <p:cNvPr id="9" name="図 8">
+            <a:extLst>
+              <a:ext uri="{FF2B5EF4-FFF2-40B4-BE49-F238E27FC236}">
+                <a16:creationId xmlns:a16="http://schemas.microsoft.com/office/drawing/2014/main" id="{55F3D62E-F49B-987D-BF3F-9DD252283595}"/>
+              </a:ext>
+            </a:extLst>
+          </p:cNvPr>
+          <p:cNvPicPr>
+            <a:picLocks noChangeAspect="1"/>
+          </p:cNvPicPr>
+          <p:nvPr/>
+        </p:nvPicPr>
+        <p:blipFill>
+          <a:blip r:embed="rId2"/>
+          <a:stretch>
+            <a:fillRect/>
+          </a:stretch>
+        </p:blipFill>
+        <p:spPr>
+          <a:xfrm rot="-3000000">
+            <a:off x="9426793" y="3548909"/>
+            <a:ext cx="751422" cy="572400"/>
+          </a:xfrm>
+          <a:prstGeom prst="rect">
+            <a:avLst/>
+          </a:prstGeom>
+        </p:spPr>
+      </p:pic>
     </p:spTree>
     <p:extLst>
       <p:ext uri="{BB962C8B-B14F-4D97-AF65-F5344CB8AC3E}">
-        <p14:creationId xmlns:p14="http://schemas.microsoft.com/office/powerpoint/2010/main" val="129349305"/>
+        <p14:creationId xmlns:p14="http://schemas.microsoft.com/office/powerpoint/2010/main" val="2388310005"/>
       </p:ext>
     </p:extLst>
   </p:cSld>
@@ -6449,6 +7867,577 @@
           <a:chExt cx="0" cy="0"/>
         </a:xfrm>
       </p:grpSpPr>
+      <p:sp>
+        <p:nvSpPr>
+          <p:cNvPr id="3" name="円/楕円 2"/>
+          <p:cNvSpPr/>
+          <p:nvPr/>
+        </p:nvSpPr>
+        <p:spPr>
+          <a:xfrm rot="19800000">
+            <a:off x="-40244" y="1631606"/>
+            <a:ext cx="5130520" cy="4087744"/>
+          </a:xfrm>
+          <a:prstGeom prst="ellipse">
+            <a:avLst/>
+          </a:prstGeom>
+          <a:ln>
+            <a:noFill/>
+          </a:ln>
+        </p:spPr>
+        <p:style>
+          <a:lnRef idx="2">
+            <a:schemeClr val="accent1">
+              <a:shade val="50000"/>
+            </a:schemeClr>
+          </a:lnRef>
+          <a:fillRef idx="1">
+            <a:schemeClr val="accent1"/>
+          </a:fillRef>
+          <a:effectRef idx="0">
+            <a:schemeClr val="accent1"/>
+          </a:effectRef>
+          <a:fontRef idx="minor">
+            <a:schemeClr val="lt1"/>
+          </a:fontRef>
+        </p:style>
+        <p:txBody>
+          <a:bodyPr rtlCol="0" anchor="ctr"/>
+          <a:lstStyle/>
+          <a:p>
+            <a:pPr algn="ctr"/>
+            <a:endParaRPr kumimoji="1" lang="ja-JP" altLang="en-US"/>
+          </a:p>
+        </p:txBody>
+      </p:sp>
+      <p:sp>
+        <p:nvSpPr>
+          <p:cNvPr id="5" name="円/楕円 4"/>
+          <p:cNvSpPr/>
+          <p:nvPr/>
+        </p:nvSpPr>
+        <p:spPr>
+          <a:xfrm rot="1800000" flipH="1">
+            <a:off x="897768" y="1631605"/>
+            <a:ext cx="5130520" cy="4087744"/>
+          </a:xfrm>
+          <a:prstGeom prst="ellipse">
+            <a:avLst/>
+          </a:prstGeom>
+          <a:ln>
+            <a:noFill/>
+          </a:ln>
+        </p:spPr>
+        <p:style>
+          <a:lnRef idx="2">
+            <a:schemeClr val="accent1">
+              <a:shade val="50000"/>
+            </a:schemeClr>
+          </a:lnRef>
+          <a:fillRef idx="1">
+            <a:schemeClr val="accent1"/>
+          </a:fillRef>
+          <a:effectRef idx="0">
+            <a:schemeClr val="accent1"/>
+          </a:effectRef>
+          <a:fontRef idx="minor">
+            <a:schemeClr val="lt1"/>
+          </a:fontRef>
+        </p:style>
+        <p:txBody>
+          <a:bodyPr rtlCol="0" anchor="ctr"/>
+          <a:lstStyle/>
+          <a:p>
+            <a:pPr algn="ctr"/>
+            <a:endParaRPr kumimoji="1" lang="ja-JP" altLang="en-US"/>
+          </a:p>
+        </p:txBody>
+      </p:sp>
+      <p:sp>
+        <p:nvSpPr>
+          <p:cNvPr id="6" name="円/楕円 5"/>
+          <p:cNvSpPr/>
+          <p:nvPr/>
+        </p:nvSpPr>
+        <p:spPr>
+          <a:xfrm>
+            <a:off x="1055434" y="5185752"/>
+            <a:ext cx="3812146" cy="746975"/>
+          </a:xfrm>
+          <a:prstGeom prst="ellipse">
+            <a:avLst/>
+          </a:prstGeom>
+          <a:ln>
+            <a:noFill/>
+          </a:ln>
+        </p:spPr>
+        <p:style>
+          <a:lnRef idx="2">
+            <a:schemeClr val="accent1">
+              <a:shade val="50000"/>
+            </a:schemeClr>
+          </a:lnRef>
+          <a:fillRef idx="1">
+            <a:schemeClr val="accent1"/>
+          </a:fillRef>
+          <a:effectRef idx="0">
+            <a:schemeClr val="accent1"/>
+          </a:effectRef>
+          <a:fontRef idx="minor">
+            <a:schemeClr val="lt1"/>
+          </a:fontRef>
+        </p:style>
+        <p:txBody>
+          <a:bodyPr rtlCol="0" anchor="ctr"/>
+          <a:lstStyle/>
+          <a:p>
+            <a:pPr algn="ctr"/>
+            <a:endParaRPr kumimoji="1" lang="ja-JP" altLang="en-US"/>
+          </a:p>
+        </p:txBody>
+      </p:sp>
+      <p:sp>
+        <p:nvSpPr>
+          <p:cNvPr id="7" name="円/楕円 6"/>
+          <p:cNvSpPr/>
+          <p:nvPr/>
+        </p:nvSpPr>
+        <p:spPr>
+          <a:xfrm>
+            <a:off x="2022740" y="2770774"/>
+            <a:ext cx="502276" cy="1013984"/>
+          </a:xfrm>
+          <a:prstGeom prst="ellipse">
+            <a:avLst/>
+          </a:prstGeom>
+          <a:solidFill>
+            <a:srgbClr val="0070C0"/>
+          </a:solidFill>
+          <a:ln>
+            <a:noFill/>
+          </a:ln>
+        </p:spPr>
+        <p:style>
+          <a:lnRef idx="2">
+            <a:schemeClr val="accent1">
+              <a:shade val="50000"/>
+            </a:schemeClr>
+          </a:lnRef>
+          <a:fillRef idx="1">
+            <a:schemeClr val="accent1"/>
+          </a:fillRef>
+          <a:effectRef idx="0">
+            <a:schemeClr val="accent1"/>
+          </a:effectRef>
+          <a:fontRef idx="minor">
+            <a:schemeClr val="lt1"/>
+          </a:fontRef>
+        </p:style>
+        <p:txBody>
+          <a:bodyPr rtlCol="0" anchor="ctr"/>
+          <a:lstStyle/>
+          <a:p>
+            <a:pPr algn="ctr"/>
+            <a:endParaRPr kumimoji="1" lang="ja-JP" altLang="en-US"/>
+          </a:p>
+        </p:txBody>
+      </p:sp>
+      <p:sp>
+        <p:nvSpPr>
+          <p:cNvPr id="8" name="円/楕円 7"/>
+          <p:cNvSpPr/>
+          <p:nvPr/>
+        </p:nvSpPr>
+        <p:spPr>
+          <a:xfrm>
+            <a:off x="2230948" y="3129941"/>
+            <a:ext cx="269700" cy="523881"/>
+          </a:xfrm>
+          <a:prstGeom prst="ellipse">
+            <a:avLst/>
+          </a:prstGeom>
+          <a:solidFill>
+            <a:schemeClr val="accent1">
+              <a:lumMod val="60000"/>
+              <a:lumOff val="40000"/>
+            </a:schemeClr>
+          </a:solidFill>
+          <a:ln>
+            <a:noFill/>
+          </a:ln>
+        </p:spPr>
+        <p:style>
+          <a:lnRef idx="2">
+            <a:schemeClr val="accent1">
+              <a:shade val="50000"/>
+            </a:schemeClr>
+          </a:lnRef>
+          <a:fillRef idx="1">
+            <a:schemeClr val="accent1"/>
+          </a:fillRef>
+          <a:effectRef idx="0">
+            <a:schemeClr val="accent1"/>
+          </a:effectRef>
+          <a:fontRef idx="minor">
+            <a:schemeClr val="lt1"/>
+          </a:fontRef>
+        </p:style>
+        <p:txBody>
+          <a:bodyPr rtlCol="0" anchor="ctr"/>
+          <a:lstStyle/>
+          <a:p>
+            <a:pPr algn="ctr"/>
+            <a:endParaRPr kumimoji="1" lang="ja-JP" altLang="en-US"/>
+          </a:p>
+        </p:txBody>
+      </p:sp>
+      <p:sp>
+        <p:nvSpPr>
+          <p:cNvPr id="9" name="円/楕円 8"/>
+          <p:cNvSpPr/>
+          <p:nvPr/>
+        </p:nvSpPr>
+        <p:spPr>
+          <a:xfrm>
+            <a:off x="3438660" y="2770774"/>
+            <a:ext cx="502276" cy="1013984"/>
+          </a:xfrm>
+          <a:prstGeom prst="ellipse">
+            <a:avLst/>
+          </a:prstGeom>
+          <a:solidFill>
+            <a:srgbClr val="0070C0"/>
+          </a:solidFill>
+          <a:ln>
+            <a:noFill/>
+          </a:ln>
+        </p:spPr>
+        <p:style>
+          <a:lnRef idx="2">
+            <a:schemeClr val="accent1">
+              <a:shade val="50000"/>
+            </a:schemeClr>
+          </a:lnRef>
+          <a:fillRef idx="1">
+            <a:schemeClr val="accent1"/>
+          </a:fillRef>
+          <a:effectRef idx="0">
+            <a:schemeClr val="accent1"/>
+          </a:effectRef>
+          <a:fontRef idx="minor">
+            <a:schemeClr val="lt1"/>
+          </a:fontRef>
+        </p:style>
+        <p:txBody>
+          <a:bodyPr rtlCol="0" anchor="ctr"/>
+          <a:lstStyle/>
+          <a:p>
+            <a:pPr algn="ctr"/>
+            <a:endParaRPr kumimoji="1" lang="ja-JP" altLang="en-US"/>
+          </a:p>
+        </p:txBody>
+      </p:sp>
+      <p:sp>
+        <p:nvSpPr>
+          <p:cNvPr id="10" name="円/楕円 9"/>
+          <p:cNvSpPr/>
+          <p:nvPr/>
+        </p:nvSpPr>
+        <p:spPr>
+          <a:xfrm>
+            <a:off x="3466562" y="3129941"/>
+            <a:ext cx="269700" cy="523881"/>
+          </a:xfrm>
+          <a:prstGeom prst="ellipse">
+            <a:avLst/>
+          </a:prstGeom>
+          <a:solidFill>
+            <a:schemeClr val="accent1">
+              <a:lumMod val="60000"/>
+              <a:lumOff val="40000"/>
+            </a:schemeClr>
+          </a:solidFill>
+          <a:ln>
+            <a:noFill/>
+          </a:ln>
+        </p:spPr>
+        <p:style>
+          <a:lnRef idx="2">
+            <a:schemeClr val="accent1">
+              <a:shade val="50000"/>
+            </a:schemeClr>
+          </a:lnRef>
+          <a:fillRef idx="1">
+            <a:schemeClr val="accent1"/>
+          </a:fillRef>
+          <a:effectRef idx="0">
+            <a:schemeClr val="accent1"/>
+          </a:effectRef>
+          <a:fontRef idx="minor">
+            <a:schemeClr val="lt1"/>
+          </a:fontRef>
+        </p:style>
+        <p:txBody>
+          <a:bodyPr rtlCol="0" anchor="ctr"/>
+          <a:lstStyle/>
+          <a:p>
+            <a:pPr algn="ctr"/>
+            <a:endParaRPr kumimoji="1" lang="ja-JP" altLang="en-US"/>
+          </a:p>
+        </p:txBody>
+      </p:sp>
+      <p:pic>
+        <p:nvPicPr>
+          <p:cNvPr id="18" name="図 17"/>
+          <p:cNvPicPr>
+            <a:picLocks noChangeAspect="1"/>
+          </p:cNvPicPr>
+          <p:nvPr/>
+        </p:nvPicPr>
+        <p:blipFill>
+          <a:blip r:embed="rId2"/>
+          <a:stretch>
+            <a:fillRect/>
+          </a:stretch>
+        </p:blipFill>
+        <p:spPr>
+          <a:xfrm>
+            <a:off x="6351526" y="1488358"/>
+            <a:ext cx="5840474" cy="4444369"/>
+          </a:xfrm>
+          <a:prstGeom prst="rect">
+            <a:avLst/>
+          </a:prstGeom>
+          <a:effectLst>
+            <a:innerShdw blurRad="635000" dist="508000" dir="8100000">
+              <a:prstClr val="black">
+                <a:alpha val="25000"/>
+              </a:prstClr>
+            </a:innerShdw>
+            <a:softEdge rad="127000"/>
+          </a:effectLst>
+        </p:spPr>
+      </p:pic>
+      <p:sp>
+        <p:nvSpPr>
+          <p:cNvPr id="19" name="円/楕円 18"/>
+          <p:cNvSpPr/>
+          <p:nvPr/>
+        </p:nvSpPr>
+        <p:spPr>
+          <a:xfrm>
+            <a:off x="8295330" y="2770774"/>
+            <a:ext cx="502276" cy="1013984"/>
+          </a:xfrm>
+          <a:prstGeom prst="ellipse">
+            <a:avLst/>
+          </a:prstGeom>
+          <a:solidFill>
+            <a:srgbClr val="0070C0"/>
+          </a:solidFill>
+          <a:ln>
+            <a:noFill/>
+          </a:ln>
+        </p:spPr>
+        <p:style>
+          <a:lnRef idx="2">
+            <a:schemeClr val="accent1">
+              <a:shade val="50000"/>
+            </a:schemeClr>
+          </a:lnRef>
+          <a:fillRef idx="1">
+            <a:schemeClr val="accent1"/>
+          </a:fillRef>
+          <a:effectRef idx="0">
+            <a:schemeClr val="accent1"/>
+          </a:effectRef>
+          <a:fontRef idx="minor">
+            <a:schemeClr val="lt1"/>
+          </a:fontRef>
+        </p:style>
+        <p:txBody>
+          <a:bodyPr rtlCol="0" anchor="ctr"/>
+          <a:lstStyle/>
+          <a:p>
+            <a:pPr algn="ctr"/>
+            <a:endParaRPr kumimoji="1" lang="ja-JP" altLang="en-US"/>
+          </a:p>
+        </p:txBody>
+      </p:sp>
+      <p:sp>
+        <p:nvSpPr>
+          <p:cNvPr id="20" name="円/楕円 19"/>
+          <p:cNvSpPr/>
+          <p:nvPr/>
+        </p:nvSpPr>
+        <p:spPr>
+          <a:xfrm>
+            <a:off x="8503538" y="3129941"/>
+            <a:ext cx="269700" cy="523881"/>
+          </a:xfrm>
+          <a:prstGeom prst="ellipse">
+            <a:avLst/>
+          </a:prstGeom>
+          <a:solidFill>
+            <a:schemeClr val="accent1">
+              <a:lumMod val="60000"/>
+              <a:lumOff val="40000"/>
+            </a:schemeClr>
+          </a:solidFill>
+          <a:ln>
+            <a:noFill/>
+          </a:ln>
+        </p:spPr>
+        <p:style>
+          <a:lnRef idx="2">
+            <a:schemeClr val="accent1">
+              <a:shade val="50000"/>
+            </a:schemeClr>
+          </a:lnRef>
+          <a:fillRef idx="1">
+            <a:schemeClr val="accent1"/>
+          </a:fillRef>
+          <a:effectRef idx="0">
+            <a:schemeClr val="accent1"/>
+          </a:effectRef>
+          <a:fontRef idx="minor">
+            <a:schemeClr val="lt1"/>
+          </a:fontRef>
+        </p:style>
+        <p:txBody>
+          <a:bodyPr rtlCol="0" anchor="ctr"/>
+          <a:lstStyle/>
+          <a:p>
+            <a:pPr algn="ctr"/>
+            <a:endParaRPr kumimoji="1" lang="ja-JP" altLang="en-US"/>
+          </a:p>
+        </p:txBody>
+      </p:sp>
+      <p:sp>
+        <p:nvSpPr>
+          <p:cNvPr id="21" name="円/楕円 20"/>
+          <p:cNvSpPr/>
+          <p:nvPr/>
+        </p:nvSpPr>
+        <p:spPr>
+          <a:xfrm>
+            <a:off x="9711250" y="2770774"/>
+            <a:ext cx="502276" cy="1013984"/>
+          </a:xfrm>
+          <a:prstGeom prst="ellipse">
+            <a:avLst/>
+          </a:prstGeom>
+          <a:solidFill>
+            <a:srgbClr val="0070C0"/>
+          </a:solidFill>
+          <a:ln>
+            <a:noFill/>
+          </a:ln>
+        </p:spPr>
+        <p:style>
+          <a:lnRef idx="2">
+            <a:schemeClr val="accent1">
+              <a:shade val="50000"/>
+            </a:schemeClr>
+          </a:lnRef>
+          <a:fillRef idx="1">
+            <a:schemeClr val="accent1"/>
+          </a:fillRef>
+          <a:effectRef idx="0">
+            <a:schemeClr val="accent1"/>
+          </a:effectRef>
+          <a:fontRef idx="minor">
+            <a:schemeClr val="lt1"/>
+          </a:fontRef>
+        </p:style>
+        <p:txBody>
+          <a:bodyPr rtlCol="0" anchor="ctr"/>
+          <a:lstStyle/>
+          <a:p>
+            <a:pPr algn="ctr"/>
+            <a:endParaRPr kumimoji="1" lang="ja-JP" altLang="en-US"/>
+          </a:p>
+        </p:txBody>
+      </p:sp>
+      <p:sp>
+        <p:nvSpPr>
+          <p:cNvPr id="22" name="円/楕円 21"/>
+          <p:cNvSpPr/>
+          <p:nvPr/>
+        </p:nvSpPr>
+        <p:spPr>
+          <a:xfrm>
+            <a:off x="9739152" y="3129941"/>
+            <a:ext cx="269700" cy="523881"/>
+          </a:xfrm>
+          <a:prstGeom prst="ellipse">
+            <a:avLst/>
+          </a:prstGeom>
+          <a:solidFill>
+            <a:schemeClr val="accent1">
+              <a:lumMod val="60000"/>
+              <a:lumOff val="40000"/>
+            </a:schemeClr>
+          </a:solidFill>
+          <a:ln>
+            <a:noFill/>
+          </a:ln>
+        </p:spPr>
+        <p:style>
+          <a:lnRef idx="2">
+            <a:schemeClr val="accent1">
+              <a:shade val="50000"/>
+            </a:schemeClr>
+          </a:lnRef>
+          <a:fillRef idx="1">
+            <a:schemeClr val="accent1"/>
+          </a:fillRef>
+          <a:effectRef idx="0">
+            <a:schemeClr val="accent1"/>
+          </a:effectRef>
+          <a:fontRef idx="minor">
+            <a:schemeClr val="lt1"/>
+          </a:fontRef>
+        </p:style>
+        <p:txBody>
+          <a:bodyPr rtlCol="0" anchor="ctr"/>
+          <a:lstStyle/>
+          <a:p>
+            <a:pPr algn="ctr"/>
+            <a:endParaRPr kumimoji="1" lang="ja-JP" altLang="en-US"/>
+          </a:p>
+        </p:txBody>
+      </p:sp>
+    </p:spTree>
+    <p:extLst>
+      <p:ext uri="{BB962C8B-B14F-4D97-AF65-F5344CB8AC3E}">
+        <p14:creationId xmlns:p14="http://schemas.microsoft.com/office/powerpoint/2010/main" val="129349305"/>
+      </p:ext>
+    </p:extLst>
+  </p:cSld>
+  <p:clrMapOvr>
+    <a:masterClrMapping/>
+  </p:clrMapOvr>
+</p:sld>
+</file>
+
+<file path=ppt/slides/slide8.xml><?xml version="1.0" encoding="utf-8"?>
+<p:sld xmlns:a="http://schemas.openxmlformats.org/drawingml/2006/main" xmlns:r="http://schemas.openxmlformats.org/officeDocument/2006/relationships" xmlns:p="http://schemas.openxmlformats.org/presentationml/2006/main">
+  <p:cSld>
+    <p:spTree>
+      <p:nvGrpSpPr>
+        <p:cNvPr id="1" name=""/>
+        <p:cNvGrpSpPr/>
+        <p:nvPr/>
+      </p:nvGrpSpPr>
+      <p:grpSpPr>
+        <a:xfrm>
+          <a:off x="0" y="0"/>
+          <a:ext cx="0" cy="0"/>
+          <a:chOff x="0" y="0"/>
+          <a:chExt cx="0" cy="0"/>
+        </a:xfrm>
+      </p:grpSpPr>
       <p:pic>
         <p:nvPicPr>
           <p:cNvPr id="4" name="図 3"/>
@@ -7000,7 +8989,7 @@
 </p:sld>
 </file>
 
-<file path=ppt/slides/slide8.xml><?xml version="1.0" encoding="utf-8"?>
+<file path=ppt/slides/slide9.xml><?xml version="1.0" encoding="utf-8"?>
 <p:sld xmlns:a="http://schemas.openxmlformats.org/drawingml/2006/main" xmlns:r="http://schemas.openxmlformats.org/officeDocument/2006/relationships" xmlns:p="http://schemas.openxmlformats.org/presentationml/2006/main">
   <p:cSld>
     <p:spTree>
@@ -7671,689 +9660,6 @@
     <p:extLst>
       <p:ext uri="{BB962C8B-B14F-4D97-AF65-F5344CB8AC3E}">
         <p14:creationId xmlns:p14="http://schemas.microsoft.com/office/powerpoint/2010/main" val="1223276308"/>
-      </p:ext>
-    </p:extLst>
-  </p:cSld>
-  <p:clrMapOvr>
-    <a:masterClrMapping/>
-  </p:clrMapOvr>
-</p:sld>
-</file>
-
-<file path=ppt/slides/slide9.xml><?xml version="1.0" encoding="utf-8"?>
-<p:sld xmlns:a="http://schemas.openxmlformats.org/drawingml/2006/main" xmlns:r="http://schemas.openxmlformats.org/officeDocument/2006/relationships" xmlns:p="http://schemas.openxmlformats.org/presentationml/2006/main">
-  <p:cSld>
-    <p:spTree>
-      <p:nvGrpSpPr>
-        <p:cNvPr id="1" name="">
-          <a:extLst>
-            <a:ext uri="{FF2B5EF4-FFF2-40B4-BE49-F238E27FC236}">
-              <a16:creationId xmlns:a16="http://schemas.microsoft.com/office/drawing/2014/main" id="{231E612F-C01C-A1BB-AF0C-840874130AB4}"/>
-            </a:ext>
-          </a:extLst>
-        </p:cNvPr>
-        <p:cNvGrpSpPr/>
-        <p:nvPr/>
-      </p:nvGrpSpPr>
-      <p:grpSpPr>
-        <a:xfrm>
-          <a:off x="0" y="0"/>
-          <a:ext cx="0" cy="0"/>
-          <a:chOff x="0" y="0"/>
-          <a:chExt cx="0" cy="0"/>
-        </a:xfrm>
-      </p:grpSpPr>
-      <p:pic>
-        <p:nvPicPr>
-          <p:cNvPr id="4" name="図 3">
-            <a:extLst>
-              <a:ext uri="{FF2B5EF4-FFF2-40B4-BE49-F238E27FC236}">
-                <a16:creationId xmlns:a16="http://schemas.microsoft.com/office/drawing/2014/main" id="{4E63FED6-768C-7D40-8DE6-523D551ADB46}"/>
-              </a:ext>
-            </a:extLst>
-          </p:cNvPr>
-          <p:cNvPicPr>
-            <a:picLocks noChangeAspect="1"/>
-          </p:cNvPicPr>
-          <p:nvPr/>
-        </p:nvPicPr>
-        <p:blipFill>
-          <a:blip r:embed="rId2">
-            <a:duotone>
-              <a:schemeClr val="accent4">
-                <a:shade val="45000"/>
-                <a:satMod val="135000"/>
-              </a:schemeClr>
-              <a:prstClr val="white"/>
-            </a:duotone>
-          </a:blip>
-          <a:stretch>
-            <a:fillRect/>
-          </a:stretch>
-        </p:blipFill>
-        <p:spPr>
-          <a:xfrm>
-            <a:off x="6346155" y="1488358"/>
-            <a:ext cx="5834378" cy="4444369"/>
-          </a:xfrm>
-          <a:prstGeom prst="rect">
-            <a:avLst/>
-          </a:prstGeom>
-          <a:effectLst>
-            <a:innerShdw blurRad="635000" dist="508000" dir="8100000">
-              <a:prstClr val="black">
-                <a:alpha val="25000"/>
-              </a:prstClr>
-            </a:innerShdw>
-            <a:softEdge rad="127000"/>
-          </a:effectLst>
-        </p:spPr>
-      </p:pic>
-      <p:sp>
-        <p:nvSpPr>
-          <p:cNvPr id="14" name="円/楕円 13">
-            <a:extLst>
-              <a:ext uri="{FF2B5EF4-FFF2-40B4-BE49-F238E27FC236}">
-                <a16:creationId xmlns:a16="http://schemas.microsoft.com/office/drawing/2014/main" id="{335FA8B7-82A4-6080-1469-223A2BFE1B2C}"/>
-              </a:ext>
-            </a:extLst>
-          </p:cNvPr>
-          <p:cNvSpPr/>
-          <p:nvPr/>
-        </p:nvSpPr>
-        <p:spPr>
-          <a:xfrm>
-            <a:off x="8291125" y="2770775"/>
-            <a:ext cx="502276" cy="1013984"/>
-          </a:xfrm>
-          <a:prstGeom prst="ellipse">
-            <a:avLst/>
-          </a:prstGeom>
-          <a:solidFill>
-            <a:schemeClr val="accent4">
-              <a:lumMod val="75000"/>
-            </a:schemeClr>
-          </a:solidFill>
-          <a:ln>
-            <a:noFill/>
-          </a:ln>
-        </p:spPr>
-        <p:style>
-          <a:lnRef idx="2">
-            <a:schemeClr val="accent1">
-              <a:shade val="50000"/>
-            </a:schemeClr>
-          </a:lnRef>
-          <a:fillRef idx="1">
-            <a:schemeClr val="accent1"/>
-          </a:fillRef>
-          <a:effectRef idx="0">
-            <a:schemeClr val="accent1"/>
-          </a:effectRef>
-          <a:fontRef idx="minor">
-            <a:schemeClr val="lt1"/>
-          </a:fontRef>
-        </p:style>
-        <p:txBody>
-          <a:bodyPr rtlCol="0" anchor="ctr"/>
-          <a:lstStyle/>
-          <a:p>
-            <a:pPr algn="ctr"/>
-            <a:endParaRPr kumimoji="1" lang="ja-JP" altLang="en-US"/>
-          </a:p>
-        </p:txBody>
-      </p:sp>
-      <p:sp>
-        <p:nvSpPr>
-          <p:cNvPr id="15" name="円/楕円 14">
-            <a:extLst>
-              <a:ext uri="{FF2B5EF4-FFF2-40B4-BE49-F238E27FC236}">
-                <a16:creationId xmlns:a16="http://schemas.microsoft.com/office/drawing/2014/main" id="{6D659C7C-2495-46AA-DC92-2393C40358B7}"/>
-              </a:ext>
-            </a:extLst>
-          </p:cNvPr>
-          <p:cNvSpPr/>
-          <p:nvPr/>
-        </p:nvSpPr>
-        <p:spPr>
-          <a:xfrm>
-            <a:off x="8499333" y="3129942"/>
-            <a:ext cx="269700" cy="523881"/>
-          </a:xfrm>
-          <a:prstGeom prst="ellipse">
-            <a:avLst/>
-          </a:prstGeom>
-          <a:solidFill>
-            <a:schemeClr val="accent4">
-              <a:lumMod val="60000"/>
-              <a:lumOff val="40000"/>
-            </a:schemeClr>
-          </a:solidFill>
-          <a:ln>
-            <a:noFill/>
-          </a:ln>
-        </p:spPr>
-        <p:style>
-          <a:lnRef idx="2">
-            <a:schemeClr val="accent1">
-              <a:shade val="50000"/>
-            </a:schemeClr>
-          </a:lnRef>
-          <a:fillRef idx="1">
-            <a:schemeClr val="accent1"/>
-          </a:fillRef>
-          <a:effectRef idx="0">
-            <a:schemeClr val="accent1"/>
-          </a:effectRef>
-          <a:fontRef idx="minor">
-            <a:schemeClr val="lt1"/>
-          </a:fontRef>
-        </p:style>
-        <p:txBody>
-          <a:bodyPr rtlCol="0" anchor="ctr"/>
-          <a:lstStyle/>
-          <a:p>
-            <a:pPr algn="ctr"/>
-            <a:endParaRPr kumimoji="1" lang="ja-JP" altLang="en-US"/>
-          </a:p>
-        </p:txBody>
-      </p:sp>
-      <p:sp>
-        <p:nvSpPr>
-          <p:cNvPr id="16" name="円/楕円 15">
-            <a:extLst>
-              <a:ext uri="{FF2B5EF4-FFF2-40B4-BE49-F238E27FC236}">
-                <a16:creationId xmlns:a16="http://schemas.microsoft.com/office/drawing/2014/main" id="{11CDD796-4BB8-B134-004A-BC3C1B394329}"/>
-              </a:ext>
-            </a:extLst>
-          </p:cNvPr>
-          <p:cNvSpPr/>
-          <p:nvPr/>
-        </p:nvSpPr>
-        <p:spPr>
-          <a:xfrm>
-            <a:off x="9707045" y="2770775"/>
-            <a:ext cx="502276" cy="1013984"/>
-          </a:xfrm>
-          <a:prstGeom prst="ellipse">
-            <a:avLst/>
-          </a:prstGeom>
-          <a:solidFill>
-            <a:schemeClr val="accent4">
-              <a:lumMod val="75000"/>
-            </a:schemeClr>
-          </a:solidFill>
-          <a:ln>
-            <a:noFill/>
-          </a:ln>
-        </p:spPr>
-        <p:style>
-          <a:lnRef idx="2">
-            <a:schemeClr val="accent1">
-              <a:shade val="50000"/>
-            </a:schemeClr>
-          </a:lnRef>
-          <a:fillRef idx="1">
-            <a:schemeClr val="accent1"/>
-          </a:fillRef>
-          <a:effectRef idx="0">
-            <a:schemeClr val="accent1"/>
-          </a:effectRef>
-          <a:fontRef idx="minor">
-            <a:schemeClr val="lt1"/>
-          </a:fontRef>
-        </p:style>
-        <p:txBody>
-          <a:bodyPr rtlCol="0" anchor="ctr"/>
-          <a:lstStyle/>
-          <a:p>
-            <a:pPr algn="ctr"/>
-            <a:endParaRPr kumimoji="1" lang="ja-JP" altLang="en-US"/>
-          </a:p>
-        </p:txBody>
-      </p:sp>
-      <p:sp>
-        <p:nvSpPr>
-          <p:cNvPr id="17" name="円/楕円 16">
-            <a:extLst>
-              <a:ext uri="{FF2B5EF4-FFF2-40B4-BE49-F238E27FC236}">
-                <a16:creationId xmlns:a16="http://schemas.microsoft.com/office/drawing/2014/main" id="{56D16683-6980-C15F-423F-E716C9133DAA}"/>
-              </a:ext>
-            </a:extLst>
-          </p:cNvPr>
-          <p:cNvSpPr/>
-          <p:nvPr/>
-        </p:nvSpPr>
-        <p:spPr>
-          <a:xfrm>
-            <a:off x="9734947" y="3129942"/>
-            <a:ext cx="269700" cy="523881"/>
-          </a:xfrm>
-          <a:prstGeom prst="ellipse">
-            <a:avLst/>
-          </a:prstGeom>
-          <a:solidFill>
-            <a:schemeClr val="accent4">
-              <a:lumMod val="60000"/>
-              <a:lumOff val="40000"/>
-            </a:schemeClr>
-          </a:solidFill>
-          <a:ln>
-            <a:noFill/>
-          </a:ln>
-        </p:spPr>
-        <p:style>
-          <a:lnRef idx="2">
-            <a:schemeClr val="accent1">
-              <a:shade val="50000"/>
-            </a:schemeClr>
-          </a:lnRef>
-          <a:fillRef idx="1">
-            <a:schemeClr val="accent1"/>
-          </a:fillRef>
-          <a:effectRef idx="0">
-            <a:schemeClr val="accent1"/>
-          </a:effectRef>
-          <a:fontRef idx="minor">
-            <a:schemeClr val="lt1"/>
-          </a:fontRef>
-        </p:style>
-        <p:txBody>
-          <a:bodyPr rtlCol="0" anchor="ctr"/>
-          <a:lstStyle/>
-          <a:p>
-            <a:pPr algn="ctr"/>
-            <a:endParaRPr kumimoji="1" lang="ja-JP" altLang="en-US"/>
-          </a:p>
-        </p:txBody>
-      </p:sp>
-      <p:sp>
-        <p:nvSpPr>
-          <p:cNvPr id="19" name="円/楕円 18">
-            <a:extLst>
-              <a:ext uri="{FF2B5EF4-FFF2-40B4-BE49-F238E27FC236}">
-                <a16:creationId xmlns:a16="http://schemas.microsoft.com/office/drawing/2014/main" id="{AF6EBA17-3566-BCE3-784C-71365DB8FC11}"/>
-              </a:ext>
-            </a:extLst>
-          </p:cNvPr>
-          <p:cNvSpPr/>
-          <p:nvPr/>
-        </p:nvSpPr>
-        <p:spPr>
-          <a:xfrm rot="19800000">
-            <a:off x="-47054" y="1624942"/>
-            <a:ext cx="5130520" cy="4087744"/>
-          </a:xfrm>
-          <a:prstGeom prst="ellipse">
-            <a:avLst/>
-          </a:prstGeom>
-          <a:solidFill>
-            <a:schemeClr val="accent4">
-              <a:lumMod val="40000"/>
-              <a:lumOff val="60000"/>
-            </a:schemeClr>
-          </a:solidFill>
-          <a:ln>
-            <a:noFill/>
-          </a:ln>
-        </p:spPr>
-        <p:style>
-          <a:lnRef idx="2">
-            <a:schemeClr val="accent1">
-              <a:shade val="50000"/>
-            </a:schemeClr>
-          </a:lnRef>
-          <a:fillRef idx="1">
-            <a:schemeClr val="accent1"/>
-          </a:fillRef>
-          <a:effectRef idx="0">
-            <a:schemeClr val="accent1"/>
-          </a:effectRef>
-          <a:fontRef idx="minor">
-            <a:schemeClr val="lt1"/>
-          </a:fontRef>
-        </p:style>
-        <p:txBody>
-          <a:bodyPr rtlCol="0" anchor="ctr"/>
-          <a:lstStyle/>
-          <a:p>
-            <a:pPr algn="ctr"/>
-            <a:endParaRPr kumimoji="1" lang="ja-JP" altLang="en-US"/>
-          </a:p>
-        </p:txBody>
-      </p:sp>
-      <p:sp>
-        <p:nvSpPr>
-          <p:cNvPr id="20" name="円/楕円 19">
-            <a:extLst>
-              <a:ext uri="{FF2B5EF4-FFF2-40B4-BE49-F238E27FC236}">
-                <a16:creationId xmlns:a16="http://schemas.microsoft.com/office/drawing/2014/main" id="{4D1BB2D7-1F6A-22EB-39DF-09C668D4909A}"/>
-              </a:ext>
-            </a:extLst>
-          </p:cNvPr>
-          <p:cNvSpPr/>
-          <p:nvPr/>
-        </p:nvSpPr>
-        <p:spPr>
-          <a:xfrm rot="1800000" flipH="1">
-            <a:off x="890958" y="1624941"/>
-            <a:ext cx="5130520" cy="4087744"/>
-          </a:xfrm>
-          <a:prstGeom prst="ellipse">
-            <a:avLst/>
-          </a:prstGeom>
-          <a:solidFill>
-            <a:schemeClr val="accent4">
-              <a:lumMod val="40000"/>
-              <a:lumOff val="60000"/>
-            </a:schemeClr>
-          </a:solidFill>
-          <a:ln>
-            <a:noFill/>
-          </a:ln>
-        </p:spPr>
-        <p:style>
-          <a:lnRef idx="2">
-            <a:schemeClr val="accent1">
-              <a:shade val="50000"/>
-            </a:schemeClr>
-          </a:lnRef>
-          <a:fillRef idx="1">
-            <a:schemeClr val="accent1"/>
-          </a:fillRef>
-          <a:effectRef idx="0">
-            <a:schemeClr val="accent1"/>
-          </a:effectRef>
-          <a:fontRef idx="minor">
-            <a:schemeClr val="lt1"/>
-          </a:fontRef>
-        </p:style>
-        <p:txBody>
-          <a:bodyPr rtlCol="0" anchor="ctr"/>
-          <a:lstStyle/>
-          <a:p>
-            <a:pPr algn="ctr"/>
-            <a:endParaRPr kumimoji="1" lang="ja-JP" altLang="en-US"/>
-          </a:p>
-        </p:txBody>
-      </p:sp>
-      <p:sp>
-        <p:nvSpPr>
-          <p:cNvPr id="21" name="円/楕円 20">
-            <a:extLst>
-              <a:ext uri="{FF2B5EF4-FFF2-40B4-BE49-F238E27FC236}">
-                <a16:creationId xmlns:a16="http://schemas.microsoft.com/office/drawing/2014/main" id="{8216F909-87EE-1BEB-99DA-4B1ED89B8584}"/>
-              </a:ext>
-            </a:extLst>
-          </p:cNvPr>
-          <p:cNvSpPr/>
-          <p:nvPr/>
-        </p:nvSpPr>
-        <p:spPr>
-          <a:xfrm>
-            <a:off x="1048624" y="5179088"/>
-            <a:ext cx="3812146" cy="746975"/>
-          </a:xfrm>
-          <a:prstGeom prst="ellipse">
-            <a:avLst/>
-          </a:prstGeom>
-          <a:solidFill>
-            <a:schemeClr val="accent4">
-              <a:lumMod val="40000"/>
-              <a:lumOff val="60000"/>
-            </a:schemeClr>
-          </a:solidFill>
-          <a:ln>
-            <a:noFill/>
-          </a:ln>
-        </p:spPr>
-        <p:style>
-          <a:lnRef idx="2">
-            <a:schemeClr val="accent1">
-              <a:shade val="50000"/>
-            </a:schemeClr>
-          </a:lnRef>
-          <a:fillRef idx="1">
-            <a:schemeClr val="accent1"/>
-          </a:fillRef>
-          <a:effectRef idx="0">
-            <a:schemeClr val="accent1"/>
-          </a:effectRef>
-          <a:fontRef idx="minor">
-            <a:schemeClr val="lt1"/>
-          </a:fontRef>
-        </p:style>
-        <p:txBody>
-          <a:bodyPr rtlCol="0" anchor="ctr"/>
-          <a:lstStyle/>
-          <a:p>
-            <a:pPr algn="ctr"/>
-            <a:endParaRPr kumimoji="1" lang="ja-JP" altLang="en-US"/>
-          </a:p>
-        </p:txBody>
-      </p:sp>
-      <p:sp>
-        <p:nvSpPr>
-          <p:cNvPr id="22" name="円/楕円 21">
-            <a:extLst>
-              <a:ext uri="{FF2B5EF4-FFF2-40B4-BE49-F238E27FC236}">
-                <a16:creationId xmlns:a16="http://schemas.microsoft.com/office/drawing/2014/main" id="{1ADAFCC3-28EA-0F18-D83A-57B11C9F7393}"/>
-              </a:ext>
-            </a:extLst>
-          </p:cNvPr>
-          <p:cNvSpPr/>
-          <p:nvPr/>
-        </p:nvSpPr>
-        <p:spPr>
-          <a:xfrm>
-            <a:off x="2015930" y="2764110"/>
-            <a:ext cx="502276" cy="1013984"/>
-          </a:xfrm>
-          <a:prstGeom prst="ellipse">
-            <a:avLst/>
-          </a:prstGeom>
-          <a:solidFill>
-            <a:schemeClr val="accent4">
-              <a:lumMod val="75000"/>
-            </a:schemeClr>
-          </a:solidFill>
-          <a:ln>
-            <a:noFill/>
-          </a:ln>
-        </p:spPr>
-        <p:style>
-          <a:lnRef idx="2">
-            <a:schemeClr val="accent1">
-              <a:shade val="50000"/>
-            </a:schemeClr>
-          </a:lnRef>
-          <a:fillRef idx="1">
-            <a:schemeClr val="accent1"/>
-          </a:fillRef>
-          <a:effectRef idx="0">
-            <a:schemeClr val="accent1"/>
-          </a:effectRef>
-          <a:fontRef idx="minor">
-            <a:schemeClr val="lt1"/>
-          </a:fontRef>
-        </p:style>
-        <p:txBody>
-          <a:bodyPr rtlCol="0" anchor="ctr"/>
-          <a:lstStyle/>
-          <a:p>
-            <a:pPr algn="ctr"/>
-            <a:endParaRPr kumimoji="1" lang="ja-JP" altLang="en-US"/>
-          </a:p>
-        </p:txBody>
-      </p:sp>
-      <p:sp>
-        <p:nvSpPr>
-          <p:cNvPr id="23" name="円/楕円 22">
-            <a:extLst>
-              <a:ext uri="{FF2B5EF4-FFF2-40B4-BE49-F238E27FC236}">
-                <a16:creationId xmlns:a16="http://schemas.microsoft.com/office/drawing/2014/main" id="{1EFC42C8-E666-E3D2-DB09-7ED813E29CFE}"/>
-              </a:ext>
-            </a:extLst>
-          </p:cNvPr>
-          <p:cNvSpPr/>
-          <p:nvPr/>
-        </p:nvSpPr>
-        <p:spPr>
-          <a:xfrm>
-            <a:off x="2224138" y="3123277"/>
-            <a:ext cx="269700" cy="523881"/>
-          </a:xfrm>
-          <a:prstGeom prst="ellipse">
-            <a:avLst/>
-          </a:prstGeom>
-          <a:solidFill>
-            <a:schemeClr val="accent4">
-              <a:lumMod val="60000"/>
-              <a:lumOff val="40000"/>
-            </a:schemeClr>
-          </a:solidFill>
-          <a:ln>
-            <a:noFill/>
-          </a:ln>
-        </p:spPr>
-        <p:style>
-          <a:lnRef idx="2">
-            <a:schemeClr val="accent1">
-              <a:shade val="50000"/>
-            </a:schemeClr>
-          </a:lnRef>
-          <a:fillRef idx="1">
-            <a:schemeClr val="accent1"/>
-          </a:fillRef>
-          <a:effectRef idx="0">
-            <a:schemeClr val="accent1"/>
-          </a:effectRef>
-          <a:fontRef idx="minor">
-            <a:schemeClr val="lt1"/>
-          </a:fontRef>
-        </p:style>
-        <p:txBody>
-          <a:bodyPr rtlCol="0" anchor="ctr"/>
-          <a:lstStyle/>
-          <a:p>
-            <a:pPr algn="ctr"/>
-            <a:endParaRPr kumimoji="1" lang="ja-JP" altLang="en-US"/>
-          </a:p>
-        </p:txBody>
-      </p:sp>
-      <p:sp>
-        <p:nvSpPr>
-          <p:cNvPr id="24" name="円/楕円 23">
-            <a:extLst>
-              <a:ext uri="{FF2B5EF4-FFF2-40B4-BE49-F238E27FC236}">
-                <a16:creationId xmlns:a16="http://schemas.microsoft.com/office/drawing/2014/main" id="{C4BDA62F-2069-4821-73C9-CDD3249DCC10}"/>
-              </a:ext>
-            </a:extLst>
-          </p:cNvPr>
-          <p:cNvSpPr/>
-          <p:nvPr/>
-        </p:nvSpPr>
-        <p:spPr>
-          <a:xfrm>
-            <a:off x="3431850" y="2764110"/>
-            <a:ext cx="502276" cy="1013984"/>
-          </a:xfrm>
-          <a:prstGeom prst="ellipse">
-            <a:avLst/>
-          </a:prstGeom>
-          <a:solidFill>
-            <a:schemeClr val="accent4">
-              <a:lumMod val="75000"/>
-            </a:schemeClr>
-          </a:solidFill>
-          <a:ln>
-            <a:noFill/>
-          </a:ln>
-        </p:spPr>
-        <p:style>
-          <a:lnRef idx="2">
-            <a:schemeClr val="accent1">
-              <a:shade val="50000"/>
-            </a:schemeClr>
-          </a:lnRef>
-          <a:fillRef idx="1">
-            <a:schemeClr val="accent1"/>
-          </a:fillRef>
-          <a:effectRef idx="0">
-            <a:schemeClr val="accent1"/>
-          </a:effectRef>
-          <a:fontRef idx="minor">
-            <a:schemeClr val="lt1"/>
-          </a:fontRef>
-        </p:style>
-        <p:txBody>
-          <a:bodyPr rtlCol="0" anchor="ctr"/>
-          <a:lstStyle/>
-          <a:p>
-            <a:pPr algn="ctr"/>
-            <a:endParaRPr kumimoji="1" lang="ja-JP" altLang="en-US"/>
-          </a:p>
-        </p:txBody>
-      </p:sp>
-      <p:sp>
-        <p:nvSpPr>
-          <p:cNvPr id="25" name="円/楕円 24">
-            <a:extLst>
-              <a:ext uri="{FF2B5EF4-FFF2-40B4-BE49-F238E27FC236}">
-                <a16:creationId xmlns:a16="http://schemas.microsoft.com/office/drawing/2014/main" id="{752FAA75-A230-8B45-6C3F-FE7E3BB65BE8}"/>
-              </a:ext>
-            </a:extLst>
-          </p:cNvPr>
-          <p:cNvSpPr/>
-          <p:nvPr/>
-        </p:nvSpPr>
-        <p:spPr>
-          <a:xfrm>
-            <a:off x="3459752" y="3123277"/>
-            <a:ext cx="269700" cy="523881"/>
-          </a:xfrm>
-          <a:prstGeom prst="ellipse">
-            <a:avLst/>
-          </a:prstGeom>
-          <a:solidFill>
-            <a:schemeClr val="accent4">
-              <a:lumMod val="60000"/>
-              <a:lumOff val="40000"/>
-            </a:schemeClr>
-          </a:solidFill>
-          <a:ln>
-            <a:noFill/>
-          </a:ln>
-        </p:spPr>
-        <p:style>
-          <a:lnRef idx="2">
-            <a:schemeClr val="accent1">
-              <a:shade val="50000"/>
-            </a:schemeClr>
-          </a:lnRef>
-          <a:fillRef idx="1">
-            <a:schemeClr val="accent1"/>
-          </a:fillRef>
-          <a:effectRef idx="0">
-            <a:schemeClr val="accent1"/>
-          </a:effectRef>
-          <a:fontRef idx="minor">
-            <a:schemeClr val="lt1"/>
-          </a:fontRef>
-        </p:style>
-        <p:txBody>
-          <a:bodyPr rtlCol="0" anchor="ctr"/>
-          <a:lstStyle/>
-          <a:p>
-            <a:pPr algn="ctr"/>
-            <a:endParaRPr kumimoji="1" lang="ja-JP" altLang="en-US"/>
-          </a:p>
-        </p:txBody>
-      </p:sp>
-    </p:spTree>
-    <p:extLst>
-      <p:ext uri="{BB962C8B-B14F-4D97-AF65-F5344CB8AC3E}">
-        <p14:creationId xmlns:p14="http://schemas.microsoft.com/office/powerpoint/2010/main" val="1240884523"/>
       </p:ext>
     </p:extLst>
   </p:cSld>
